--- a/section-2-case-study/slides/preschool_demand_supply_slides.pptx
+++ b/section-2-case-study/slides/preschool_demand_supply_slides.pptx
@@ -22,6 +22,7 @@
     <p:sldId id="267" r:id="rId18"/>
     <p:sldId id="268" r:id="rId19"/>
     <p:sldId id="269" r:id="rId20"/>
+    <p:sldId id="270" r:id="rId21"/>
   </p:sldIdLst>
   <p:sldSz cy="6858000" cx="12191675"/>
   <p:notesSz cx="6858000" cy="9144000"/>
@@ -270,7 +271,7 @@
       </p15:sldGuideLst>
     </p:ext>
     <p:ext uri="GoogleSlidesCustomDataVersion2">
-      <go:slidesCustomData xmlns:go="http://customooxmlschemas.google.com/" r:id="rId21" roundtripDataSignature="AMtx7mgPwNgRv14ZH0aRxcNKTMB/oCbhYA=="/>
+      <go:slidesCustomData xmlns:go="http://customooxmlschemas.google.com/" r:id="rId22" roundtripDataSignature="AMtx7mi/uiwOdgzR5DvilS+tCtOjk7dB/w=="/>
     </p:ext>
   </p:extLst>
 </p:presentation>
@@ -1117,7 +1118,7 @@
       </p:grpSpPr>
       <p:sp>
         <p:nvSpPr>
-          <p:cNvPr id="198" name="Google Shape;198;g3f5588f5b17_0_316:notes"/>
+          <p:cNvPr id="198" name="Google Shape;198;g3f55c5dc601_0_9:notes"/>
           <p:cNvSpPr txBox="1"/>
           <p:nvPr>
             <p:ph idx="1" type="body"/>
@@ -1156,7 +1157,7 @@
       </p:sp>
       <p:sp>
         <p:nvSpPr>
-          <p:cNvPr id="199" name="Google Shape;199;g3f5588f5b17_0_316:notes"/>
+          <p:cNvPr id="199" name="Google Shape;199;g3f55c5dc601_0_9:notes"/>
           <p:cNvSpPr/>
           <p:nvPr>
             <p:ph idx="2" type="sldImg"/>
@@ -1216,7 +1217,7 @@
       </p:grpSpPr>
       <p:sp>
         <p:nvSpPr>
-          <p:cNvPr id="208" name="Google Shape;208;g3f5588f5b17_0_328:notes"/>
+          <p:cNvPr id="208" name="Google Shape;208;g3f5588f5b17_0_316:notes"/>
           <p:cNvSpPr txBox="1"/>
           <p:nvPr>
             <p:ph idx="1" type="body"/>
@@ -1255,7 +1256,106 @@
       </p:sp>
       <p:sp>
         <p:nvSpPr>
-          <p:cNvPr id="209" name="Google Shape;209;g3f5588f5b17_0_328:notes"/>
+          <p:cNvPr id="209" name="Google Shape;209;g3f5588f5b17_0_316:notes"/>
+          <p:cNvSpPr/>
+          <p:nvPr>
+            <p:ph idx="2" type="sldImg"/>
+          </p:nvPr>
+        </p:nvSpPr>
+        <p:spPr>
+          <a:xfrm>
+            <a:off x="1143225" y="685800"/>
+            <a:ext cx="4572300" cy="3429000"/>
+          </a:xfrm>
+          <a:custGeom>
+            <a:rect b="b" l="l" r="r" t="t"/>
+            <a:pathLst>
+              <a:path extrusionOk="0" h="120000" w="120000">
+                <a:moveTo>
+                  <a:pt x="0" y="0"/>
+                </a:moveTo>
+                <a:lnTo>
+                  <a:pt x="120000" y="0"/>
+                </a:lnTo>
+                <a:lnTo>
+                  <a:pt x="120000" y="120000"/>
+                </a:lnTo>
+                <a:lnTo>
+                  <a:pt x="0" y="120000"/>
+                </a:lnTo>
+                <a:close/>
+              </a:path>
+            </a:pathLst>
+          </a:custGeom>
+        </p:spPr>
+      </p:sp>
+    </p:spTree>
+  </p:cSld>
+  <p:clrMapOvr>
+    <a:masterClrMapping/>
+  </p:clrMapOvr>
+</p:notes>
+</file>
+
+<file path=ppt/notesSlides/notesSlide15.xml><?xml version="1.0" encoding="utf-8"?>
+<p:notes xmlns:a="http://schemas.openxmlformats.org/drawingml/2006/main" xmlns:r="http://schemas.openxmlformats.org/officeDocument/2006/relationships" xmlns:mc="http://schemas.openxmlformats.org/markup-compatibility/2006" xmlns:mv="urn:schemas-microsoft-com:mac:vml" xmlns:p="http://schemas.openxmlformats.org/presentationml/2006/main" xmlns:c="http://schemas.openxmlformats.org/drawingml/2006/chart" xmlns:dgm="http://schemas.openxmlformats.org/drawingml/2006/diagram" xmlns:o="urn:schemas-microsoft-com:office:office" xmlns:v="urn:schemas-microsoft-com:vml" xmlns:pvml="urn:schemas-microsoft-com:office:powerpoint" xmlns:com="http://schemas.openxmlformats.org/drawingml/2006/compatibility" xmlns:p14="http://schemas.microsoft.com/office/powerpoint/2010/main" xmlns:p15="http://schemas.microsoft.com/office/powerpoint/2012/main" xmlns:ahyp="http://schemas.microsoft.com/office/drawing/2018/hyperlinkcolor" showMasterPhAnim="0" showMasterSp="0">
+  <p:cSld>
+    <p:spTree>
+      <p:nvGrpSpPr>
+        <p:cNvPr id="218" name="Shape 218"/>
+        <p:cNvGrpSpPr/>
+        <p:nvPr/>
+      </p:nvGrpSpPr>
+      <p:grpSpPr>
+        <a:xfrm>
+          <a:off x="0" y="0"/>
+          <a:ext cx="0" cy="0"/>
+          <a:chOff x="0" y="0"/>
+          <a:chExt cx="0" cy="0"/>
+        </a:xfrm>
+      </p:grpSpPr>
+      <p:sp>
+        <p:nvSpPr>
+          <p:cNvPr id="219" name="Google Shape;219;g3f5588f5b17_0_328:notes"/>
+          <p:cNvSpPr txBox="1"/>
+          <p:nvPr>
+            <p:ph idx="1" type="body"/>
+          </p:nvPr>
+        </p:nvSpPr>
+        <p:spPr>
+          <a:xfrm>
+            <a:off x="685800" y="4343400"/>
+            <a:ext cx="5486400" cy="4114800"/>
+          </a:xfrm>
+          <a:prstGeom prst="rect">
+            <a:avLst/>
+          </a:prstGeom>
+        </p:spPr>
+        <p:txBody>
+          <a:bodyPr anchorCtr="0" anchor="t" bIns="91425" lIns="91425" spcFirstLastPara="1" rIns="91425" wrap="square" tIns="91425">
+            <a:noAutofit/>
+          </a:bodyPr>
+          <a:lstStyle/>
+          <a:p>
+            <a:pPr indent="0" lvl="0" marL="0" rtl="0" algn="l">
+              <a:spcBef>
+                <a:spcPts val="0"/>
+              </a:spcBef>
+              <a:spcAft>
+                <a:spcPts val="0"/>
+              </a:spcAft>
+              <a:buNone/>
+            </a:pPr>
+            <a:r>
+              <a:t/>
+            </a:r>
+            <a:endParaRPr/>
+          </a:p>
+        </p:txBody>
+      </p:sp>
+      <p:sp>
+        <p:nvSpPr>
+          <p:cNvPr id="220" name="Google Shape;220;g3f5588f5b17_0_328:notes"/>
           <p:cNvSpPr/>
           <p:nvPr>
             <p:ph idx="2" type="sldImg"/>
@@ -11892,9 +11992,37 @@
           <a:chExt cx="0" cy="0"/>
         </a:xfrm>
       </p:grpSpPr>
+      <p:pic>
+        <p:nvPicPr>
+          <p:cNvPr id="172" name="Google Shape;172;g3f5588f5b17_0_258" title="06_gap_quadrant_2026_vs_2031.png"/>
+          <p:cNvPicPr preferRelativeResize="0"/>
+          <p:nvPr/>
+        </p:nvPicPr>
+        <p:blipFill>
+          <a:blip r:embed="rId3">
+            <a:alphaModFix/>
+          </a:blip>
+          <a:stretch>
+            <a:fillRect/>
+          </a:stretch>
+        </p:blipFill>
+        <p:spPr>
+          <a:xfrm>
+            <a:off x="157125" y="1260957"/>
+            <a:ext cx="5183558" cy="5187837"/>
+          </a:xfrm>
+          <a:prstGeom prst="rect">
+            <a:avLst/>
+          </a:prstGeom>
+          <a:noFill/>
+          <a:ln>
+            <a:noFill/>
+          </a:ln>
+        </p:spPr>
+      </p:pic>
       <p:sp>
         <p:nvSpPr>
-          <p:cNvPr id="172" name="Google Shape;172;g3f5588f5b17_0_258"/>
+          <p:cNvPr id="173" name="Google Shape;173;g3f5588f5b17_0_258"/>
           <p:cNvSpPr txBox="1"/>
           <p:nvPr/>
         </p:nvSpPr>
@@ -11943,7 +12071,7 @@
       </p:sp>
       <p:sp>
         <p:nvSpPr>
-          <p:cNvPr id="173" name="Google Shape;173;g3f5588f5b17_0_258"/>
+          <p:cNvPr id="174" name="Google Shape;174;g3f5588f5b17_0_258"/>
           <p:cNvSpPr txBox="1"/>
           <p:nvPr/>
         </p:nvSpPr>
@@ -11996,7 +12124,7 @@
       </p:sp>
       <p:cxnSp>
         <p:nvCxnSpPr>
-          <p:cNvPr id="174" name="Google Shape;174;g3f5588f5b17_0_258"/>
+          <p:cNvPr id="175" name="Google Shape;175;g3f5588f5b17_0_258"/>
           <p:cNvCxnSpPr/>
           <p:nvPr/>
         </p:nvCxnSpPr>
@@ -12029,7 +12157,7 @@
       </p:cxnSp>
       <p:sp>
         <p:nvSpPr>
-          <p:cNvPr id="175" name="Google Shape;175;g3f5588f5b17_0_258"/>
+          <p:cNvPr id="176" name="Google Shape;176;g3f5588f5b17_0_258"/>
           <p:cNvSpPr txBox="1"/>
           <p:nvPr/>
         </p:nvSpPr>
@@ -12096,34 +12224,6 @@
           </a:p>
         </p:txBody>
       </p:sp>
-      <p:pic>
-        <p:nvPicPr>
-          <p:cNvPr id="176" name="Google Shape;176;g3f5588f5b17_0_258"/>
-          <p:cNvPicPr preferRelativeResize="0"/>
-          <p:nvPr/>
-        </p:nvPicPr>
-        <p:blipFill>
-          <a:blip r:embed="rId3">
-            <a:alphaModFix/>
-          </a:blip>
-          <a:stretch>
-            <a:fillRect/>
-          </a:stretch>
-        </p:blipFill>
-        <p:spPr>
-          <a:xfrm>
-            <a:off x="157125" y="1321800"/>
-            <a:ext cx="5115551" cy="5110924"/>
-          </a:xfrm>
-          <a:prstGeom prst="rect">
-            <a:avLst/>
-          </a:prstGeom>
-          <a:noFill/>
-          <a:ln>
-            <a:noFill/>
-          </a:ln>
-        </p:spPr>
-      </p:pic>
       <p:sp>
         <p:nvSpPr>
           <p:cNvPr id="177" name="Google Shape;177;g3f5588f5b17_0_258"/>
@@ -12725,7 +12825,7 @@
             <a:tbl>
               <a:tblPr>
                 <a:noFill/>
-                <a:tableStyleId>{4E44A3EA-54B2-4BF2-B76C-6ED1256FAD4B}</a:tableStyleId>
+                <a:tableStyleId>{DAC45651-DEE7-4BCD-A208-FBDFB1AD0629}</a:tableStyleId>
               </a:tblPr>
               <a:tblGrid>
                 <a:gridCol w="1582425"/>
@@ -12978,12 +13078,20 @@
                         <a:buNone/>
                       </a:pPr>
                       <a:r>
+                        <a:rPr b="1" lang="en-US" sz="1050">
+                          <a:solidFill>
+                            <a:schemeClr val="dk1"/>
+                          </a:solidFill>
+                        </a:rPr>
+                        <a:t>Centres Today</a:t>
+                      </a:r>
+                      <a:r>
                         <a:rPr b="1" lang="en-US" sz="1100">
                           <a:solidFill>
                             <a:schemeClr val="dk1"/>
                           </a:solidFill>
                         </a:rPr>
-                        <a:t>n_centres</a:t>
+                        <a:t> </a:t>
                       </a:r>
                       <a:endParaRPr b="1" sz="1100">
                         <a:solidFill>
@@ -13052,12 +13160,20 @@
                         <a:buNone/>
                       </a:pPr>
                       <a:r>
+                        <a:rPr b="1" lang="en-US" sz="1050">
+                          <a:solidFill>
+                            <a:schemeClr val="dk1"/>
+                          </a:solidFill>
+                        </a:rPr>
+                        <a:t>2026 Gap (children, + short / - surplus)</a:t>
+                      </a:r>
+                      <a:r>
                         <a:rPr b="1" lang="en-US" sz="1100">
                           <a:solidFill>
                             <a:schemeClr val="dk1"/>
                           </a:solidFill>
                         </a:rPr>
-                        <a:t>gap_2026</a:t>
+                        <a:t> </a:t>
                       </a:r>
                       <a:endParaRPr b="1" sz="1100">
                         <a:solidFill>
@@ -13123,15 +13239,20 @@
                         <a:spcAft>
                           <a:spcPts val="0"/>
                         </a:spcAft>
+                        <a:buClr>
+                          <a:schemeClr val="dk1"/>
+                        </a:buClr>
+                        <a:buSzPts val="1100"/>
+                        <a:buFont typeface="Arial"/>
                         <a:buNone/>
                       </a:pPr>
                       <a:r>
-                        <a:rPr b="1" lang="en-US" sz="1100">
+                        <a:rPr b="1" lang="en-US" sz="1050">
                           <a:solidFill>
                             <a:schemeClr val="dk1"/>
                           </a:solidFill>
                         </a:rPr>
-                        <a:t>gap_2031</a:t>
+                        <a:t>2031 Gap (children, + short / - surplus)</a:t>
                       </a:r>
                       <a:endParaRPr b="1" sz="1100">
                         <a:solidFill>
@@ -22136,7 +22257,7 @@
             <a:tbl>
               <a:tblPr>
                 <a:noFill/>
-                <a:tableStyleId>{4E44A3EA-54B2-4BF2-B76C-6ED1256FAD4B}</a:tableStyleId>
+                <a:tableStyleId>{DAC45651-DEE7-4BCD-A208-FBDFB1AD0629}</a:tableStyleId>
               </a:tblPr>
               <a:tblGrid>
                 <a:gridCol w="3169025"/>
@@ -22217,7 +22338,7 @@
                       <a:tailEnd len="sm" w="sm" type="none"/>
                     </a:lnB>
                     <a:solidFill>
-                      <a:srgbClr val="CFD7E7"/>
+                      <a:srgbClr val="C7CCD1"/>
                     </a:solidFill>
                   </a:tcPr>
                 </a:tc>
@@ -22291,7 +22412,7 @@
                       <a:tailEnd len="sm" w="sm" type="none"/>
                     </a:lnB>
                     <a:solidFill>
-                      <a:srgbClr val="CFD7E7"/>
+                      <a:srgbClr val="C7CCD1"/>
                     </a:solidFill>
                   </a:tcPr>
                 </a:tc>
@@ -22313,12 +22434,20 @@
                         <a:buNone/>
                       </a:pPr>
                       <a:r>
+                        <a:rPr b="1" lang="en-US" sz="1050">
+                          <a:solidFill>
+                            <a:schemeClr val="dk1"/>
+                          </a:solidFill>
+                        </a:rPr>
+                        <a:t>Centres Today</a:t>
+                      </a:r>
+                      <a:r>
                         <a:rPr b="1" lang="en-US" sz="1100">
                           <a:solidFill>
                             <a:schemeClr val="dk1"/>
                           </a:solidFill>
                         </a:rPr>
-                        <a:t>n_centres</a:t>
+                        <a:t> </a:t>
                       </a:r>
                       <a:endParaRPr b="1" sz="1100">
                         <a:solidFill>
@@ -22365,7 +22494,7 @@
                       <a:tailEnd len="sm" w="sm" type="none"/>
                     </a:lnB>
                     <a:solidFill>
-                      <a:srgbClr val="CFD7E7"/>
+                      <a:srgbClr val="C7CCD1"/>
                     </a:solidFill>
                   </a:tcPr>
                 </a:tc>
@@ -22387,12 +22516,20 @@
                         <a:buNone/>
                       </a:pPr>
                       <a:r>
+                        <a:rPr b="1" lang="en-US" sz="1050">
+                          <a:solidFill>
+                            <a:schemeClr val="dk1"/>
+                          </a:solidFill>
+                        </a:rPr>
+                        <a:t>2026 Gap (children, + short / - surplus)</a:t>
+                      </a:r>
+                      <a:r>
                         <a:rPr b="1" lang="en-US" sz="1100">
                           <a:solidFill>
                             <a:schemeClr val="dk1"/>
                           </a:solidFill>
                         </a:rPr>
-                        <a:t>gap_2026</a:t>
+                        <a:t> </a:t>
                       </a:r>
                       <a:endParaRPr b="1" sz="1100">
                         <a:solidFill>
@@ -22439,7 +22576,7 @@
                       <a:tailEnd len="sm" w="sm" type="none"/>
                     </a:lnB>
                     <a:solidFill>
-                      <a:srgbClr val="CFD7E7"/>
+                      <a:srgbClr val="C7CCD1"/>
                     </a:solidFill>
                   </a:tcPr>
                 </a:tc>
@@ -22461,12 +22598,12 @@
                         <a:buNone/>
                       </a:pPr>
                       <a:r>
-                        <a:rPr b="1" lang="en-US" sz="1100">
+                        <a:rPr b="1" lang="en-US" sz="1050">
                           <a:solidFill>
                             <a:schemeClr val="dk1"/>
                           </a:solidFill>
                         </a:rPr>
-                        <a:t>gap_2031</a:t>
+                        <a:t>2031 Gap (children, + short / - surplus)</a:t>
                       </a:r>
                       <a:endParaRPr b="1" sz="1100">
                         <a:solidFill>
@@ -22513,7 +22650,7 @@
                       <a:tailEnd len="sm" w="sm" type="none"/>
                     </a:lnB>
                     <a:solidFill>
-                      <a:srgbClr val="CFD7E7"/>
+                      <a:srgbClr val="C7CCD1"/>
                     </a:solidFill>
                   </a:tcPr>
                 </a:tc>
@@ -22587,7 +22724,7 @@
                       <a:tailEnd len="sm" w="sm" type="none"/>
                     </a:lnB>
                     <a:solidFill>
-                      <a:srgbClr val="CFD7E7"/>
+                      <a:srgbClr val="C7CCD1"/>
                     </a:solidFill>
                   </a:tcPr>
                 </a:tc>
@@ -29050,7 +29187,7 @@
       </p:grpSpPr>
       <p:sp>
         <p:nvSpPr>
-          <p:cNvPr id="201" name="Google Shape;201;g3f5588f5b17_0_316"/>
+          <p:cNvPr id="201" name="Google Shape;201;g3f55c5dc601_0_9"/>
           <p:cNvSpPr txBox="1"/>
           <p:nvPr/>
         </p:nvSpPr>
@@ -29091,7 +29228,7 @@
                   <a:srgbClr val="2166AC"/>
                 </a:solidFill>
               </a:rPr>
-              <a:t>FORWARD LOOKING</a:t>
+              <a:t>PRIORITIZATION</a:t>
             </a:r>
             <a:endParaRPr/>
           </a:p>
@@ -29099,7 +29236,7 @@
       </p:sp>
       <p:sp>
         <p:nvSpPr>
-          <p:cNvPr id="202" name="Google Shape;202;g3f5588f5b17_0_316"/>
+          <p:cNvPr id="202" name="Google Shape;202;g3f55c5dc601_0_9"/>
           <p:cNvSpPr txBox="1"/>
           <p:nvPr/>
         </p:nvSpPr>
@@ -29140,7 +29277,7 @@
                   <a:srgbClr val="222222"/>
                 </a:solidFill>
               </a:rPr>
-              <a:t>Deficiency Roadmap Map</a:t>
+              <a:t>Different Outlook when considering Service Type</a:t>
             </a:r>
             <a:endParaRPr b="1" sz="2500">
               <a:solidFill>
@@ -29152,7 +29289,7 @@
       </p:sp>
       <p:cxnSp>
         <p:nvCxnSpPr>
-          <p:cNvPr id="203" name="Google Shape;203;g3f5588f5b17_0_316"/>
+          <p:cNvPr id="203" name="Google Shape;203;g3f55c5dc601_0_9"/>
           <p:cNvCxnSpPr/>
           <p:nvPr/>
         </p:nvCxnSpPr>
@@ -29185,7 +29322,5898 @@
       </p:cxnSp>
       <p:sp>
         <p:nvSpPr>
-          <p:cNvPr id="204" name="Google Shape;204;g3f5588f5b17_0_316"/>
+          <p:cNvPr id="204" name="Google Shape;204;g3f55c5dc601_0_9"/>
+          <p:cNvSpPr txBox="1"/>
+          <p:nvPr/>
+        </p:nvSpPr>
+        <p:spPr>
+          <a:xfrm>
+            <a:off x="157135" y="6499449"/>
+            <a:ext cx="7315200" cy="276900"/>
+          </a:xfrm>
+          <a:prstGeom prst="rect">
+            <a:avLst/>
+          </a:prstGeom>
+          <a:noFill/>
+          <a:ln>
+            <a:noFill/>
+          </a:ln>
+        </p:spPr>
+        <p:txBody>
+          <a:bodyPr anchorCtr="0" anchor="t" bIns="45700" lIns="91425" spcFirstLastPara="1" rIns="91425" wrap="square" tIns="45700">
+            <a:spAutoFit/>
+          </a:bodyPr>
+          <a:lstStyle/>
+          <a:p>
+            <a:pPr indent="0" lvl="0" marL="0" marR="0" rtl="0" algn="l">
+              <a:lnSpc>
+                <a:spcPct val="100000"/>
+              </a:lnSpc>
+              <a:spcBef>
+                <a:spcPts val="0"/>
+              </a:spcBef>
+              <a:spcAft>
+                <a:spcPts val="0"/>
+              </a:spcAft>
+              <a:buNone/>
+            </a:pPr>
+            <a:r>
+              <a:rPr i="1" lang="en-US" sz="1200">
+                <a:solidFill>
+                  <a:srgbClr val="8F9BB5"/>
+                </a:solidFill>
+              </a:rPr>
+              <a:t>Candidate Ng Zong Yi</a:t>
+            </a:r>
+            <a:r>
+              <a:rPr b="0" i="1" lang="en-US" sz="1200" u="none" cap="none" strike="noStrike">
+                <a:solidFill>
+                  <a:srgbClr val="8F9BB5"/>
+                </a:solidFill>
+                <a:latin typeface="Arial"/>
+                <a:ea typeface="Arial"/>
+                <a:cs typeface="Arial"/>
+                <a:sym typeface="Arial"/>
+              </a:rPr>
+              <a:t> ·  </a:t>
+            </a:r>
+            <a:r>
+              <a:rPr i="1" lang="en-US" sz="1200">
+                <a:solidFill>
+                  <a:srgbClr val="8F9BB5"/>
+                </a:solidFill>
+              </a:rPr>
+              <a:t>ngzongyi@gmail.com</a:t>
+            </a:r>
+            <a:endParaRPr i="1"/>
+          </a:p>
+        </p:txBody>
+      </p:sp>
+      <p:graphicFrame>
+        <p:nvGraphicFramePr>
+          <p:cNvPr id="205" name="Google Shape;205;g3f55c5dc601_0_9"/>
+          <p:cNvGraphicFramePr/>
+          <p:nvPr/>
+        </p:nvGraphicFramePr>
+        <p:xfrm>
+          <a:off x="636750" y="2017700"/>
+          <a:ext cx="3000000" cy="3000000"/>
+        </p:xfrm>
+        <a:graphic>
+          <a:graphicData uri="http://schemas.openxmlformats.org/drawingml/2006/table">
+            <a:tbl>
+              <a:tblPr>
+                <a:noFill/>
+                <a:tableStyleId>{DAC45651-DEE7-4BCD-A208-FBDFB1AD0629}</a:tableStyleId>
+              </a:tblPr>
+              <a:tblGrid>
+                <a:gridCol w="2030875"/>
+                <a:gridCol w="1285375"/>
+                <a:gridCol w="1015450"/>
+                <a:gridCol w="1396325"/>
+                <a:gridCol w="1391825"/>
+                <a:gridCol w="1484150"/>
+                <a:gridCol w="2311400"/>
+              </a:tblGrid>
+              <a:tr h="257175">
+                <a:tc>
+                  <a:txBody>
+                    <a:bodyPr/>
+                    <a:lstStyle/>
+                    <a:p>
+                      <a:pPr indent="0" lvl="0" marL="0" rtl="0" algn="r">
+                        <a:lnSpc>
+                          <a:spcPct val="115000"/>
+                        </a:lnSpc>
+                        <a:spcBef>
+                          <a:spcPts val="0"/>
+                        </a:spcBef>
+                        <a:spcAft>
+                          <a:spcPts val="0"/>
+                        </a:spcAft>
+                        <a:buNone/>
+                      </a:pPr>
+                      <a:r>
+                        <a:rPr b="1" lang="en-US" sz="1050">
+                          <a:solidFill>
+                            <a:schemeClr val="dk1"/>
+                          </a:solidFill>
+                        </a:rPr>
+                        <a:t>subzone</a:t>
+                      </a:r>
+                      <a:endParaRPr b="1" sz="1050">
+                        <a:solidFill>
+                          <a:schemeClr val="dk1"/>
+                        </a:solidFill>
+                      </a:endParaRPr>
+                    </a:p>
+                  </a:txBody>
+                  <a:tcPr marT="38100" marB="38100" marR="76200" marL="76200" anchor="ctr">
+                    <a:lnL cap="flat" cmpd="sng" w="9525">
+                      <a:solidFill>
+                        <a:srgbClr val="000000"/>
+                      </a:solidFill>
+                      <a:prstDash val="solid"/>
+                      <a:round/>
+                      <a:headEnd len="sm" w="sm" type="none"/>
+                      <a:tailEnd len="sm" w="sm" type="none"/>
+                    </a:lnL>
+                    <a:lnR cap="flat" cmpd="sng" w="9525">
+                      <a:solidFill>
+                        <a:srgbClr val="000000"/>
+                      </a:solidFill>
+                      <a:prstDash val="solid"/>
+                      <a:round/>
+                      <a:headEnd len="sm" w="sm" type="none"/>
+                      <a:tailEnd len="sm" w="sm" type="none"/>
+                    </a:lnR>
+                    <a:lnT cap="flat" cmpd="sng" w="9525">
+                      <a:solidFill>
+                        <a:srgbClr val="000000"/>
+                      </a:solidFill>
+                      <a:prstDash val="solid"/>
+                      <a:round/>
+                      <a:headEnd len="sm" w="sm" type="none"/>
+                      <a:tailEnd len="sm" w="sm" type="none"/>
+                    </a:lnT>
+                    <a:lnB cap="flat" cmpd="sng" w="9525">
+                      <a:solidFill>
+                        <a:srgbClr val="000000"/>
+                      </a:solidFill>
+                      <a:prstDash val="solid"/>
+                      <a:round/>
+                      <a:headEnd len="sm" w="sm" type="none"/>
+                      <a:tailEnd len="sm" w="sm" type="none"/>
+                    </a:lnB>
+                    <a:solidFill>
+                      <a:srgbClr val="C7CCD1"/>
+                    </a:solidFill>
+                  </a:tcPr>
+                </a:tc>
+                <a:tc>
+                  <a:txBody>
+                    <a:bodyPr/>
+                    <a:lstStyle/>
+                    <a:p>
+                      <a:pPr indent="0" lvl="0" marL="0" rtl="0" algn="r">
+                        <a:lnSpc>
+                          <a:spcPct val="115000"/>
+                        </a:lnSpc>
+                        <a:spcBef>
+                          <a:spcPts val="0"/>
+                        </a:spcBef>
+                        <a:spcAft>
+                          <a:spcPts val="0"/>
+                        </a:spcAft>
+                        <a:buNone/>
+                      </a:pPr>
+                      <a:r>
+                        <a:t/>
+                      </a:r>
+                      <a:endParaRPr>
+                        <a:solidFill>
+                          <a:schemeClr val="dk1"/>
+                        </a:solidFill>
+                      </a:endParaRPr>
+                    </a:p>
+                    <a:p>
+                      <a:pPr indent="0" lvl="0" marL="0" rtl="0" algn="r">
+                        <a:lnSpc>
+                          <a:spcPct val="115000"/>
+                        </a:lnSpc>
+                        <a:spcBef>
+                          <a:spcPts val="0"/>
+                        </a:spcBef>
+                        <a:spcAft>
+                          <a:spcPts val="0"/>
+                        </a:spcAft>
+                        <a:buNone/>
+                      </a:pPr>
+                      <a:r>
+                        <a:rPr b="1" lang="en-US" sz="1050">
+                          <a:solidFill>
+                            <a:schemeClr val="dk1"/>
+                          </a:solidFill>
+                        </a:rPr>
+                        <a:t>planning_area</a:t>
+                      </a:r>
+                      <a:endParaRPr b="1" sz="1050">
+                        <a:solidFill>
+                          <a:schemeClr val="dk1"/>
+                        </a:solidFill>
+                      </a:endParaRPr>
+                    </a:p>
+                  </a:txBody>
+                  <a:tcPr marT="38100" marB="38100" marR="76200" marL="76200" anchor="ctr">
+                    <a:lnL cap="flat" cmpd="sng" w="9525">
+                      <a:solidFill>
+                        <a:srgbClr val="000000"/>
+                      </a:solidFill>
+                      <a:prstDash val="solid"/>
+                      <a:round/>
+                      <a:headEnd len="sm" w="sm" type="none"/>
+                      <a:tailEnd len="sm" w="sm" type="none"/>
+                    </a:lnL>
+                    <a:lnR cap="flat" cmpd="sng" w="9525">
+                      <a:solidFill>
+                        <a:srgbClr val="000000"/>
+                      </a:solidFill>
+                      <a:prstDash val="solid"/>
+                      <a:round/>
+                      <a:headEnd len="sm" w="sm" type="none"/>
+                      <a:tailEnd len="sm" w="sm" type="none"/>
+                    </a:lnR>
+                    <a:lnT cap="flat" cmpd="sng" w="9525">
+                      <a:solidFill>
+                        <a:srgbClr val="000000"/>
+                      </a:solidFill>
+                      <a:prstDash val="solid"/>
+                      <a:round/>
+                      <a:headEnd len="sm" w="sm" type="none"/>
+                      <a:tailEnd len="sm" w="sm" type="none"/>
+                    </a:lnT>
+                    <a:lnB cap="flat" cmpd="sng" w="9525">
+                      <a:solidFill>
+                        <a:srgbClr val="000000"/>
+                      </a:solidFill>
+                      <a:prstDash val="solid"/>
+                      <a:round/>
+                      <a:headEnd len="sm" w="sm" type="none"/>
+                      <a:tailEnd len="sm" w="sm" type="none"/>
+                    </a:lnB>
+                    <a:solidFill>
+                      <a:srgbClr val="C7CCD1"/>
+                    </a:solidFill>
+                  </a:tcPr>
+                </a:tc>
+                <a:tc>
+                  <a:txBody>
+                    <a:bodyPr/>
+                    <a:lstStyle/>
+                    <a:p>
+                      <a:pPr indent="0" lvl="0" marL="0" rtl="0" algn="r">
+                        <a:lnSpc>
+                          <a:spcPct val="115000"/>
+                        </a:lnSpc>
+                        <a:spcBef>
+                          <a:spcPts val="0"/>
+                        </a:spcBef>
+                        <a:spcAft>
+                          <a:spcPts val="0"/>
+                        </a:spcAft>
+                        <a:buNone/>
+                      </a:pPr>
+                      <a:r>
+                        <a:rPr b="1" lang="en-US" sz="1050">
+                          <a:solidFill>
+                            <a:schemeClr val="dk1"/>
+                          </a:solidFill>
+                        </a:rPr>
+                        <a:t>Centres Today</a:t>
+                      </a:r>
+                      <a:r>
+                        <a:rPr b="1" lang="en-US" sz="1100">
+                          <a:solidFill>
+                            <a:schemeClr val="dk1"/>
+                          </a:solidFill>
+                        </a:rPr>
+                        <a:t> </a:t>
+                      </a:r>
+                      <a:endParaRPr b="1" sz="1100">
+                        <a:solidFill>
+                          <a:schemeClr val="dk1"/>
+                        </a:solidFill>
+                      </a:endParaRPr>
+                    </a:p>
+                  </a:txBody>
+                  <a:tcPr marT="38100" marB="38100" marR="76200" marL="76200" anchor="ctr">
+                    <a:lnL cap="flat" cmpd="sng" w="9525">
+                      <a:solidFill>
+                        <a:srgbClr val="000000"/>
+                      </a:solidFill>
+                      <a:prstDash val="solid"/>
+                      <a:round/>
+                      <a:headEnd len="sm" w="sm" type="none"/>
+                      <a:tailEnd len="sm" w="sm" type="none"/>
+                    </a:lnL>
+                    <a:lnR cap="flat" cmpd="sng" w="9525">
+                      <a:solidFill>
+                        <a:srgbClr val="000000"/>
+                      </a:solidFill>
+                      <a:prstDash val="solid"/>
+                      <a:round/>
+                      <a:headEnd len="sm" w="sm" type="none"/>
+                      <a:tailEnd len="sm" w="sm" type="none"/>
+                    </a:lnR>
+                    <a:lnT cap="flat" cmpd="sng" w="9525">
+                      <a:solidFill>
+                        <a:srgbClr val="000000"/>
+                      </a:solidFill>
+                      <a:prstDash val="solid"/>
+                      <a:round/>
+                      <a:headEnd len="sm" w="sm" type="none"/>
+                      <a:tailEnd len="sm" w="sm" type="none"/>
+                    </a:lnT>
+                    <a:lnB cap="flat" cmpd="sng" w="9525">
+                      <a:solidFill>
+                        <a:srgbClr val="000000"/>
+                      </a:solidFill>
+                      <a:prstDash val="solid"/>
+                      <a:round/>
+                      <a:headEnd len="sm" w="sm" type="none"/>
+                      <a:tailEnd len="sm" w="sm" type="none"/>
+                    </a:lnB>
+                    <a:solidFill>
+                      <a:srgbClr val="C7CCD1"/>
+                    </a:solidFill>
+                  </a:tcPr>
+                </a:tc>
+                <a:tc>
+                  <a:txBody>
+                    <a:bodyPr/>
+                    <a:lstStyle/>
+                    <a:p>
+                      <a:pPr indent="0" lvl="0" marL="0" rtl="0" algn="r">
+                        <a:lnSpc>
+                          <a:spcPct val="115000"/>
+                        </a:lnSpc>
+                        <a:spcBef>
+                          <a:spcPts val="0"/>
+                        </a:spcBef>
+                        <a:spcAft>
+                          <a:spcPts val="0"/>
+                        </a:spcAft>
+                        <a:buNone/>
+                      </a:pPr>
+                      <a:r>
+                        <a:rPr b="1" lang="en-US" sz="1050">
+                          <a:solidFill>
+                            <a:schemeClr val="dk1"/>
+                          </a:solidFill>
+                        </a:rPr>
+                        <a:t>2026 Gap (children, + short / - surplus)</a:t>
+                      </a:r>
+                      <a:r>
+                        <a:rPr b="1" lang="en-US" sz="1100">
+                          <a:solidFill>
+                            <a:schemeClr val="dk1"/>
+                          </a:solidFill>
+                        </a:rPr>
+                        <a:t> </a:t>
+                      </a:r>
+                      <a:endParaRPr b="1" sz="1100">
+                        <a:solidFill>
+                          <a:schemeClr val="dk1"/>
+                        </a:solidFill>
+                      </a:endParaRPr>
+                    </a:p>
+                  </a:txBody>
+                  <a:tcPr marT="38100" marB="38100" marR="76200" marL="76200" anchor="ctr">
+                    <a:lnL cap="flat" cmpd="sng" w="9525">
+                      <a:solidFill>
+                        <a:srgbClr val="000000"/>
+                      </a:solidFill>
+                      <a:prstDash val="solid"/>
+                      <a:round/>
+                      <a:headEnd len="sm" w="sm" type="none"/>
+                      <a:tailEnd len="sm" w="sm" type="none"/>
+                    </a:lnL>
+                    <a:lnR cap="flat" cmpd="sng" w="9525">
+                      <a:solidFill>
+                        <a:srgbClr val="000000"/>
+                      </a:solidFill>
+                      <a:prstDash val="solid"/>
+                      <a:round/>
+                      <a:headEnd len="sm" w="sm" type="none"/>
+                      <a:tailEnd len="sm" w="sm" type="none"/>
+                    </a:lnR>
+                    <a:lnT cap="flat" cmpd="sng" w="9525">
+                      <a:solidFill>
+                        <a:srgbClr val="000000"/>
+                      </a:solidFill>
+                      <a:prstDash val="solid"/>
+                      <a:round/>
+                      <a:headEnd len="sm" w="sm" type="none"/>
+                      <a:tailEnd len="sm" w="sm" type="none"/>
+                    </a:lnT>
+                    <a:lnB cap="flat" cmpd="sng" w="9525">
+                      <a:solidFill>
+                        <a:srgbClr val="000000"/>
+                      </a:solidFill>
+                      <a:prstDash val="solid"/>
+                      <a:round/>
+                      <a:headEnd len="sm" w="sm" type="none"/>
+                      <a:tailEnd len="sm" w="sm" type="none"/>
+                    </a:lnB>
+                    <a:solidFill>
+                      <a:srgbClr val="C7CCD1"/>
+                    </a:solidFill>
+                  </a:tcPr>
+                </a:tc>
+                <a:tc>
+                  <a:txBody>
+                    <a:bodyPr/>
+                    <a:lstStyle/>
+                    <a:p>
+                      <a:pPr indent="0" lvl="0" marL="0" rtl="0" algn="r">
+                        <a:lnSpc>
+                          <a:spcPct val="115000"/>
+                        </a:lnSpc>
+                        <a:spcBef>
+                          <a:spcPts val="0"/>
+                        </a:spcBef>
+                        <a:spcAft>
+                          <a:spcPts val="0"/>
+                        </a:spcAft>
+                        <a:buNone/>
+                      </a:pPr>
+                      <a:r>
+                        <a:rPr b="1" lang="en-US" sz="1050">
+                          <a:solidFill>
+                            <a:schemeClr val="dk1"/>
+                          </a:solidFill>
+                        </a:rPr>
+                        <a:t>Younger-Band Gap (18mo-4y)</a:t>
+                      </a:r>
+                      <a:r>
+                        <a:rPr b="1" lang="en-US" sz="1100">
+                          <a:solidFill>
+                            <a:schemeClr val="dk1"/>
+                          </a:solidFill>
+                        </a:rPr>
+                        <a:t> </a:t>
+                      </a:r>
+                      <a:endParaRPr b="1" sz="1050">
+                        <a:solidFill>
+                          <a:schemeClr val="dk1"/>
+                        </a:solidFill>
+                      </a:endParaRPr>
+                    </a:p>
+                  </a:txBody>
+                  <a:tcPr marT="38100" marB="38100" marR="76200" marL="76200" anchor="ctr">
+                    <a:lnL cap="flat" cmpd="sng" w="9525">
+                      <a:solidFill>
+                        <a:srgbClr val="000000"/>
+                      </a:solidFill>
+                      <a:prstDash val="solid"/>
+                      <a:round/>
+                      <a:headEnd len="sm" w="sm" type="none"/>
+                      <a:tailEnd len="sm" w="sm" type="none"/>
+                    </a:lnL>
+                    <a:lnR cap="flat" cmpd="sng" w="9525">
+                      <a:solidFill>
+                        <a:srgbClr val="000000"/>
+                      </a:solidFill>
+                      <a:prstDash val="solid"/>
+                      <a:round/>
+                      <a:headEnd len="sm" w="sm" type="none"/>
+                      <a:tailEnd len="sm" w="sm" type="none"/>
+                    </a:lnR>
+                    <a:lnT cap="flat" cmpd="sng" w="9525">
+                      <a:solidFill>
+                        <a:srgbClr val="000000"/>
+                      </a:solidFill>
+                      <a:prstDash val="solid"/>
+                      <a:round/>
+                      <a:headEnd len="sm" w="sm" type="none"/>
+                      <a:tailEnd len="sm" w="sm" type="none"/>
+                    </a:lnT>
+                    <a:lnB cap="flat" cmpd="sng" w="9525">
+                      <a:solidFill>
+                        <a:srgbClr val="000000"/>
+                      </a:solidFill>
+                      <a:prstDash val="solid"/>
+                      <a:round/>
+                      <a:headEnd len="sm" w="sm" type="none"/>
+                      <a:tailEnd len="sm" w="sm" type="none"/>
+                    </a:lnB>
+                    <a:solidFill>
+                      <a:srgbClr val="C7CCD1"/>
+                    </a:solidFill>
+                  </a:tcPr>
+                </a:tc>
+                <a:tc>
+                  <a:txBody>
+                    <a:bodyPr/>
+                    <a:lstStyle/>
+                    <a:p>
+                      <a:pPr indent="0" lvl="0" marL="0" rtl="0" algn="r">
+                        <a:lnSpc>
+                          <a:spcPct val="115000"/>
+                        </a:lnSpc>
+                        <a:spcBef>
+                          <a:spcPts val="0"/>
+                        </a:spcBef>
+                        <a:spcAft>
+                          <a:spcPts val="0"/>
+                        </a:spcAft>
+                        <a:buNone/>
+                      </a:pPr>
+                      <a:r>
+                        <a:rPr b="1" lang="en-US" sz="1050">
+                          <a:solidFill>
+                            <a:schemeClr val="dk1"/>
+                          </a:solidFill>
+                        </a:rPr>
+                        <a:t>Older-Band Gap (5-6y)</a:t>
+                      </a:r>
+                      <a:r>
+                        <a:rPr b="1" lang="en-US" sz="1100">
+                          <a:solidFill>
+                            <a:schemeClr val="dk1"/>
+                          </a:solidFill>
+                        </a:rPr>
+                        <a:t> </a:t>
+                      </a:r>
+                      <a:endParaRPr b="1" sz="1050">
+                        <a:solidFill>
+                          <a:schemeClr val="dk1"/>
+                        </a:solidFill>
+                      </a:endParaRPr>
+                    </a:p>
+                  </a:txBody>
+                  <a:tcPr marT="38100" marB="38100" marR="76200" marL="76200" anchor="ctr">
+                    <a:lnL cap="flat" cmpd="sng" w="9525">
+                      <a:solidFill>
+                        <a:srgbClr val="000000"/>
+                      </a:solidFill>
+                      <a:prstDash val="solid"/>
+                      <a:round/>
+                      <a:headEnd len="sm" w="sm" type="none"/>
+                      <a:tailEnd len="sm" w="sm" type="none"/>
+                    </a:lnL>
+                    <a:lnR cap="flat" cmpd="sng" w="9525">
+                      <a:solidFill>
+                        <a:srgbClr val="000000"/>
+                      </a:solidFill>
+                      <a:prstDash val="solid"/>
+                      <a:round/>
+                      <a:headEnd len="sm" w="sm" type="none"/>
+                      <a:tailEnd len="sm" w="sm" type="none"/>
+                    </a:lnR>
+                    <a:lnT cap="flat" cmpd="sng" w="9525">
+                      <a:solidFill>
+                        <a:srgbClr val="000000"/>
+                      </a:solidFill>
+                      <a:prstDash val="solid"/>
+                      <a:round/>
+                      <a:headEnd len="sm" w="sm" type="none"/>
+                      <a:tailEnd len="sm" w="sm" type="none"/>
+                    </a:lnT>
+                    <a:lnB cap="flat" cmpd="sng" w="9525">
+                      <a:solidFill>
+                        <a:srgbClr val="000000"/>
+                      </a:solidFill>
+                      <a:prstDash val="solid"/>
+                      <a:round/>
+                      <a:headEnd len="sm" w="sm" type="none"/>
+                      <a:tailEnd len="sm" w="sm" type="none"/>
+                    </a:lnB>
+                    <a:solidFill>
+                      <a:srgbClr val="C7CCD1"/>
+                    </a:solidFill>
+                  </a:tcPr>
+                </a:tc>
+                <a:tc>
+                  <a:txBody>
+                    <a:bodyPr/>
+                    <a:lstStyle/>
+                    <a:p>
+                      <a:pPr indent="0" lvl="0" marL="0" rtl="0" algn="r">
+                        <a:lnSpc>
+                          <a:spcPct val="115000"/>
+                        </a:lnSpc>
+                        <a:spcBef>
+                          <a:spcPts val="0"/>
+                        </a:spcBef>
+                        <a:spcAft>
+                          <a:spcPts val="0"/>
+                        </a:spcAft>
+                        <a:buNone/>
+                      </a:pPr>
+                      <a:r>
+                        <a:rPr b="1" lang="en-US" sz="1050">
+                          <a:solidFill>
+                            <a:schemeClr val="dk1"/>
+                          </a:solidFill>
+                        </a:rPr>
+                        <a:t>masked_driver</a:t>
+                      </a:r>
+                      <a:endParaRPr b="1" sz="1050">
+                        <a:solidFill>
+                          <a:schemeClr val="dk1"/>
+                        </a:solidFill>
+                      </a:endParaRPr>
+                    </a:p>
+                  </a:txBody>
+                  <a:tcPr marT="38100" marB="38100" marR="76200" marL="76200" anchor="ctr">
+                    <a:lnL cap="flat" cmpd="sng" w="9525">
+                      <a:solidFill>
+                        <a:srgbClr val="000000"/>
+                      </a:solidFill>
+                      <a:prstDash val="solid"/>
+                      <a:round/>
+                      <a:headEnd len="sm" w="sm" type="none"/>
+                      <a:tailEnd len="sm" w="sm" type="none"/>
+                    </a:lnL>
+                    <a:lnR cap="flat" cmpd="sng" w="9525">
+                      <a:solidFill>
+                        <a:srgbClr val="000000"/>
+                      </a:solidFill>
+                      <a:prstDash val="solid"/>
+                      <a:round/>
+                      <a:headEnd len="sm" w="sm" type="none"/>
+                      <a:tailEnd len="sm" w="sm" type="none"/>
+                    </a:lnR>
+                    <a:lnT cap="flat" cmpd="sng" w="9525">
+                      <a:solidFill>
+                        <a:srgbClr val="000000"/>
+                      </a:solidFill>
+                      <a:prstDash val="solid"/>
+                      <a:round/>
+                      <a:headEnd len="sm" w="sm" type="none"/>
+                      <a:tailEnd len="sm" w="sm" type="none"/>
+                    </a:lnT>
+                    <a:lnB cap="flat" cmpd="sng" w="9525">
+                      <a:solidFill>
+                        <a:srgbClr val="000000"/>
+                      </a:solidFill>
+                      <a:prstDash val="solid"/>
+                      <a:round/>
+                      <a:headEnd len="sm" w="sm" type="none"/>
+                      <a:tailEnd len="sm" w="sm" type="none"/>
+                    </a:lnB>
+                    <a:solidFill>
+                      <a:srgbClr val="C7CCD1"/>
+                    </a:solidFill>
+                  </a:tcPr>
+                </a:tc>
+              </a:tr>
+              <a:tr h="257175">
+                <a:tc>
+                  <a:txBody>
+                    <a:bodyPr/>
+                    <a:lstStyle/>
+                    <a:p>
+                      <a:pPr indent="0" lvl="0" marL="0" rtl="0" algn="r">
+                        <a:lnSpc>
+                          <a:spcPct val="115000"/>
+                        </a:lnSpc>
+                        <a:spcBef>
+                          <a:spcPts val="0"/>
+                        </a:spcBef>
+                        <a:spcAft>
+                          <a:spcPts val="0"/>
+                        </a:spcAft>
+                        <a:buNone/>
+                      </a:pPr>
+                      <a:r>
+                        <a:rPr lang="en-US" sz="1050">
+                          <a:solidFill>
+                            <a:schemeClr val="dk1"/>
+                          </a:solidFill>
+                        </a:rPr>
+                        <a:t>Bedok North</a:t>
+                      </a:r>
+                      <a:endParaRPr sz="1050">
+                        <a:solidFill>
+                          <a:schemeClr val="dk1"/>
+                        </a:solidFill>
+                      </a:endParaRPr>
+                    </a:p>
+                  </a:txBody>
+                  <a:tcPr marT="38100" marB="38100" marR="76200" marL="76200" anchor="ctr">
+                    <a:lnL cap="flat" cmpd="sng" w="9525">
+                      <a:solidFill>
+                        <a:srgbClr val="000000"/>
+                      </a:solidFill>
+                      <a:prstDash val="solid"/>
+                      <a:round/>
+                      <a:headEnd len="sm" w="sm" type="none"/>
+                      <a:tailEnd len="sm" w="sm" type="none"/>
+                    </a:lnL>
+                    <a:lnR cap="flat" cmpd="sng" w="9525">
+                      <a:solidFill>
+                        <a:srgbClr val="000000"/>
+                      </a:solidFill>
+                      <a:prstDash val="solid"/>
+                      <a:round/>
+                      <a:headEnd len="sm" w="sm" type="none"/>
+                      <a:tailEnd len="sm" w="sm" type="none"/>
+                    </a:lnR>
+                    <a:lnT cap="flat" cmpd="sng" w="9525">
+                      <a:solidFill>
+                        <a:srgbClr val="000000"/>
+                      </a:solidFill>
+                      <a:prstDash val="solid"/>
+                      <a:round/>
+                      <a:headEnd len="sm" w="sm" type="none"/>
+                      <a:tailEnd len="sm" w="sm" type="none"/>
+                    </a:lnT>
+                    <a:lnB cap="flat" cmpd="sng" w="9525">
+                      <a:solidFill>
+                        <a:srgbClr val="000000"/>
+                      </a:solidFill>
+                      <a:prstDash val="solid"/>
+                      <a:round/>
+                      <a:headEnd len="sm" w="sm" type="none"/>
+                      <a:tailEnd len="sm" w="sm" type="none"/>
+                    </a:lnB>
+                  </a:tcPr>
+                </a:tc>
+                <a:tc>
+                  <a:txBody>
+                    <a:bodyPr/>
+                    <a:lstStyle/>
+                    <a:p>
+                      <a:pPr indent="0" lvl="0" marL="0" rtl="0" algn="r">
+                        <a:lnSpc>
+                          <a:spcPct val="115000"/>
+                        </a:lnSpc>
+                        <a:spcBef>
+                          <a:spcPts val="0"/>
+                        </a:spcBef>
+                        <a:spcAft>
+                          <a:spcPts val="0"/>
+                        </a:spcAft>
+                        <a:buNone/>
+                      </a:pPr>
+                      <a:r>
+                        <a:rPr lang="en-US" sz="1050">
+                          <a:solidFill>
+                            <a:schemeClr val="dk1"/>
+                          </a:solidFill>
+                        </a:rPr>
+                        <a:t>Bedok</a:t>
+                      </a:r>
+                      <a:endParaRPr sz="1050">
+                        <a:solidFill>
+                          <a:schemeClr val="dk1"/>
+                        </a:solidFill>
+                      </a:endParaRPr>
+                    </a:p>
+                  </a:txBody>
+                  <a:tcPr marT="38100" marB="38100" marR="76200" marL="76200">
+                    <a:lnL cap="flat" cmpd="sng" w="9525">
+                      <a:solidFill>
+                        <a:srgbClr val="000000"/>
+                      </a:solidFill>
+                      <a:prstDash val="solid"/>
+                      <a:round/>
+                      <a:headEnd len="sm" w="sm" type="none"/>
+                      <a:tailEnd len="sm" w="sm" type="none"/>
+                    </a:lnL>
+                    <a:lnR cap="flat" cmpd="sng" w="9525">
+                      <a:solidFill>
+                        <a:srgbClr val="000000"/>
+                      </a:solidFill>
+                      <a:prstDash val="solid"/>
+                      <a:round/>
+                      <a:headEnd len="sm" w="sm" type="none"/>
+                      <a:tailEnd len="sm" w="sm" type="none"/>
+                    </a:lnR>
+                    <a:lnT cap="flat" cmpd="sng" w="9525">
+                      <a:solidFill>
+                        <a:srgbClr val="000000"/>
+                      </a:solidFill>
+                      <a:prstDash val="solid"/>
+                      <a:round/>
+                      <a:headEnd len="sm" w="sm" type="none"/>
+                      <a:tailEnd len="sm" w="sm" type="none"/>
+                    </a:lnT>
+                    <a:lnB cap="flat" cmpd="sng" w="9525">
+                      <a:solidFill>
+                        <a:srgbClr val="000000"/>
+                      </a:solidFill>
+                      <a:prstDash val="solid"/>
+                      <a:round/>
+                      <a:headEnd len="sm" w="sm" type="none"/>
+                      <a:tailEnd len="sm" w="sm" type="none"/>
+                    </a:lnB>
+                  </a:tcPr>
+                </a:tc>
+                <a:tc>
+                  <a:txBody>
+                    <a:bodyPr/>
+                    <a:lstStyle/>
+                    <a:p>
+                      <a:pPr indent="0" lvl="0" marL="0" rtl="0" algn="r">
+                        <a:lnSpc>
+                          <a:spcPct val="115000"/>
+                        </a:lnSpc>
+                        <a:spcBef>
+                          <a:spcPts val="0"/>
+                        </a:spcBef>
+                        <a:spcAft>
+                          <a:spcPts val="0"/>
+                        </a:spcAft>
+                        <a:buNone/>
+                      </a:pPr>
+                      <a:r>
+                        <a:rPr lang="en-US" sz="1050">
+                          <a:solidFill>
+                            <a:schemeClr val="dk1"/>
+                          </a:solidFill>
+                        </a:rPr>
+                        <a:t>27.0</a:t>
+                      </a:r>
+                      <a:endParaRPr sz="1050">
+                        <a:solidFill>
+                          <a:schemeClr val="dk1"/>
+                        </a:solidFill>
+                      </a:endParaRPr>
+                    </a:p>
+                  </a:txBody>
+                  <a:tcPr marT="38100" marB="38100" marR="76200" marL="76200">
+                    <a:lnL cap="flat" cmpd="sng" w="9525">
+                      <a:solidFill>
+                        <a:srgbClr val="000000"/>
+                      </a:solidFill>
+                      <a:prstDash val="solid"/>
+                      <a:round/>
+                      <a:headEnd len="sm" w="sm" type="none"/>
+                      <a:tailEnd len="sm" w="sm" type="none"/>
+                    </a:lnL>
+                    <a:lnR cap="flat" cmpd="sng" w="9525">
+                      <a:solidFill>
+                        <a:srgbClr val="000000"/>
+                      </a:solidFill>
+                      <a:prstDash val="solid"/>
+                      <a:round/>
+                      <a:headEnd len="sm" w="sm" type="none"/>
+                      <a:tailEnd len="sm" w="sm" type="none"/>
+                    </a:lnR>
+                    <a:lnT cap="flat" cmpd="sng" w="9525">
+                      <a:solidFill>
+                        <a:srgbClr val="000000"/>
+                      </a:solidFill>
+                      <a:prstDash val="solid"/>
+                      <a:round/>
+                      <a:headEnd len="sm" w="sm" type="none"/>
+                      <a:tailEnd len="sm" w="sm" type="none"/>
+                    </a:lnT>
+                    <a:lnB cap="flat" cmpd="sng" w="9525">
+                      <a:solidFill>
+                        <a:srgbClr val="000000"/>
+                      </a:solidFill>
+                      <a:prstDash val="solid"/>
+                      <a:round/>
+                      <a:headEnd len="sm" w="sm" type="none"/>
+                      <a:tailEnd len="sm" w="sm" type="none"/>
+                    </a:lnB>
+                  </a:tcPr>
+                </a:tc>
+                <a:tc>
+                  <a:txBody>
+                    <a:bodyPr/>
+                    <a:lstStyle/>
+                    <a:p>
+                      <a:pPr indent="0" lvl="0" marL="0" rtl="0" algn="r">
+                        <a:lnSpc>
+                          <a:spcPct val="115000"/>
+                        </a:lnSpc>
+                        <a:spcBef>
+                          <a:spcPts val="0"/>
+                        </a:spcBef>
+                        <a:spcAft>
+                          <a:spcPts val="0"/>
+                        </a:spcAft>
+                        <a:buNone/>
+                      </a:pPr>
+                      <a:r>
+                        <a:rPr lang="en-US" sz="1050">
+                          <a:solidFill>
+                            <a:schemeClr val="dk1"/>
+                          </a:solidFill>
+                        </a:rPr>
+                        <a:t>-273.864598</a:t>
+                      </a:r>
+                      <a:endParaRPr sz="1050">
+                        <a:solidFill>
+                          <a:schemeClr val="dk1"/>
+                        </a:solidFill>
+                      </a:endParaRPr>
+                    </a:p>
+                  </a:txBody>
+                  <a:tcPr marT="38100" marB="38100" marR="76200" marL="76200">
+                    <a:lnL cap="flat" cmpd="sng" w="9525">
+                      <a:solidFill>
+                        <a:srgbClr val="000000"/>
+                      </a:solidFill>
+                      <a:prstDash val="solid"/>
+                      <a:round/>
+                      <a:headEnd len="sm" w="sm" type="none"/>
+                      <a:tailEnd len="sm" w="sm" type="none"/>
+                    </a:lnL>
+                    <a:lnR cap="flat" cmpd="sng" w="9525">
+                      <a:solidFill>
+                        <a:srgbClr val="000000"/>
+                      </a:solidFill>
+                      <a:prstDash val="solid"/>
+                      <a:round/>
+                      <a:headEnd len="sm" w="sm" type="none"/>
+                      <a:tailEnd len="sm" w="sm" type="none"/>
+                    </a:lnR>
+                    <a:lnT cap="flat" cmpd="sng" w="9525">
+                      <a:solidFill>
+                        <a:srgbClr val="000000"/>
+                      </a:solidFill>
+                      <a:prstDash val="solid"/>
+                      <a:round/>
+                      <a:headEnd len="sm" w="sm" type="none"/>
+                      <a:tailEnd len="sm" w="sm" type="none"/>
+                    </a:lnT>
+                    <a:lnB cap="flat" cmpd="sng" w="9525">
+                      <a:solidFill>
+                        <a:srgbClr val="000000"/>
+                      </a:solidFill>
+                      <a:prstDash val="solid"/>
+                      <a:round/>
+                      <a:headEnd len="sm" w="sm" type="none"/>
+                      <a:tailEnd len="sm" w="sm" type="none"/>
+                    </a:lnB>
+                  </a:tcPr>
+                </a:tc>
+                <a:tc>
+                  <a:txBody>
+                    <a:bodyPr/>
+                    <a:lstStyle/>
+                    <a:p>
+                      <a:pPr indent="0" lvl="0" marL="0" rtl="0" algn="r">
+                        <a:lnSpc>
+                          <a:spcPct val="115000"/>
+                        </a:lnSpc>
+                        <a:spcBef>
+                          <a:spcPts val="0"/>
+                        </a:spcBef>
+                        <a:spcAft>
+                          <a:spcPts val="0"/>
+                        </a:spcAft>
+                        <a:buNone/>
+                      </a:pPr>
+                      <a:r>
+                        <a:rPr lang="en-US" sz="1050">
+                          <a:solidFill>
+                            <a:schemeClr val="dk1"/>
+                          </a:solidFill>
+                        </a:rPr>
+                        <a:t>7.573243</a:t>
+                      </a:r>
+                      <a:endParaRPr sz="1050">
+                        <a:solidFill>
+                          <a:schemeClr val="dk1"/>
+                        </a:solidFill>
+                      </a:endParaRPr>
+                    </a:p>
+                  </a:txBody>
+                  <a:tcPr marT="38100" marB="38100" marR="76200" marL="76200">
+                    <a:lnL cap="flat" cmpd="sng" w="9525">
+                      <a:solidFill>
+                        <a:srgbClr val="000000"/>
+                      </a:solidFill>
+                      <a:prstDash val="solid"/>
+                      <a:round/>
+                      <a:headEnd len="sm" w="sm" type="none"/>
+                      <a:tailEnd len="sm" w="sm" type="none"/>
+                    </a:lnL>
+                    <a:lnR cap="flat" cmpd="sng" w="9525">
+                      <a:solidFill>
+                        <a:srgbClr val="000000"/>
+                      </a:solidFill>
+                      <a:prstDash val="solid"/>
+                      <a:round/>
+                      <a:headEnd len="sm" w="sm" type="none"/>
+                      <a:tailEnd len="sm" w="sm" type="none"/>
+                    </a:lnR>
+                    <a:lnT cap="flat" cmpd="sng" w="9525">
+                      <a:solidFill>
+                        <a:srgbClr val="000000"/>
+                      </a:solidFill>
+                      <a:prstDash val="solid"/>
+                      <a:round/>
+                      <a:headEnd len="sm" w="sm" type="none"/>
+                      <a:tailEnd len="sm" w="sm" type="none"/>
+                    </a:lnT>
+                    <a:lnB cap="flat" cmpd="sng" w="9525">
+                      <a:solidFill>
+                        <a:srgbClr val="000000"/>
+                      </a:solidFill>
+                      <a:prstDash val="solid"/>
+                      <a:round/>
+                      <a:headEnd len="sm" w="sm" type="none"/>
+                      <a:tailEnd len="sm" w="sm" type="none"/>
+                    </a:lnB>
+                  </a:tcPr>
+                </a:tc>
+                <a:tc>
+                  <a:txBody>
+                    <a:bodyPr/>
+                    <a:lstStyle/>
+                    <a:p>
+                      <a:pPr indent="0" lvl="0" marL="0" rtl="0" algn="r">
+                        <a:lnSpc>
+                          <a:spcPct val="115000"/>
+                        </a:lnSpc>
+                        <a:spcBef>
+                          <a:spcPts val="0"/>
+                        </a:spcBef>
+                        <a:spcAft>
+                          <a:spcPts val="0"/>
+                        </a:spcAft>
+                        <a:buNone/>
+                      </a:pPr>
+                      <a:r>
+                        <a:rPr lang="en-US" sz="1050">
+                          <a:solidFill>
+                            <a:schemeClr val="dk1"/>
+                          </a:solidFill>
+                        </a:rPr>
+                        <a:t>-39.771174</a:t>
+                      </a:r>
+                      <a:endParaRPr sz="1050">
+                        <a:solidFill>
+                          <a:schemeClr val="dk1"/>
+                        </a:solidFill>
+                      </a:endParaRPr>
+                    </a:p>
+                  </a:txBody>
+                  <a:tcPr marT="38100" marB="38100" marR="76200" marL="76200">
+                    <a:lnL cap="flat" cmpd="sng" w="9525">
+                      <a:solidFill>
+                        <a:srgbClr val="000000"/>
+                      </a:solidFill>
+                      <a:prstDash val="solid"/>
+                      <a:round/>
+                      <a:headEnd len="sm" w="sm" type="none"/>
+                      <a:tailEnd len="sm" w="sm" type="none"/>
+                    </a:lnL>
+                    <a:lnR cap="flat" cmpd="sng" w="9525">
+                      <a:solidFill>
+                        <a:srgbClr val="000000"/>
+                      </a:solidFill>
+                      <a:prstDash val="solid"/>
+                      <a:round/>
+                      <a:headEnd len="sm" w="sm" type="none"/>
+                      <a:tailEnd len="sm" w="sm" type="none"/>
+                    </a:lnR>
+                    <a:lnT cap="flat" cmpd="sng" w="9525">
+                      <a:solidFill>
+                        <a:srgbClr val="000000"/>
+                      </a:solidFill>
+                      <a:prstDash val="solid"/>
+                      <a:round/>
+                      <a:headEnd len="sm" w="sm" type="none"/>
+                      <a:tailEnd len="sm" w="sm" type="none"/>
+                    </a:lnT>
+                    <a:lnB cap="flat" cmpd="sng" w="9525">
+                      <a:solidFill>
+                        <a:srgbClr val="000000"/>
+                      </a:solidFill>
+                      <a:prstDash val="solid"/>
+                      <a:round/>
+                      <a:headEnd len="sm" w="sm" type="none"/>
+                      <a:tailEnd len="sm" w="sm" type="none"/>
+                    </a:lnB>
+                  </a:tcPr>
+                </a:tc>
+                <a:tc>
+                  <a:txBody>
+                    <a:bodyPr/>
+                    <a:lstStyle/>
+                    <a:p>
+                      <a:pPr indent="0" lvl="0" marL="0" rtl="0" algn="r">
+                        <a:lnSpc>
+                          <a:spcPct val="115000"/>
+                        </a:lnSpc>
+                        <a:spcBef>
+                          <a:spcPts val="0"/>
+                        </a:spcBef>
+                        <a:spcAft>
+                          <a:spcPts val="0"/>
+                        </a:spcAft>
+                        <a:buNone/>
+                      </a:pPr>
+                      <a:r>
+                        <a:rPr lang="en-US" sz="1050">
+                          <a:solidFill>
+                            <a:schemeClr val="dk1"/>
+                          </a:solidFill>
+                        </a:rPr>
+                        <a:t>Younger (18mo-4y) short</a:t>
+                      </a:r>
+                      <a:endParaRPr sz="1050">
+                        <a:solidFill>
+                          <a:schemeClr val="dk1"/>
+                        </a:solidFill>
+                      </a:endParaRPr>
+                    </a:p>
+                  </a:txBody>
+                  <a:tcPr marT="38100" marB="38100" marR="76200" marL="76200">
+                    <a:lnL cap="flat" cmpd="sng" w="9525">
+                      <a:solidFill>
+                        <a:srgbClr val="000000"/>
+                      </a:solidFill>
+                      <a:prstDash val="solid"/>
+                      <a:round/>
+                      <a:headEnd len="sm" w="sm" type="none"/>
+                      <a:tailEnd len="sm" w="sm" type="none"/>
+                    </a:lnL>
+                    <a:lnR cap="flat" cmpd="sng" w="9525">
+                      <a:solidFill>
+                        <a:srgbClr val="000000"/>
+                      </a:solidFill>
+                      <a:prstDash val="solid"/>
+                      <a:round/>
+                      <a:headEnd len="sm" w="sm" type="none"/>
+                      <a:tailEnd len="sm" w="sm" type="none"/>
+                    </a:lnR>
+                    <a:lnT cap="flat" cmpd="sng" w="9525">
+                      <a:solidFill>
+                        <a:srgbClr val="000000"/>
+                      </a:solidFill>
+                      <a:prstDash val="solid"/>
+                      <a:round/>
+                      <a:headEnd len="sm" w="sm" type="none"/>
+                      <a:tailEnd len="sm" w="sm" type="none"/>
+                    </a:lnT>
+                    <a:lnB cap="flat" cmpd="sng" w="9525">
+                      <a:solidFill>
+                        <a:srgbClr val="000000"/>
+                      </a:solidFill>
+                      <a:prstDash val="solid"/>
+                      <a:round/>
+                      <a:headEnd len="sm" w="sm" type="none"/>
+                      <a:tailEnd len="sm" w="sm" type="none"/>
+                    </a:lnB>
+                  </a:tcPr>
+                </a:tc>
+              </a:tr>
+              <a:tr h="257175">
+                <a:tc>
+                  <a:txBody>
+                    <a:bodyPr/>
+                    <a:lstStyle/>
+                    <a:p>
+                      <a:pPr indent="0" lvl="0" marL="0" rtl="0" algn="r">
+                        <a:lnSpc>
+                          <a:spcPct val="115000"/>
+                        </a:lnSpc>
+                        <a:spcBef>
+                          <a:spcPts val="0"/>
+                        </a:spcBef>
+                        <a:spcAft>
+                          <a:spcPts val="0"/>
+                        </a:spcAft>
+                        <a:buNone/>
+                      </a:pPr>
+                      <a:r>
+                        <a:rPr lang="en-US" sz="1050">
+                          <a:solidFill>
+                            <a:schemeClr val="dk1"/>
+                          </a:solidFill>
+                        </a:rPr>
+                        <a:t>Sembawang Central</a:t>
+                      </a:r>
+                      <a:endParaRPr sz="1050">
+                        <a:solidFill>
+                          <a:schemeClr val="dk1"/>
+                        </a:solidFill>
+                      </a:endParaRPr>
+                    </a:p>
+                  </a:txBody>
+                  <a:tcPr marT="38100" marB="38100" marR="76200" marL="76200" anchor="ctr">
+                    <a:lnL cap="flat" cmpd="sng" w="9525">
+                      <a:solidFill>
+                        <a:srgbClr val="000000"/>
+                      </a:solidFill>
+                      <a:prstDash val="solid"/>
+                      <a:round/>
+                      <a:headEnd len="sm" w="sm" type="none"/>
+                      <a:tailEnd len="sm" w="sm" type="none"/>
+                    </a:lnL>
+                    <a:lnR cap="flat" cmpd="sng" w="9525">
+                      <a:solidFill>
+                        <a:srgbClr val="000000"/>
+                      </a:solidFill>
+                      <a:prstDash val="solid"/>
+                      <a:round/>
+                      <a:headEnd len="sm" w="sm" type="none"/>
+                      <a:tailEnd len="sm" w="sm" type="none"/>
+                    </a:lnR>
+                    <a:lnT cap="flat" cmpd="sng" w="9525">
+                      <a:solidFill>
+                        <a:srgbClr val="000000"/>
+                      </a:solidFill>
+                      <a:prstDash val="solid"/>
+                      <a:round/>
+                      <a:headEnd len="sm" w="sm" type="none"/>
+                      <a:tailEnd len="sm" w="sm" type="none"/>
+                    </a:lnT>
+                    <a:lnB cap="flat" cmpd="sng" w="9525">
+                      <a:solidFill>
+                        <a:srgbClr val="000000"/>
+                      </a:solidFill>
+                      <a:prstDash val="solid"/>
+                      <a:round/>
+                      <a:headEnd len="sm" w="sm" type="none"/>
+                      <a:tailEnd len="sm" w="sm" type="none"/>
+                    </a:lnB>
+                  </a:tcPr>
+                </a:tc>
+                <a:tc>
+                  <a:txBody>
+                    <a:bodyPr/>
+                    <a:lstStyle/>
+                    <a:p>
+                      <a:pPr indent="0" lvl="0" marL="0" rtl="0" algn="r">
+                        <a:lnSpc>
+                          <a:spcPct val="115000"/>
+                        </a:lnSpc>
+                        <a:spcBef>
+                          <a:spcPts val="0"/>
+                        </a:spcBef>
+                        <a:spcAft>
+                          <a:spcPts val="0"/>
+                        </a:spcAft>
+                        <a:buNone/>
+                      </a:pPr>
+                      <a:r>
+                        <a:rPr lang="en-US" sz="1050">
+                          <a:solidFill>
+                            <a:schemeClr val="dk1"/>
+                          </a:solidFill>
+                        </a:rPr>
+                        <a:t>Sembawang</a:t>
+                      </a:r>
+                      <a:endParaRPr sz="1050">
+                        <a:solidFill>
+                          <a:schemeClr val="dk1"/>
+                        </a:solidFill>
+                      </a:endParaRPr>
+                    </a:p>
+                  </a:txBody>
+                  <a:tcPr marT="38100" marB="38100" marR="76200" marL="76200">
+                    <a:lnL cap="flat" cmpd="sng" w="9525">
+                      <a:solidFill>
+                        <a:srgbClr val="000000"/>
+                      </a:solidFill>
+                      <a:prstDash val="solid"/>
+                      <a:round/>
+                      <a:headEnd len="sm" w="sm" type="none"/>
+                      <a:tailEnd len="sm" w="sm" type="none"/>
+                    </a:lnL>
+                    <a:lnR cap="flat" cmpd="sng" w="9525">
+                      <a:solidFill>
+                        <a:srgbClr val="000000"/>
+                      </a:solidFill>
+                      <a:prstDash val="solid"/>
+                      <a:round/>
+                      <a:headEnd len="sm" w="sm" type="none"/>
+                      <a:tailEnd len="sm" w="sm" type="none"/>
+                    </a:lnR>
+                    <a:lnT cap="flat" cmpd="sng" w="9525">
+                      <a:solidFill>
+                        <a:srgbClr val="000000"/>
+                      </a:solidFill>
+                      <a:prstDash val="solid"/>
+                      <a:round/>
+                      <a:headEnd len="sm" w="sm" type="none"/>
+                      <a:tailEnd len="sm" w="sm" type="none"/>
+                    </a:lnT>
+                    <a:lnB cap="flat" cmpd="sng" w="9525">
+                      <a:solidFill>
+                        <a:srgbClr val="000000"/>
+                      </a:solidFill>
+                      <a:prstDash val="solid"/>
+                      <a:round/>
+                      <a:headEnd len="sm" w="sm" type="none"/>
+                      <a:tailEnd len="sm" w="sm" type="none"/>
+                    </a:lnB>
+                  </a:tcPr>
+                </a:tc>
+                <a:tc>
+                  <a:txBody>
+                    <a:bodyPr/>
+                    <a:lstStyle/>
+                    <a:p>
+                      <a:pPr indent="0" lvl="0" marL="0" rtl="0" algn="r">
+                        <a:lnSpc>
+                          <a:spcPct val="115000"/>
+                        </a:lnSpc>
+                        <a:spcBef>
+                          <a:spcPts val="0"/>
+                        </a:spcBef>
+                        <a:spcAft>
+                          <a:spcPts val="0"/>
+                        </a:spcAft>
+                        <a:buNone/>
+                      </a:pPr>
+                      <a:r>
+                        <a:rPr lang="en-US" sz="1050">
+                          <a:solidFill>
+                            <a:schemeClr val="dk1"/>
+                          </a:solidFill>
+                        </a:rPr>
+                        <a:t>19.0</a:t>
+                      </a:r>
+                      <a:endParaRPr sz="1050">
+                        <a:solidFill>
+                          <a:schemeClr val="dk1"/>
+                        </a:solidFill>
+                      </a:endParaRPr>
+                    </a:p>
+                  </a:txBody>
+                  <a:tcPr marT="38100" marB="38100" marR="76200" marL="76200">
+                    <a:lnL cap="flat" cmpd="sng" w="9525">
+                      <a:solidFill>
+                        <a:srgbClr val="000000"/>
+                      </a:solidFill>
+                      <a:prstDash val="solid"/>
+                      <a:round/>
+                      <a:headEnd len="sm" w="sm" type="none"/>
+                      <a:tailEnd len="sm" w="sm" type="none"/>
+                    </a:lnL>
+                    <a:lnR cap="flat" cmpd="sng" w="9525">
+                      <a:solidFill>
+                        <a:srgbClr val="000000"/>
+                      </a:solidFill>
+                      <a:prstDash val="solid"/>
+                      <a:round/>
+                      <a:headEnd len="sm" w="sm" type="none"/>
+                      <a:tailEnd len="sm" w="sm" type="none"/>
+                    </a:lnR>
+                    <a:lnT cap="flat" cmpd="sng" w="9525">
+                      <a:solidFill>
+                        <a:srgbClr val="000000"/>
+                      </a:solidFill>
+                      <a:prstDash val="solid"/>
+                      <a:round/>
+                      <a:headEnd len="sm" w="sm" type="none"/>
+                      <a:tailEnd len="sm" w="sm" type="none"/>
+                    </a:lnT>
+                    <a:lnB cap="flat" cmpd="sng" w="9525">
+                      <a:solidFill>
+                        <a:srgbClr val="000000"/>
+                      </a:solidFill>
+                      <a:prstDash val="solid"/>
+                      <a:round/>
+                      <a:headEnd len="sm" w="sm" type="none"/>
+                      <a:tailEnd len="sm" w="sm" type="none"/>
+                    </a:lnB>
+                  </a:tcPr>
+                </a:tc>
+                <a:tc>
+                  <a:txBody>
+                    <a:bodyPr/>
+                    <a:lstStyle/>
+                    <a:p>
+                      <a:pPr indent="0" lvl="0" marL="0" rtl="0" algn="r">
+                        <a:lnSpc>
+                          <a:spcPct val="115000"/>
+                        </a:lnSpc>
+                        <a:spcBef>
+                          <a:spcPts val="0"/>
+                        </a:spcBef>
+                        <a:spcAft>
+                          <a:spcPts val="0"/>
+                        </a:spcAft>
+                        <a:buNone/>
+                      </a:pPr>
+                      <a:r>
+                        <a:rPr lang="en-US" sz="1050">
+                          <a:solidFill>
+                            <a:schemeClr val="dk1"/>
+                          </a:solidFill>
+                        </a:rPr>
+                        <a:t>-266.249063</a:t>
+                      </a:r>
+                      <a:endParaRPr sz="1050">
+                        <a:solidFill>
+                          <a:schemeClr val="dk1"/>
+                        </a:solidFill>
+                      </a:endParaRPr>
+                    </a:p>
+                  </a:txBody>
+                  <a:tcPr marT="38100" marB="38100" marR="76200" marL="76200">
+                    <a:lnL cap="flat" cmpd="sng" w="9525">
+                      <a:solidFill>
+                        <a:srgbClr val="000000"/>
+                      </a:solidFill>
+                      <a:prstDash val="solid"/>
+                      <a:round/>
+                      <a:headEnd len="sm" w="sm" type="none"/>
+                      <a:tailEnd len="sm" w="sm" type="none"/>
+                    </a:lnL>
+                    <a:lnR cap="flat" cmpd="sng" w="9525">
+                      <a:solidFill>
+                        <a:srgbClr val="000000"/>
+                      </a:solidFill>
+                      <a:prstDash val="solid"/>
+                      <a:round/>
+                      <a:headEnd len="sm" w="sm" type="none"/>
+                      <a:tailEnd len="sm" w="sm" type="none"/>
+                    </a:lnR>
+                    <a:lnT cap="flat" cmpd="sng" w="9525">
+                      <a:solidFill>
+                        <a:srgbClr val="000000"/>
+                      </a:solidFill>
+                      <a:prstDash val="solid"/>
+                      <a:round/>
+                      <a:headEnd len="sm" w="sm" type="none"/>
+                      <a:tailEnd len="sm" w="sm" type="none"/>
+                    </a:lnT>
+                    <a:lnB cap="flat" cmpd="sng" w="9525">
+                      <a:solidFill>
+                        <a:srgbClr val="000000"/>
+                      </a:solidFill>
+                      <a:prstDash val="solid"/>
+                      <a:round/>
+                      <a:headEnd len="sm" w="sm" type="none"/>
+                      <a:tailEnd len="sm" w="sm" type="none"/>
+                    </a:lnB>
+                  </a:tcPr>
+                </a:tc>
+                <a:tc>
+                  <a:txBody>
+                    <a:bodyPr/>
+                    <a:lstStyle/>
+                    <a:p>
+                      <a:pPr indent="0" lvl="0" marL="0" rtl="0" algn="r">
+                        <a:lnSpc>
+                          <a:spcPct val="115000"/>
+                        </a:lnSpc>
+                        <a:spcBef>
+                          <a:spcPts val="0"/>
+                        </a:spcBef>
+                        <a:spcAft>
+                          <a:spcPts val="0"/>
+                        </a:spcAft>
+                        <a:buNone/>
+                      </a:pPr>
+                      <a:r>
+                        <a:rPr lang="en-US" sz="1050">
+                          <a:solidFill>
+                            <a:schemeClr val="dk1"/>
+                          </a:solidFill>
+                        </a:rPr>
+                        <a:t>1.922918</a:t>
+                      </a:r>
+                      <a:endParaRPr sz="1050">
+                        <a:solidFill>
+                          <a:schemeClr val="dk1"/>
+                        </a:solidFill>
+                      </a:endParaRPr>
+                    </a:p>
+                  </a:txBody>
+                  <a:tcPr marT="38100" marB="38100" marR="76200" marL="76200">
+                    <a:lnL cap="flat" cmpd="sng" w="9525">
+                      <a:solidFill>
+                        <a:srgbClr val="000000"/>
+                      </a:solidFill>
+                      <a:prstDash val="solid"/>
+                      <a:round/>
+                      <a:headEnd len="sm" w="sm" type="none"/>
+                      <a:tailEnd len="sm" w="sm" type="none"/>
+                    </a:lnL>
+                    <a:lnR cap="flat" cmpd="sng" w="9525">
+                      <a:solidFill>
+                        <a:srgbClr val="000000"/>
+                      </a:solidFill>
+                      <a:prstDash val="solid"/>
+                      <a:round/>
+                      <a:headEnd len="sm" w="sm" type="none"/>
+                      <a:tailEnd len="sm" w="sm" type="none"/>
+                    </a:lnR>
+                    <a:lnT cap="flat" cmpd="sng" w="9525">
+                      <a:solidFill>
+                        <a:srgbClr val="000000"/>
+                      </a:solidFill>
+                      <a:prstDash val="solid"/>
+                      <a:round/>
+                      <a:headEnd len="sm" w="sm" type="none"/>
+                      <a:tailEnd len="sm" w="sm" type="none"/>
+                    </a:lnT>
+                    <a:lnB cap="flat" cmpd="sng" w="9525">
+                      <a:solidFill>
+                        <a:srgbClr val="000000"/>
+                      </a:solidFill>
+                      <a:prstDash val="solid"/>
+                      <a:round/>
+                      <a:headEnd len="sm" w="sm" type="none"/>
+                      <a:tailEnd len="sm" w="sm" type="none"/>
+                    </a:lnB>
+                  </a:tcPr>
+                </a:tc>
+                <a:tc>
+                  <a:txBody>
+                    <a:bodyPr/>
+                    <a:lstStyle/>
+                    <a:p>
+                      <a:pPr indent="0" lvl="0" marL="0" rtl="0" algn="r">
+                        <a:lnSpc>
+                          <a:spcPct val="115000"/>
+                        </a:lnSpc>
+                        <a:spcBef>
+                          <a:spcPts val="0"/>
+                        </a:spcBef>
+                        <a:spcAft>
+                          <a:spcPts val="0"/>
+                        </a:spcAft>
+                        <a:buNone/>
+                      </a:pPr>
+                      <a:r>
+                        <a:rPr lang="en-US" sz="1050">
+                          <a:solidFill>
+                            <a:schemeClr val="dk1"/>
+                          </a:solidFill>
+                        </a:rPr>
+                        <a:t>-59.838648</a:t>
+                      </a:r>
+                      <a:endParaRPr sz="1050">
+                        <a:solidFill>
+                          <a:schemeClr val="dk1"/>
+                        </a:solidFill>
+                      </a:endParaRPr>
+                    </a:p>
+                  </a:txBody>
+                  <a:tcPr marT="38100" marB="38100" marR="76200" marL="76200">
+                    <a:lnL cap="flat" cmpd="sng" w="9525">
+                      <a:solidFill>
+                        <a:srgbClr val="000000"/>
+                      </a:solidFill>
+                      <a:prstDash val="solid"/>
+                      <a:round/>
+                      <a:headEnd len="sm" w="sm" type="none"/>
+                      <a:tailEnd len="sm" w="sm" type="none"/>
+                    </a:lnL>
+                    <a:lnR cap="flat" cmpd="sng" w="9525">
+                      <a:solidFill>
+                        <a:srgbClr val="000000"/>
+                      </a:solidFill>
+                      <a:prstDash val="solid"/>
+                      <a:round/>
+                      <a:headEnd len="sm" w="sm" type="none"/>
+                      <a:tailEnd len="sm" w="sm" type="none"/>
+                    </a:lnR>
+                    <a:lnT cap="flat" cmpd="sng" w="9525">
+                      <a:solidFill>
+                        <a:srgbClr val="000000"/>
+                      </a:solidFill>
+                      <a:prstDash val="solid"/>
+                      <a:round/>
+                      <a:headEnd len="sm" w="sm" type="none"/>
+                      <a:tailEnd len="sm" w="sm" type="none"/>
+                    </a:lnT>
+                    <a:lnB cap="flat" cmpd="sng" w="9525">
+                      <a:solidFill>
+                        <a:srgbClr val="000000"/>
+                      </a:solidFill>
+                      <a:prstDash val="solid"/>
+                      <a:round/>
+                      <a:headEnd len="sm" w="sm" type="none"/>
+                      <a:tailEnd len="sm" w="sm" type="none"/>
+                    </a:lnB>
+                  </a:tcPr>
+                </a:tc>
+                <a:tc>
+                  <a:txBody>
+                    <a:bodyPr/>
+                    <a:lstStyle/>
+                    <a:p>
+                      <a:pPr indent="0" lvl="0" marL="0" rtl="0" algn="r">
+                        <a:lnSpc>
+                          <a:spcPct val="115000"/>
+                        </a:lnSpc>
+                        <a:spcBef>
+                          <a:spcPts val="0"/>
+                        </a:spcBef>
+                        <a:spcAft>
+                          <a:spcPts val="0"/>
+                        </a:spcAft>
+                        <a:buNone/>
+                      </a:pPr>
+                      <a:r>
+                        <a:rPr lang="en-US" sz="1050">
+                          <a:solidFill>
+                            <a:schemeClr val="dk1"/>
+                          </a:solidFill>
+                        </a:rPr>
+                        <a:t>Younger (18mo-4y) short</a:t>
+                      </a:r>
+                      <a:endParaRPr sz="1050">
+                        <a:solidFill>
+                          <a:schemeClr val="dk1"/>
+                        </a:solidFill>
+                      </a:endParaRPr>
+                    </a:p>
+                  </a:txBody>
+                  <a:tcPr marT="38100" marB="38100" marR="76200" marL="76200">
+                    <a:lnL cap="flat" cmpd="sng" w="9525">
+                      <a:solidFill>
+                        <a:srgbClr val="000000"/>
+                      </a:solidFill>
+                      <a:prstDash val="solid"/>
+                      <a:round/>
+                      <a:headEnd len="sm" w="sm" type="none"/>
+                      <a:tailEnd len="sm" w="sm" type="none"/>
+                    </a:lnL>
+                    <a:lnR cap="flat" cmpd="sng" w="9525">
+                      <a:solidFill>
+                        <a:srgbClr val="000000"/>
+                      </a:solidFill>
+                      <a:prstDash val="solid"/>
+                      <a:round/>
+                      <a:headEnd len="sm" w="sm" type="none"/>
+                      <a:tailEnd len="sm" w="sm" type="none"/>
+                    </a:lnR>
+                    <a:lnT cap="flat" cmpd="sng" w="9525">
+                      <a:solidFill>
+                        <a:srgbClr val="000000"/>
+                      </a:solidFill>
+                      <a:prstDash val="solid"/>
+                      <a:round/>
+                      <a:headEnd len="sm" w="sm" type="none"/>
+                      <a:tailEnd len="sm" w="sm" type="none"/>
+                    </a:lnT>
+                    <a:lnB cap="flat" cmpd="sng" w="9525">
+                      <a:solidFill>
+                        <a:srgbClr val="000000"/>
+                      </a:solidFill>
+                      <a:prstDash val="solid"/>
+                      <a:round/>
+                      <a:headEnd len="sm" w="sm" type="none"/>
+                      <a:tailEnd len="sm" w="sm" type="none"/>
+                    </a:lnB>
+                  </a:tcPr>
+                </a:tc>
+              </a:tr>
+              <a:tr h="257175">
+                <a:tc>
+                  <a:txBody>
+                    <a:bodyPr/>
+                    <a:lstStyle/>
+                    <a:p>
+                      <a:pPr indent="0" lvl="0" marL="0" rtl="0" algn="r">
+                        <a:lnSpc>
+                          <a:spcPct val="115000"/>
+                        </a:lnSpc>
+                        <a:spcBef>
+                          <a:spcPts val="0"/>
+                        </a:spcBef>
+                        <a:spcAft>
+                          <a:spcPts val="0"/>
+                        </a:spcAft>
+                        <a:buNone/>
+                      </a:pPr>
+                      <a:r>
+                        <a:rPr lang="en-US" sz="1050">
+                          <a:solidFill>
+                            <a:schemeClr val="dk1"/>
+                          </a:solidFill>
+                        </a:rPr>
+                        <a:t>Jurong West Central</a:t>
+                      </a:r>
+                      <a:endParaRPr sz="1050">
+                        <a:solidFill>
+                          <a:schemeClr val="dk1"/>
+                        </a:solidFill>
+                      </a:endParaRPr>
+                    </a:p>
+                  </a:txBody>
+                  <a:tcPr marT="38100" marB="38100" marR="76200" marL="76200" anchor="ctr">
+                    <a:lnL cap="flat" cmpd="sng" w="9525">
+                      <a:solidFill>
+                        <a:srgbClr val="000000"/>
+                      </a:solidFill>
+                      <a:prstDash val="solid"/>
+                      <a:round/>
+                      <a:headEnd len="sm" w="sm" type="none"/>
+                      <a:tailEnd len="sm" w="sm" type="none"/>
+                    </a:lnL>
+                    <a:lnR cap="flat" cmpd="sng" w="9525">
+                      <a:solidFill>
+                        <a:srgbClr val="000000"/>
+                      </a:solidFill>
+                      <a:prstDash val="solid"/>
+                      <a:round/>
+                      <a:headEnd len="sm" w="sm" type="none"/>
+                      <a:tailEnd len="sm" w="sm" type="none"/>
+                    </a:lnR>
+                    <a:lnT cap="flat" cmpd="sng" w="9525">
+                      <a:solidFill>
+                        <a:srgbClr val="000000"/>
+                      </a:solidFill>
+                      <a:prstDash val="solid"/>
+                      <a:round/>
+                      <a:headEnd len="sm" w="sm" type="none"/>
+                      <a:tailEnd len="sm" w="sm" type="none"/>
+                    </a:lnT>
+                    <a:lnB cap="flat" cmpd="sng" w="9525">
+                      <a:solidFill>
+                        <a:srgbClr val="000000"/>
+                      </a:solidFill>
+                      <a:prstDash val="solid"/>
+                      <a:round/>
+                      <a:headEnd len="sm" w="sm" type="none"/>
+                      <a:tailEnd len="sm" w="sm" type="none"/>
+                    </a:lnB>
+                  </a:tcPr>
+                </a:tc>
+                <a:tc>
+                  <a:txBody>
+                    <a:bodyPr/>
+                    <a:lstStyle/>
+                    <a:p>
+                      <a:pPr indent="0" lvl="0" marL="0" rtl="0" algn="r">
+                        <a:lnSpc>
+                          <a:spcPct val="115000"/>
+                        </a:lnSpc>
+                        <a:spcBef>
+                          <a:spcPts val="0"/>
+                        </a:spcBef>
+                        <a:spcAft>
+                          <a:spcPts val="0"/>
+                        </a:spcAft>
+                        <a:buNone/>
+                      </a:pPr>
+                      <a:r>
+                        <a:rPr lang="en-US" sz="1050">
+                          <a:solidFill>
+                            <a:schemeClr val="dk1"/>
+                          </a:solidFill>
+                        </a:rPr>
+                        <a:t>Jurong West</a:t>
+                      </a:r>
+                      <a:endParaRPr sz="1050">
+                        <a:solidFill>
+                          <a:schemeClr val="dk1"/>
+                        </a:solidFill>
+                      </a:endParaRPr>
+                    </a:p>
+                  </a:txBody>
+                  <a:tcPr marT="38100" marB="38100" marR="76200" marL="76200">
+                    <a:lnL cap="flat" cmpd="sng" w="9525">
+                      <a:solidFill>
+                        <a:srgbClr val="000000"/>
+                      </a:solidFill>
+                      <a:prstDash val="solid"/>
+                      <a:round/>
+                      <a:headEnd len="sm" w="sm" type="none"/>
+                      <a:tailEnd len="sm" w="sm" type="none"/>
+                    </a:lnL>
+                    <a:lnR cap="flat" cmpd="sng" w="9525">
+                      <a:solidFill>
+                        <a:srgbClr val="000000"/>
+                      </a:solidFill>
+                      <a:prstDash val="solid"/>
+                      <a:round/>
+                      <a:headEnd len="sm" w="sm" type="none"/>
+                      <a:tailEnd len="sm" w="sm" type="none"/>
+                    </a:lnR>
+                    <a:lnT cap="flat" cmpd="sng" w="9525">
+                      <a:solidFill>
+                        <a:srgbClr val="000000"/>
+                      </a:solidFill>
+                      <a:prstDash val="solid"/>
+                      <a:round/>
+                      <a:headEnd len="sm" w="sm" type="none"/>
+                      <a:tailEnd len="sm" w="sm" type="none"/>
+                    </a:lnT>
+                    <a:lnB cap="flat" cmpd="sng" w="9525">
+                      <a:solidFill>
+                        <a:srgbClr val="000000"/>
+                      </a:solidFill>
+                      <a:prstDash val="solid"/>
+                      <a:round/>
+                      <a:headEnd len="sm" w="sm" type="none"/>
+                      <a:tailEnd len="sm" w="sm" type="none"/>
+                    </a:lnB>
+                  </a:tcPr>
+                </a:tc>
+                <a:tc>
+                  <a:txBody>
+                    <a:bodyPr/>
+                    <a:lstStyle/>
+                    <a:p>
+                      <a:pPr indent="0" lvl="0" marL="0" rtl="0" algn="r">
+                        <a:lnSpc>
+                          <a:spcPct val="115000"/>
+                        </a:lnSpc>
+                        <a:spcBef>
+                          <a:spcPts val="0"/>
+                        </a:spcBef>
+                        <a:spcAft>
+                          <a:spcPts val="0"/>
+                        </a:spcAft>
+                        <a:buNone/>
+                      </a:pPr>
+                      <a:r>
+                        <a:rPr lang="en-US" sz="1050">
+                          <a:solidFill>
+                            <a:schemeClr val="dk1"/>
+                          </a:solidFill>
+                        </a:rPr>
+                        <a:t>21.0</a:t>
+                      </a:r>
+                      <a:endParaRPr sz="1050">
+                        <a:solidFill>
+                          <a:schemeClr val="dk1"/>
+                        </a:solidFill>
+                      </a:endParaRPr>
+                    </a:p>
+                  </a:txBody>
+                  <a:tcPr marT="38100" marB="38100" marR="76200" marL="76200">
+                    <a:lnL cap="flat" cmpd="sng" w="9525">
+                      <a:solidFill>
+                        <a:srgbClr val="000000"/>
+                      </a:solidFill>
+                      <a:prstDash val="solid"/>
+                      <a:round/>
+                      <a:headEnd len="sm" w="sm" type="none"/>
+                      <a:tailEnd len="sm" w="sm" type="none"/>
+                    </a:lnL>
+                    <a:lnR cap="flat" cmpd="sng" w="9525">
+                      <a:solidFill>
+                        <a:srgbClr val="000000"/>
+                      </a:solidFill>
+                      <a:prstDash val="solid"/>
+                      <a:round/>
+                      <a:headEnd len="sm" w="sm" type="none"/>
+                      <a:tailEnd len="sm" w="sm" type="none"/>
+                    </a:lnR>
+                    <a:lnT cap="flat" cmpd="sng" w="9525">
+                      <a:solidFill>
+                        <a:srgbClr val="000000"/>
+                      </a:solidFill>
+                      <a:prstDash val="solid"/>
+                      <a:round/>
+                      <a:headEnd len="sm" w="sm" type="none"/>
+                      <a:tailEnd len="sm" w="sm" type="none"/>
+                    </a:lnT>
+                    <a:lnB cap="flat" cmpd="sng" w="9525">
+                      <a:solidFill>
+                        <a:srgbClr val="000000"/>
+                      </a:solidFill>
+                      <a:prstDash val="solid"/>
+                      <a:round/>
+                      <a:headEnd len="sm" w="sm" type="none"/>
+                      <a:tailEnd len="sm" w="sm" type="none"/>
+                    </a:lnB>
+                  </a:tcPr>
+                </a:tc>
+                <a:tc>
+                  <a:txBody>
+                    <a:bodyPr/>
+                    <a:lstStyle/>
+                    <a:p>
+                      <a:pPr indent="0" lvl="0" marL="0" rtl="0" algn="r">
+                        <a:lnSpc>
+                          <a:spcPct val="115000"/>
+                        </a:lnSpc>
+                        <a:spcBef>
+                          <a:spcPts val="0"/>
+                        </a:spcBef>
+                        <a:spcAft>
+                          <a:spcPts val="0"/>
+                        </a:spcAft>
+                        <a:buNone/>
+                      </a:pPr>
+                      <a:r>
+                        <a:rPr lang="en-US" sz="1050">
+                          <a:solidFill>
+                            <a:schemeClr val="dk1"/>
+                          </a:solidFill>
+                        </a:rPr>
+                        <a:t>-216.644383</a:t>
+                      </a:r>
+                      <a:endParaRPr sz="1050">
+                        <a:solidFill>
+                          <a:schemeClr val="dk1"/>
+                        </a:solidFill>
+                      </a:endParaRPr>
+                    </a:p>
+                  </a:txBody>
+                  <a:tcPr marT="38100" marB="38100" marR="76200" marL="76200">
+                    <a:lnL cap="flat" cmpd="sng" w="9525">
+                      <a:solidFill>
+                        <a:srgbClr val="000000"/>
+                      </a:solidFill>
+                      <a:prstDash val="solid"/>
+                      <a:round/>
+                      <a:headEnd len="sm" w="sm" type="none"/>
+                      <a:tailEnd len="sm" w="sm" type="none"/>
+                    </a:lnL>
+                    <a:lnR cap="flat" cmpd="sng" w="9525">
+                      <a:solidFill>
+                        <a:srgbClr val="000000"/>
+                      </a:solidFill>
+                      <a:prstDash val="solid"/>
+                      <a:round/>
+                      <a:headEnd len="sm" w="sm" type="none"/>
+                      <a:tailEnd len="sm" w="sm" type="none"/>
+                    </a:lnR>
+                    <a:lnT cap="flat" cmpd="sng" w="9525">
+                      <a:solidFill>
+                        <a:srgbClr val="000000"/>
+                      </a:solidFill>
+                      <a:prstDash val="solid"/>
+                      <a:round/>
+                      <a:headEnd len="sm" w="sm" type="none"/>
+                      <a:tailEnd len="sm" w="sm" type="none"/>
+                    </a:lnT>
+                    <a:lnB cap="flat" cmpd="sng" w="9525">
+                      <a:solidFill>
+                        <a:srgbClr val="000000"/>
+                      </a:solidFill>
+                      <a:prstDash val="solid"/>
+                      <a:round/>
+                      <a:headEnd len="sm" w="sm" type="none"/>
+                      <a:tailEnd len="sm" w="sm" type="none"/>
+                    </a:lnB>
+                  </a:tcPr>
+                </a:tc>
+                <a:tc>
+                  <a:txBody>
+                    <a:bodyPr/>
+                    <a:lstStyle/>
+                    <a:p>
+                      <a:pPr indent="0" lvl="0" marL="0" rtl="0" algn="r">
+                        <a:lnSpc>
+                          <a:spcPct val="115000"/>
+                        </a:lnSpc>
+                        <a:spcBef>
+                          <a:spcPts val="0"/>
+                        </a:spcBef>
+                        <a:spcAft>
+                          <a:spcPts val="0"/>
+                        </a:spcAft>
+                        <a:buNone/>
+                      </a:pPr>
+                      <a:r>
+                        <a:rPr lang="en-US" sz="1050">
+                          <a:solidFill>
+                            <a:schemeClr val="dk1"/>
+                          </a:solidFill>
+                        </a:rPr>
+                        <a:t>-86.898043</a:t>
+                      </a:r>
+                      <a:endParaRPr sz="1050">
+                        <a:solidFill>
+                          <a:schemeClr val="dk1"/>
+                        </a:solidFill>
+                      </a:endParaRPr>
+                    </a:p>
+                  </a:txBody>
+                  <a:tcPr marT="38100" marB="38100" marR="76200" marL="76200">
+                    <a:lnL cap="flat" cmpd="sng" w="9525">
+                      <a:solidFill>
+                        <a:srgbClr val="000000"/>
+                      </a:solidFill>
+                      <a:prstDash val="solid"/>
+                      <a:round/>
+                      <a:headEnd len="sm" w="sm" type="none"/>
+                      <a:tailEnd len="sm" w="sm" type="none"/>
+                    </a:lnL>
+                    <a:lnR cap="flat" cmpd="sng" w="9525">
+                      <a:solidFill>
+                        <a:srgbClr val="000000"/>
+                      </a:solidFill>
+                      <a:prstDash val="solid"/>
+                      <a:round/>
+                      <a:headEnd len="sm" w="sm" type="none"/>
+                      <a:tailEnd len="sm" w="sm" type="none"/>
+                    </a:lnR>
+                    <a:lnT cap="flat" cmpd="sng" w="9525">
+                      <a:solidFill>
+                        <a:srgbClr val="000000"/>
+                      </a:solidFill>
+                      <a:prstDash val="solid"/>
+                      <a:round/>
+                      <a:headEnd len="sm" w="sm" type="none"/>
+                      <a:tailEnd len="sm" w="sm" type="none"/>
+                    </a:lnT>
+                    <a:lnB cap="flat" cmpd="sng" w="9525">
+                      <a:solidFill>
+                        <a:srgbClr val="000000"/>
+                      </a:solidFill>
+                      <a:prstDash val="solid"/>
+                      <a:round/>
+                      <a:headEnd len="sm" w="sm" type="none"/>
+                      <a:tailEnd len="sm" w="sm" type="none"/>
+                    </a:lnB>
+                  </a:tcPr>
+                </a:tc>
+                <a:tc>
+                  <a:txBody>
+                    <a:bodyPr/>
+                    <a:lstStyle/>
+                    <a:p>
+                      <a:pPr indent="0" lvl="0" marL="0" rtl="0" algn="r">
+                        <a:lnSpc>
+                          <a:spcPct val="115000"/>
+                        </a:lnSpc>
+                        <a:spcBef>
+                          <a:spcPts val="0"/>
+                        </a:spcBef>
+                        <a:spcAft>
+                          <a:spcPts val="0"/>
+                        </a:spcAft>
+                        <a:buNone/>
+                      </a:pPr>
+                      <a:r>
+                        <a:rPr lang="en-US" sz="1050">
+                          <a:solidFill>
+                            <a:schemeClr val="dk1"/>
+                          </a:solidFill>
+                        </a:rPr>
+                        <a:t>86.920327</a:t>
+                      </a:r>
+                      <a:endParaRPr sz="1050">
+                        <a:solidFill>
+                          <a:schemeClr val="dk1"/>
+                        </a:solidFill>
+                      </a:endParaRPr>
+                    </a:p>
+                  </a:txBody>
+                  <a:tcPr marT="38100" marB="38100" marR="76200" marL="76200">
+                    <a:lnL cap="flat" cmpd="sng" w="9525">
+                      <a:solidFill>
+                        <a:srgbClr val="000000"/>
+                      </a:solidFill>
+                      <a:prstDash val="solid"/>
+                      <a:round/>
+                      <a:headEnd len="sm" w="sm" type="none"/>
+                      <a:tailEnd len="sm" w="sm" type="none"/>
+                    </a:lnL>
+                    <a:lnR cap="flat" cmpd="sng" w="9525">
+                      <a:solidFill>
+                        <a:srgbClr val="000000"/>
+                      </a:solidFill>
+                      <a:prstDash val="solid"/>
+                      <a:round/>
+                      <a:headEnd len="sm" w="sm" type="none"/>
+                      <a:tailEnd len="sm" w="sm" type="none"/>
+                    </a:lnR>
+                    <a:lnT cap="flat" cmpd="sng" w="9525">
+                      <a:solidFill>
+                        <a:srgbClr val="000000"/>
+                      </a:solidFill>
+                      <a:prstDash val="solid"/>
+                      <a:round/>
+                      <a:headEnd len="sm" w="sm" type="none"/>
+                      <a:tailEnd len="sm" w="sm" type="none"/>
+                    </a:lnT>
+                    <a:lnB cap="flat" cmpd="sng" w="9525">
+                      <a:solidFill>
+                        <a:srgbClr val="000000"/>
+                      </a:solidFill>
+                      <a:prstDash val="solid"/>
+                      <a:round/>
+                      <a:headEnd len="sm" w="sm" type="none"/>
+                      <a:tailEnd len="sm" w="sm" type="none"/>
+                    </a:lnB>
+                  </a:tcPr>
+                </a:tc>
+                <a:tc>
+                  <a:txBody>
+                    <a:bodyPr/>
+                    <a:lstStyle/>
+                    <a:p>
+                      <a:pPr indent="0" lvl="0" marL="0" rtl="0" algn="r">
+                        <a:lnSpc>
+                          <a:spcPct val="115000"/>
+                        </a:lnSpc>
+                        <a:spcBef>
+                          <a:spcPts val="0"/>
+                        </a:spcBef>
+                        <a:spcAft>
+                          <a:spcPts val="0"/>
+                        </a:spcAft>
+                        <a:buNone/>
+                      </a:pPr>
+                      <a:r>
+                        <a:rPr lang="en-US" sz="1050">
+                          <a:solidFill>
+                            <a:schemeClr val="dk1"/>
+                          </a:solidFill>
+                        </a:rPr>
+                        <a:t>Older (5-6y) short</a:t>
+                      </a:r>
+                      <a:endParaRPr sz="1050">
+                        <a:solidFill>
+                          <a:schemeClr val="dk1"/>
+                        </a:solidFill>
+                      </a:endParaRPr>
+                    </a:p>
+                  </a:txBody>
+                  <a:tcPr marT="38100" marB="38100" marR="76200" marL="76200">
+                    <a:lnL cap="flat" cmpd="sng" w="9525">
+                      <a:solidFill>
+                        <a:srgbClr val="000000"/>
+                      </a:solidFill>
+                      <a:prstDash val="solid"/>
+                      <a:round/>
+                      <a:headEnd len="sm" w="sm" type="none"/>
+                      <a:tailEnd len="sm" w="sm" type="none"/>
+                    </a:lnL>
+                    <a:lnR cap="flat" cmpd="sng" w="9525">
+                      <a:solidFill>
+                        <a:srgbClr val="000000"/>
+                      </a:solidFill>
+                      <a:prstDash val="solid"/>
+                      <a:round/>
+                      <a:headEnd len="sm" w="sm" type="none"/>
+                      <a:tailEnd len="sm" w="sm" type="none"/>
+                    </a:lnR>
+                    <a:lnT cap="flat" cmpd="sng" w="9525">
+                      <a:solidFill>
+                        <a:srgbClr val="000000"/>
+                      </a:solidFill>
+                      <a:prstDash val="solid"/>
+                      <a:round/>
+                      <a:headEnd len="sm" w="sm" type="none"/>
+                      <a:tailEnd len="sm" w="sm" type="none"/>
+                    </a:lnT>
+                    <a:lnB cap="flat" cmpd="sng" w="9525">
+                      <a:solidFill>
+                        <a:srgbClr val="000000"/>
+                      </a:solidFill>
+                      <a:prstDash val="solid"/>
+                      <a:round/>
+                      <a:headEnd len="sm" w="sm" type="none"/>
+                      <a:tailEnd len="sm" w="sm" type="none"/>
+                    </a:lnB>
+                  </a:tcPr>
+                </a:tc>
+              </a:tr>
+              <a:tr h="257175">
+                <a:tc>
+                  <a:txBody>
+                    <a:bodyPr/>
+                    <a:lstStyle/>
+                    <a:p>
+                      <a:pPr indent="0" lvl="0" marL="0" rtl="0" algn="r">
+                        <a:lnSpc>
+                          <a:spcPct val="115000"/>
+                        </a:lnSpc>
+                        <a:spcBef>
+                          <a:spcPts val="0"/>
+                        </a:spcBef>
+                        <a:spcAft>
+                          <a:spcPts val="0"/>
+                        </a:spcAft>
+                        <a:buNone/>
+                      </a:pPr>
+                      <a:r>
+                        <a:rPr lang="en-US" sz="1050">
+                          <a:solidFill>
+                            <a:schemeClr val="dk1"/>
+                          </a:solidFill>
+                        </a:rPr>
+                        <a:t>Clementi Central</a:t>
+                      </a:r>
+                      <a:endParaRPr sz="1050">
+                        <a:solidFill>
+                          <a:schemeClr val="dk1"/>
+                        </a:solidFill>
+                      </a:endParaRPr>
+                    </a:p>
+                  </a:txBody>
+                  <a:tcPr marT="38100" marB="38100" marR="76200" marL="76200" anchor="ctr">
+                    <a:lnL cap="flat" cmpd="sng" w="9525">
+                      <a:solidFill>
+                        <a:srgbClr val="000000"/>
+                      </a:solidFill>
+                      <a:prstDash val="solid"/>
+                      <a:round/>
+                      <a:headEnd len="sm" w="sm" type="none"/>
+                      <a:tailEnd len="sm" w="sm" type="none"/>
+                    </a:lnL>
+                    <a:lnR cap="flat" cmpd="sng" w="9525">
+                      <a:solidFill>
+                        <a:srgbClr val="000000"/>
+                      </a:solidFill>
+                      <a:prstDash val="solid"/>
+                      <a:round/>
+                      <a:headEnd len="sm" w="sm" type="none"/>
+                      <a:tailEnd len="sm" w="sm" type="none"/>
+                    </a:lnR>
+                    <a:lnT cap="flat" cmpd="sng" w="9525">
+                      <a:solidFill>
+                        <a:srgbClr val="000000"/>
+                      </a:solidFill>
+                      <a:prstDash val="solid"/>
+                      <a:round/>
+                      <a:headEnd len="sm" w="sm" type="none"/>
+                      <a:tailEnd len="sm" w="sm" type="none"/>
+                    </a:lnT>
+                    <a:lnB cap="flat" cmpd="sng" w="9525">
+                      <a:solidFill>
+                        <a:srgbClr val="000000"/>
+                      </a:solidFill>
+                      <a:prstDash val="solid"/>
+                      <a:round/>
+                      <a:headEnd len="sm" w="sm" type="none"/>
+                      <a:tailEnd len="sm" w="sm" type="none"/>
+                    </a:lnB>
+                  </a:tcPr>
+                </a:tc>
+                <a:tc>
+                  <a:txBody>
+                    <a:bodyPr/>
+                    <a:lstStyle/>
+                    <a:p>
+                      <a:pPr indent="0" lvl="0" marL="0" rtl="0" algn="r">
+                        <a:lnSpc>
+                          <a:spcPct val="115000"/>
+                        </a:lnSpc>
+                        <a:spcBef>
+                          <a:spcPts val="0"/>
+                        </a:spcBef>
+                        <a:spcAft>
+                          <a:spcPts val="0"/>
+                        </a:spcAft>
+                        <a:buNone/>
+                      </a:pPr>
+                      <a:r>
+                        <a:rPr lang="en-US" sz="1050">
+                          <a:solidFill>
+                            <a:schemeClr val="dk1"/>
+                          </a:solidFill>
+                        </a:rPr>
+                        <a:t>Clementi</a:t>
+                      </a:r>
+                      <a:endParaRPr sz="1050">
+                        <a:solidFill>
+                          <a:schemeClr val="dk1"/>
+                        </a:solidFill>
+                      </a:endParaRPr>
+                    </a:p>
+                  </a:txBody>
+                  <a:tcPr marT="38100" marB="38100" marR="76200" marL="76200">
+                    <a:lnL cap="flat" cmpd="sng" w="9525">
+                      <a:solidFill>
+                        <a:srgbClr val="000000"/>
+                      </a:solidFill>
+                      <a:prstDash val="solid"/>
+                      <a:round/>
+                      <a:headEnd len="sm" w="sm" type="none"/>
+                      <a:tailEnd len="sm" w="sm" type="none"/>
+                    </a:lnL>
+                    <a:lnR cap="flat" cmpd="sng" w="9525">
+                      <a:solidFill>
+                        <a:srgbClr val="000000"/>
+                      </a:solidFill>
+                      <a:prstDash val="solid"/>
+                      <a:round/>
+                      <a:headEnd len="sm" w="sm" type="none"/>
+                      <a:tailEnd len="sm" w="sm" type="none"/>
+                    </a:lnR>
+                    <a:lnT cap="flat" cmpd="sng" w="9525">
+                      <a:solidFill>
+                        <a:srgbClr val="000000"/>
+                      </a:solidFill>
+                      <a:prstDash val="solid"/>
+                      <a:round/>
+                      <a:headEnd len="sm" w="sm" type="none"/>
+                      <a:tailEnd len="sm" w="sm" type="none"/>
+                    </a:lnT>
+                    <a:lnB cap="flat" cmpd="sng" w="9525">
+                      <a:solidFill>
+                        <a:srgbClr val="000000"/>
+                      </a:solidFill>
+                      <a:prstDash val="solid"/>
+                      <a:round/>
+                      <a:headEnd len="sm" w="sm" type="none"/>
+                      <a:tailEnd len="sm" w="sm" type="none"/>
+                    </a:lnB>
+                  </a:tcPr>
+                </a:tc>
+                <a:tc>
+                  <a:txBody>
+                    <a:bodyPr/>
+                    <a:lstStyle/>
+                    <a:p>
+                      <a:pPr indent="0" lvl="0" marL="0" rtl="0" algn="r">
+                        <a:lnSpc>
+                          <a:spcPct val="115000"/>
+                        </a:lnSpc>
+                        <a:spcBef>
+                          <a:spcPts val="0"/>
+                        </a:spcBef>
+                        <a:spcAft>
+                          <a:spcPts val="0"/>
+                        </a:spcAft>
+                        <a:buNone/>
+                      </a:pPr>
+                      <a:r>
+                        <a:rPr lang="en-US" sz="1050">
+                          <a:solidFill>
+                            <a:schemeClr val="dk1"/>
+                          </a:solidFill>
+                        </a:rPr>
+                        <a:t>6.0</a:t>
+                      </a:r>
+                      <a:endParaRPr sz="1050">
+                        <a:solidFill>
+                          <a:schemeClr val="dk1"/>
+                        </a:solidFill>
+                      </a:endParaRPr>
+                    </a:p>
+                  </a:txBody>
+                  <a:tcPr marT="38100" marB="38100" marR="76200" marL="76200">
+                    <a:lnL cap="flat" cmpd="sng" w="9525">
+                      <a:solidFill>
+                        <a:srgbClr val="000000"/>
+                      </a:solidFill>
+                      <a:prstDash val="solid"/>
+                      <a:round/>
+                      <a:headEnd len="sm" w="sm" type="none"/>
+                      <a:tailEnd len="sm" w="sm" type="none"/>
+                    </a:lnL>
+                    <a:lnR cap="flat" cmpd="sng" w="9525">
+                      <a:solidFill>
+                        <a:srgbClr val="000000"/>
+                      </a:solidFill>
+                      <a:prstDash val="solid"/>
+                      <a:round/>
+                      <a:headEnd len="sm" w="sm" type="none"/>
+                      <a:tailEnd len="sm" w="sm" type="none"/>
+                    </a:lnR>
+                    <a:lnT cap="flat" cmpd="sng" w="9525">
+                      <a:solidFill>
+                        <a:srgbClr val="000000"/>
+                      </a:solidFill>
+                      <a:prstDash val="solid"/>
+                      <a:round/>
+                      <a:headEnd len="sm" w="sm" type="none"/>
+                      <a:tailEnd len="sm" w="sm" type="none"/>
+                    </a:lnT>
+                    <a:lnB cap="flat" cmpd="sng" w="9525">
+                      <a:solidFill>
+                        <a:srgbClr val="000000"/>
+                      </a:solidFill>
+                      <a:prstDash val="solid"/>
+                      <a:round/>
+                      <a:headEnd len="sm" w="sm" type="none"/>
+                      <a:tailEnd len="sm" w="sm" type="none"/>
+                    </a:lnB>
+                  </a:tcPr>
+                </a:tc>
+                <a:tc>
+                  <a:txBody>
+                    <a:bodyPr/>
+                    <a:lstStyle/>
+                    <a:p>
+                      <a:pPr indent="0" lvl="0" marL="0" rtl="0" algn="r">
+                        <a:lnSpc>
+                          <a:spcPct val="115000"/>
+                        </a:lnSpc>
+                        <a:spcBef>
+                          <a:spcPts val="0"/>
+                        </a:spcBef>
+                        <a:spcAft>
+                          <a:spcPts val="0"/>
+                        </a:spcAft>
+                        <a:buNone/>
+                      </a:pPr>
+                      <a:r>
+                        <a:rPr lang="en-US" sz="1050">
+                          <a:solidFill>
+                            <a:schemeClr val="dk1"/>
+                          </a:solidFill>
+                        </a:rPr>
+                        <a:t>-151.857778</a:t>
+                      </a:r>
+                      <a:endParaRPr sz="1050">
+                        <a:solidFill>
+                          <a:schemeClr val="dk1"/>
+                        </a:solidFill>
+                      </a:endParaRPr>
+                    </a:p>
+                  </a:txBody>
+                  <a:tcPr marT="38100" marB="38100" marR="76200" marL="76200">
+                    <a:lnL cap="flat" cmpd="sng" w="9525">
+                      <a:solidFill>
+                        <a:srgbClr val="000000"/>
+                      </a:solidFill>
+                      <a:prstDash val="solid"/>
+                      <a:round/>
+                      <a:headEnd len="sm" w="sm" type="none"/>
+                      <a:tailEnd len="sm" w="sm" type="none"/>
+                    </a:lnL>
+                    <a:lnR cap="flat" cmpd="sng" w="9525">
+                      <a:solidFill>
+                        <a:srgbClr val="000000"/>
+                      </a:solidFill>
+                      <a:prstDash val="solid"/>
+                      <a:round/>
+                      <a:headEnd len="sm" w="sm" type="none"/>
+                      <a:tailEnd len="sm" w="sm" type="none"/>
+                    </a:lnR>
+                    <a:lnT cap="flat" cmpd="sng" w="9525">
+                      <a:solidFill>
+                        <a:srgbClr val="000000"/>
+                      </a:solidFill>
+                      <a:prstDash val="solid"/>
+                      <a:round/>
+                      <a:headEnd len="sm" w="sm" type="none"/>
+                      <a:tailEnd len="sm" w="sm" type="none"/>
+                    </a:lnT>
+                    <a:lnB cap="flat" cmpd="sng" w="9525">
+                      <a:solidFill>
+                        <a:srgbClr val="000000"/>
+                      </a:solidFill>
+                      <a:prstDash val="solid"/>
+                      <a:round/>
+                      <a:headEnd len="sm" w="sm" type="none"/>
+                      <a:tailEnd len="sm" w="sm" type="none"/>
+                    </a:lnB>
+                  </a:tcPr>
+                </a:tc>
+                <a:tc>
+                  <a:txBody>
+                    <a:bodyPr/>
+                    <a:lstStyle/>
+                    <a:p>
+                      <a:pPr indent="0" lvl="0" marL="0" rtl="0" algn="r">
+                        <a:lnSpc>
+                          <a:spcPct val="115000"/>
+                        </a:lnSpc>
+                        <a:spcBef>
+                          <a:spcPts val="0"/>
+                        </a:spcBef>
+                        <a:spcAft>
+                          <a:spcPts val="0"/>
+                        </a:spcAft>
+                        <a:buNone/>
+                      </a:pPr>
+                      <a:r>
+                        <a:rPr lang="en-US" sz="1050">
+                          <a:solidFill>
+                            <a:schemeClr val="dk1"/>
+                          </a:solidFill>
+                        </a:rPr>
+                        <a:t>-114.882633</a:t>
+                      </a:r>
+                      <a:endParaRPr sz="1050">
+                        <a:solidFill>
+                          <a:schemeClr val="dk1"/>
+                        </a:solidFill>
+                      </a:endParaRPr>
+                    </a:p>
+                  </a:txBody>
+                  <a:tcPr marT="38100" marB="38100" marR="76200" marL="76200">
+                    <a:lnL cap="flat" cmpd="sng" w="9525">
+                      <a:solidFill>
+                        <a:srgbClr val="000000"/>
+                      </a:solidFill>
+                      <a:prstDash val="solid"/>
+                      <a:round/>
+                      <a:headEnd len="sm" w="sm" type="none"/>
+                      <a:tailEnd len="sm" w="sm" type="none"/>
+                    </a:lnL>
+                    <a:lnR cap="flat" cmpd="sng" w="9525">
+                      <a:solidFill>
+                        <a:srgbClr val="000000"/>
+                      </a:solidFill>
+                      <a:prstDash val="solid"/>
+                      <a:round/>
+                      <a:headEnd len="sm" w="sm" type="none"/>
+                      <a:tailEnd len="sm" w="sm" type="none"/>
+                    </a:lnR>
+                    <a:lnT cap="flat" cmpd="sng" w="9525">
+                      <a:solidFill>
+                        <a:srgbClr val="000000"/>
+                      </a:solidFill>
+                      <a:prstDash val="solid"/>
+                      <a:round/>
+                      <a:headEnd len="sm" w="sm" type="none"/>
+                      <a:tailEnd len="sm" w="sm" type="none"/>
+                    </a:lnT>
+                    <a:lnB cap="flat" cmpd="sng" w="9525">
+                      <a:solidFill>
+                        <a:srgbClr val="000000"/>
+                      </a:solidFill>
+                      <a:prstDash val="solid"/>
+                      <a:round/>
+                      <a:headEnd len="sm" w="sm" type="none"/>
+                      <a:tailEnd len="sm" w="sm" type="none"/>
+                    </a:lnB>
+                  </a:tcPr>
+                </a:tc>
+                <a:tc>
+                  <a:txBody>
+                    <a:bodyPr/>
+                    <a:lstStyle/>
+                    <a:p>
+                      <a:pPr indent="0" lvl="0" marL="0" rtl="0" algn="r">
+                        <a:lnSpc>
+                          <a:spcPct val="115000"/>
+                        </a:lnSpc>
+                        <a:spcBef>
+                          <a:spcPts val="0"/>
+                        </a:spcBef>
+                        <a:spcAft>
+                          <a:spcPts val="0"/>
+                        </a:spcAft>
+                        <a:buNone/>
+                      </a:pPr>
+                      <a:r>
+                        <a:rPr lang="en-US" sz="1050">
+                          <a:solidFill>
+                            <a:schemeClr val="dk1"/>
+                          </a:solidFill>
+                        </a:rPr>
+                        <a:t>46.358188</a:t>
+                      </a:r>
+                      <a:endParaRPr sz="1050">
+                        <a:solidFill>
+                          <a:schemeClr val="dk1"/>
+                        </a:solidFill>
+                      </a:endParaRPr>
+                    </a:p>
+                  </a:txBody>
+                  <a:tcPr marT="38100" marB="38100" marR="76200" marL="76200">
+                    <a:lnL cap="flat" cmpd="sng" w="9525">
+                      <a:solidFill>
+                        <a:srgbClr val="000000"/>
+                      </a:solidFill>
+                      <a:prstDash val="solid"/>
+                      <a:round/>
+                      <a:headEnd len="sm" w="sm" type="none"/>
+                      <a:tailEnd len="sm" w="sm" type="none"/>
+                    </a:lnL>
+                    <a:lnR cap="flat" cmpd="sng" w="9525">
+                      <a:solidFill>
+                        <a:srgbClr val="000000"/>
+                      </a:solidFill>
+                      <a:prstDash val="solid"/>
+                      <a:round/>
+                      <a:headEnd len="sm" w="sm" type="none"/>
+                      <a:tailEnd len="sm" w="sm" type="none"/>
+                    </a:lnR>
+                    <a:lnT cap="flat" cmpd="sng" w="9525">
+                      <a:solidFill>
+                        <a:srgbClr val="000000"/>
+                      </a:solidFill>
+                      <a:prstDash val="solid"/>
+                      <a:round/>
+                      <a:headEnd len="sm" w="sm" type="none"/>
+                      <a:tailEnd len="sm" w="sm" type="none"/>
+                    </a:lnT>
+                    <a:lnB cap="flat" cmpd="sng" w="9525">
+                      <a:solidFill>
+                        <a:srgbClr val="000000"/>
+                      </a:solidFill>
+                      <a:prstDash val="solid"/>
+                      <a:round/>
+                      <a:headEnd len="sm" w="sm" type="none"/>
+                      <a:tailEnd len="sm" w="sm" type="none"/>
+                    </a:lnB>
+                  </a:tcPr>
+                </a:tc>
+                <a:tc>
+                  <a:txBody>
+                    <a:bodyPr/>
+                    <a:lstStyle/>
+                    <a:p>
+                      <a:pPr indent="0" lvl="0" marL="0" rtl="0" algn="r">
+                        <a:lnSpc>
+                          <a:spcPct val="115000"/>
+                        </a:lnSpc>
+                        <a:spcBef>
+                          <a:spcPts val="0"/>
+                        </a:spcBef>
+                        <a:spcAft>
+                          <a:spcPts val="0"/>
+                        </a:spcAft>
+                        <a:buNone/>
+                      </a:pPr>
+                      <a:r>
+                        <a:rPr lang="en-US" sz="1050">
+                          <a:solidFill>
+                            <a:schemeClr val="dk1"/>
+                          </a:solidFill>
+                        </a:rPr>
+                        <a:t>Older (5-6y) short</a:t>
+                      </a:r>
+                      <a:endParaRPr sz="1050">
+                        <a:solidFill>
+                          <a:schemeClr val="dk1"/>
+                        </a:solidFill>
+                      </a:endParaRPr>
+                    </a:p>
+                  </a:txBody>
+                  <a:tcPr marT="38100" marB="38100" marR="76200" marL="76200">
+                    <a:lnL cap="flat" cmpd="sng" w="9525">
+                      <a:solidFill>
+                        <a:srgbClr val="000000"/>
+                      </a:solidFill>
+                      <a:prstDash val="solid"/>
+                      <a:round/>
+                      <a:headEnd len="sm" w="sm" type="none"/>
+                      <a:tailEnd len="sm" w="sm" type="none"/>
+                    </a:lnL>
+                    <a:lnR cap="flat" cmpd="sng" w="9525">
+                      <a:solidFill>
+                        <a:srgbClr val="000000"/>
+                      </a:solidFill>
+                      <a:prstDash val="solid"/>
+                      <a:round/>
+                      <a:headEnd len="sm" w="sm" type="none"/>
+                      <a:tailEnd len="sm" w="sm" type="none"/>
+                    </a:lnR>
+                    <a:lnT cap="flat" cmpd="sng" w="9525">
+                      <a:solidFill>
+                        <a:srgbClr val="000000"/>
+                      </a:solidFill>
+                      <a:prstDash val="solid"/>
+                      <a:round/>
+                      <a:headEnd len="sm" w="sm" type="none"/>
+                      <a:tailEnd len="sm" w="sm" type="none"/>
+                    </a:lnT>
+                    <a:lnB cap="flat" cmpd="sng" w="9525">
+                      <a:solidFill>
+                        <a:srgbClr val="000000"/>
+                      </a:solidFill>
+                      <a:prstDash val="solid"/>
+                      <a:round/>
+                      <a:headEnd len="sm" w="sm" type="none"/>
+                      <a:tailEnd len="sm" w="sm" type="none"/>
+                    </a:lnB>
+                  </a:tcPr>
+                </a:tc>
+              </a:tr>
+              <a:tr h="257175">
+                <a:tc>
+                  <a:txBody>
+                    <a:bodyPr/>
+                    <a:lstStyle/>
+                    <a:p>
+                      <a:pPr indent="0" lvl="0" marL="0" rtl="0" algn="r">
+                        <a:lnSpc>
+                          <a:spcPct val="115000"/>
+                        </a:lnSpc>
+                        <a:spcBef>
+                          <a:spcPts val="0"/>
+                        </a:spcBef>
+                        <a:spcAft>
+                          <a:spcPts val="0"/>
+                        </a:spcAft>
+                        <a:buNone/>
+                      </a:pPr>
+                      <a:r>
+                        <a:rPr lang="en-US" sz="1050">
+                          <a:solidFill>
+                            <a:schemeClr val="dk1"/>
+                          </a:solidFill>
+                        </a:rPr>
+                        <a:t>Bangkit</a:t>
+                      </a:r>
+                      <a:endParaRPr sz="1050">
+                        <a:solidFill>
+                          <a:schemeClr val="dk1"/>
+                        </a:solidFill>
+                      </a:endParaRPr>
+                    </a:p>
+                  </a:txBody>
+                  <a:tcPr marT="38100" marB="38100" marR="76200" marL="76200" anchor="ctr">
+                    <a:lnL cap="flat" cmpd="sng" w="9525">
+                      <a:solidFill>
+                        <a:srgbClr val="000000"/>
+                      </a:solidFill>
+                      <a:prstDash val="solid"/>
+                      <a:round/>
+                      <a:headEnd len="sm" w="sm" type="none"/>
+                      <a:tailEnd len="sm" w="sm" type="none"/>
+                    </a:lnL>
+                    <a:lnR cap="flat" cmpd="sng" w="9525">
+                      <a:solidFill>
+                        <a:srgbClr val="000000"/>
+                      </a:solidFill>
+                      <a:prstDash val="solid"/>
+                      <a:round/>
+                      <a:headEnd len="sm" w="sm" type="none"/>
+                      <a:tailEnd len="sm" w="sm" type="none"/>
+                    </a:lnR>
+                    <a:lnT cap="flat" cmpd="sng" w="9525">
+                      <a:solidFill>
+                        <a:srgbClr val="000000"/>
+                      </a:solidFill>
+                      <a:prstDash val="solid"/>
+                      <a:round/>
+                      <a:headEnd len="sm" w="sm" type="none"/>
+                      <a:tailEnd len="sm" w="sm" type="none"/>
+                    </a:lnT>
+                    <a:lnB cap="flat" cmpd="sng" w="9525">
+                      <a:solidFill>
+                        <a:srgbClr val="000000"/>
+                      </a:solidFill>
+                      <a:prstDash val="solid"/>
+                      <a:round/>
+                      <a:headEnd len="sm" w="sm" type="none"/>
+                      <a:tailEnd len="sm" w="sm" type="none"/>
+                    </a:lnB>
+                  </a:tcPr>
+                </a:tc>
+                <a:tc>
+                  <a:txBody>
+                    <a:bodyPr/>
+                    <a:lstStyle/>
+                    <a:p>
+                      <a:pPr indent="0" lvl="0" marL="0" rtl="0" algn="r">
+                        <a:lnSpc>
+                          <a:spcPct val="115000"/>
+                        </a:lnSpc>
+                        <a:spcBef>
+                          <a:spcPts val="0"/>
+                        </a:spcBef>
+                        <a:spcAft>
+                          <a:spcPts val="0"/>
+                        </a:spcAft>
+                        <a:buNone/>
+                      </a:pPr>
+                      <a:r>
+                        <a:rPr lang="en-US" sz="1050">
+                          <a:solidFill>
+                            <a:schemeClr val="dk1"/>
+                          </a:solidFill>
+                        </a:rPr>
+                        <a:t>Bukit Panjang</a:t>
+                      </a:r>
+                      <a:endParaRPr sz="1050">
+                        <a:solidFill>
+                          <a:schemeClr val="dk1"/>
+                        </a:solidFill>
+                      </a:endParaRPr>
+                    </a:p>
+                  </a:txBody>
+                  <a:tcPr marT="38100" marB="38100" marR="76200" marL="76200">
+                    <a:lnL cap="flat" cmpd="sng" w="9525">
+                      <a:solidFill>
+                        <a:srgbClr val="000000"/>
+                      </a:solidFill>
+                      <a:prstDash val="solid"/>
+                      <a:round/>
+                      <a:headEnd len="sm" w="sm" type="none"/>
+                      <a:tailEnd len="sm" w="sm" type="none"/>
+                    </a:lnL>
+                    <a:lnR cap="flat" cmpd="sng" w="9525">
+                      <a:solidFill>
+                        <a:srgbClr val="000000"/>
+                      </a:solidFill>
+                      <a:prstDash val="solid"/>
+                      <a:round/>
+                      <a:headEnd len="sm" w="sm" type="none"/>
+                      <a:tailEnd len="sm" w="sm" type="none"/>
+                    </a:lnR>
+                    <a:lnT cap="flat" cmpd="sng" w="9525">
+                      <a:solidFill>
+                        <a:srgbClr val="000000"/>
+                      </a:solidFill>
+                      <a:prstDash val="solid"/>
+                      <a:round/>
+                      <a:headEnd len="sm" w="sm" type="none"/>
+                      <a:tailEnd len="sm" w="sm" type="none"/>
+                    </a:lnT>
+                    <a:lnB cap="flat" cmpd="sng" w="9525">
+                      <a:solidFill>
+                        <a:srgbClr val="000000"/>
+                      </a:solidFill>
+                      <a:prstDash val="solid"/>
+                      <a:round/>
+                      <a:headEnd len="sm" w="sm" type="none"/>
+                      <a:tailEnd len="sm" w="sm" type="none"/>
+                    </a:lnB>
+                  </a:tcPr>
+                </a:tc>
+                <a:tc>
+                  <a:txBody>
+                    <a:bodyPr/>
+                    <a:lstStyle/>
+                    <a:p>
+                      <a:pPr indent="0" lvl="0" marL="0" rtl="0" algn="r">
+                        <a:lnSpc>
+                          <a:spcPct val="115000"/>
+                        </a:lnSpc>
+                        <a:spcBef>
+                          <a:spcPts val="0"/>
+                        </a:spcBef>
+                        <a:spcAft>
+                          <a:spcPts val="0"/>
+                        </a:spcAft>
+                        <a:buNone/>
+                      </a:pPr>
+                      <a:r>
+                        <a:rPr lang="en-US" sz="1050">
+                          <a:solidFill>
+                            <a:schemeClr val="dk1"/>
+                          </a:solidFill>
+                        </a:rPr>
+                        <a:t>6.0</a:t>
+                      </a:r>
+                      <a:endParaRPr sz="1050">
+                        <a:solidFill>
+                          <a:schemeClr val="dk1"/>
+                        </a:solidFill>
+                      </a:endParaRPr>
+                    </a:p>
+                  </a:txBody>
+                  <a:tcPr marT="38100" marB="38100" marR="76200" marL="76200">
+                    <a:lnL cap="flat" cmpd="sng" w="9525">
+                      <a:solidFill>
+                        <a:srgbClr val="000000"/>
+                      </a:solidFill>
+                      <a:prstDash val="solid"/>
+                      <a:round/>
+                      <a:headEnd len="sm" w="sm" type="none"/>
+                      <a:tailEnd len="sm" w="sm" type="none"/>
+                    </a:lnL>
+                    <a:lnR cap="flat" cmpd="sng" w="9525">
+                      <a:solidFill>
+                        <a:srgbClr val="000000"/>
+                      </a:solidFill>
+                      <a:prstDash val="solid"/>
+                      <a:round/>
+                      <a:headEnd len="sm" w="sm" type="none"/>
+                      <a:tailEnd len="sm" w="sm" type="none"/>
+                    </a:lnR>
+                    <a:lnT cap="flat" cmpd="sng" w="9525">
+                      <a:solidFill>
+                        <a:srgbClr val="000000"/>
+                      </a:solidFill>
+                      <a:prstDash val="solid"/>
+                      <a:round/>
+                      <a:headEnd len="sm" w="sm" type="none"/>
+                      <a:tailEnd len="sm" w="sm" type="none"/>
+                    </a:lnT>
+                    <a:lnB cap="flat" cmpd="sng" w="9525">
+                      <a:solidFill>
+                        <a:srgbClr val="000000"/>
+                      </a:solidFill>
+                      <a:prstDash val="solid"/>
+                      <a:round/>
+                      <a:headEnd len="sm" w="sm" type="none"/>
+                      <a:tailEnd len="sm" w="sm" type="none"/>
+                    </a:lnB>
+                  </a:tcPr>
+                </a:tc>
+                <a:tc>
+                  <a:txBody>
+                    <a:bodyPr/>
+                    <a:lstStyle/>
+                    <a:p>
+                      <a:pPr indent="0" lvl="0" marL="0" rtl="0" algn="r">
+                        <a:lnSpc>
+                          <a:spcPct val="115000"/>
+                        </a:lnSpc>
+                        <a:spcBef>
+                          <a:spcPts val="0"/>
+                        </a:spcBef>
+                        <a:spcAft>
+                          <a:spcPts val="0"/>
+                        </a:spcAft>
+                        <a:buNone/>
+                      </a:pPr>
+                      <a:r>
+                        <a:rPr lang="en-US" sz="1050">
+                          <a:solidFill>
+                            <a:schemeClr val="dk1"/>
+                          </a:solidFill>
+                        </a:rPr>
+                        <a:t>-151.681581</a:t>
+                      </a:r>
+                      <a:endParaRPr sz="1050">
+                        <a:solidFill>
+                          <a:schemeClr val="dk1"/>
+                        </a:solidFill>
+                      </a:endParaRPr>
+                    </a:p>
+                  </a:txBody>
+                  <a:tcPr marT="38100" marB="38100" marR="76200" marL="76200">
+                    <a:lnL cap="flat" cmpd="sng" w="9525">
+                      <a:solidFill>
+                        <a:srgbClr val="000000"/>
+                      </a:solidFill>
+                      <a:prstDash val="solid"/>
+                      <a:round/>
+                      <a:headEnd len="sm" w="sm" type="none"/>
+                      <a:tailEnd len="sm" w="sm" type="none"/>
+                    </a:lnL>
+                    <a:lnR cap="flat" cmpd="sng" w="9525">
+                      <a:solidFill>
+                        <a:srgbClr val="000000"/>
+                      </a:solidFill>
+                      <a:prstDash val="solid"/>
+                      <a:round/>
+                      <a:headEnd len="sm" w="sm" type="none"/>
+                      <a:tailEnd len="sm" w="sm" type="none"/>
+                    </a:lnR>
+                    <a:lnT cap="flat" cmpd="sng" w="9525">
+                      <a:solidFill>
+                        <a:srgbClr val="000000"/>
+                      </a:solidFill>
+                      <a:prstDash val="solid"/>
+                      <a:round/>
+                      <a:headEnd len="sm" w="sm" type="none"/>
+                      <a:tailEnd len="sm" w="sm" type="none"/>
+                    </a:lnT>
+                    <a:lnB cap="flat" cmpd="sng" w="9525">
+                      <a:solidFill>
+                        <a:srgbClr val="000000"/>
+                      </a:solidFill>
+                      <a:prstDash val="solid"/>
+                      <a:round/>
+                      <a:headEnd len="sm" w="sm" type="none"/>
+                      <a:tailEnd len="sm" w="sm" type="none"/>
+                    </a:lnB>
+                  </a:tcPr>
+                </a:tc>
+                <a:tc>
+                  <a:txBody>
+                    <a:bodyPr/>
+                    <a:lstStyle/>
+                    <a:p>
+                      <a:pPr indent="0" lvl="0" marL="0" rtl="0" algn="r">
+                        <a:lnSpc>
+                          <a:spcPct val="115000"/>
+                        </a:lnSpc>
+                        <a:spcBef>
+                          <a:spcPts val="0"/>
+                        </a:spcBef>
+                        <a:spcAft>
+                          <a:spcPts val="0"/>
+                        </a:spcAft>
+                        <a:buNone/>
+                      </a:pPr>
+                      <a:r>
+                        <a:rPr lang="en-US" sz="1050">
+                          <a:solidFill>
+                            <a:schemeClr val="dk1"/>
+                          </a:solidFill>
+                        </a:rPr>
+                        <a:t>-95.767063</a:t>
+                      </a:r>
+                      <a:endParaRPr sz="1050">
+                        <a:solidFill>
+                          <a:schemeClr val="dk1"/>
+                        </a:solidFill>
+                      </a:endParaRPr>
+                    </a:p>
+                  </a:txBody>
+                  <a:tcPr marT="38100" marB="38100" marR="76200" marL="76200">
+                    <a:lnL cap="flat" cmpd="sng" w="9525">
+                      <a:solidFill>
+                        <a:srgbClr val="000000"/>
+                      </a:solidFill>
+                      <a:prstDash val="solid"/>
+                      <a:round/>
+                      <a:headEnd len="sm" w="sm" type="none"/>
+                      <a:tailEnd len="sm" w="sm" type="none"/>
+                    </a:lnL>
+                    <a:lnR cap="flat" cmpd="sng" w="9525">
+                      <a:solidFill>
+                        <a:srgbClr val="000000"/>
+                      </a:solidFill>
+                      <a:prstDash val="solid"/>
+                      <a:round/>
+                      <a:headEnd len="sm" w="sm" type="none"/>
+                      <a:tailEnd len="sm" w="sm" type="none"/>
+                    </a:lnR>
+                    <a:lnT cap="flat" cmpd="sng" w="9525">
+                      <a:solidFill>
+                        <a:srgbClr val="000000"/>
+                      </a:solidFill>
+                      <a:prstDash val="solid"/>
+                      <a:round/>
+                      <a:headEnd len="sm" w="sm" type="none"/>
+                      <a:tailEnd len="sm" w="sm" type="none"/>
+                    </a:lnT>
+                    <a:lnB cap="flat" cmpd="sng" w="9525">
+                      <a:solidFill>
+                        <a:srgbClr val="000000"/>
+                      </a:solidFill>
+                      <a:prstDash val="solid"/>
+                      <a:round/>
+                      <a:headEnd len="sm" w="sm" type="none"/>
+                      <a:tailEnd len="sm" w="sm" type="none"/>
+                    </a:lnB>
+                  </a:tcPr>
+                </a:tc>
+                <a:tc>
+                  <a:txBody>
+                    <a:bodyPr/>
+                    <a:lstStyle/>
+                    <a:p>
+                      <a:pPr indent="0" lvl="0" marL="0" rtl="0" algn="r">
+                        <a:lnSpc>
+                          <a:spcPct val="115000"/>
+                        </a:lnSpc>
+                        <a:spcBef>
+                          <a:spcPts val="0"/>
+                        </a:spcBef>
+                        <a:spcAft>
+                          <a:spcPts val="0"/>
+                        </a:spcAft>
+                        <a:buNone/>
+                      </a:pPr>
+                      <a:r>
+                        <a:rPr lang="en-US" sz="1050">
+                          <a:solidFill>
+                            <a:schemeClr val="dk1"/>
+                          </a:solidFill>
+                        </a:rPr>
+                        <a:t>27.418816</a:t>
+                      </a:r>
+                      <a:endParaRPr sz="1050">
+                        <a:solidFill>
+                          <a:schemeClr val="dk1"/>
+                        </a:solidFill>
+                      </a:endParaRPr>
+                    </a:p>
+                  </a:txBody>
+                  <a:tcPr marT="38100" marB="38100" marR="76200" marL="76200">
+                    <a:lnL cap="flat" cmpd="sng" w="9525">
+                      <a:solidFill>
+                        <a:srgbClr val="000000"/>
+                      </a:solidFill>
+                      <a:prstDash val="solid"/>
+                      <a:round/>
+                      <a:headEnd len="sm" w="sm" type="none"/>
+                      <a:tailEnd len="sm" w="sm" type="none"/>
+                    </a:lnL>
+                    <a:lnR cap="flat" cmpd="sng" w="9525">
+                      <a:solidFill>
+                        <a:srgbClr val="000000"/>
+                      </a:solidFill>
+                      <a:prstDash val="solid"/>
+                      <a:round/>
+                      <a:headEnd len="sm" w="sm" type="none"/>
+                      <a:tailEnd len="sm" w="sm" type="none"/>
+                    </a:lnR>
+                    <a:lnT cap="flat" cmpd="sng" w="9525">
+                      <a:solidFill>
+                        <a:srgbClr val="000000"/>
+                      </a:solidFill>
+                      <a:prstDash val="solid"/>
+                      <a:round/>
+                      <a:headEnd len="sm" w="sm" type="none"/>
+                      <a:tailEnd len="sm" w="sm" type="none"/>
+                    </a:lnT>
+                    <a:lnB cap="flat" cmpd="sng" w="9525">
+                      <a:solidFill>
+                        <a:srgbClr val="000000"/>
+                      </a:solidFill>
+                      <a:prstDash val="solid"/>
+                      <a:round/>
+                      <a:headEnd len="sm" w="sm" type="none"/>
+                      <a:tailEnd len="sm" w="sm" type="none"/>
+                    </a:lnB>
+                  </a:tcPr>
+                </a:tc>
+                <a:tc>
+                  <a:txBody>
+                    <a:bodyPr/>
+                    <a:lstStyle/>
+                    <a:p>
+                      <a:pPr indent="0" lvl="0" marL="0" rtl="0" algn="r">
+                        <a:lnSpc>
+                          <a:spcPct val="115000"/>
+                        </a:lnSpc>
+                        <a:spcBef>
+                          <a:spcPts val="0"/>
+                        </a:spcBef>
+                        <a:spcAft>
+                          <a:spcPts val="0"/>
+                        </a:spcAft>
+                        <a:buNone/>
+                      </a:pPr>
+                      <a:r>
+                        <a:rPr lang="en-US" sz="1050">
+                          <a:solidFill>
+                            <a:schemeClr val="dk1"/>
+                          </a:solidFill>
+                        </a:rPr>
+                        <a:t>Older (5-6y) short</a:t>
+                      </a:r>
+                      <a:endParaRPr sz="1050">
+                        <a:solidFill>
+                          <a:schemeClr val="dk1"/>
+                        </a:solidFill>
+                      </a:endParaRPr>
+                    </a:p>
+                  </a:txBody>
+                  <a:tcPr marT="38100" marB="38100" marR="76200" marL="76200">
+                    <a:lnL cap="flat" cmpd="sng" w="9525">
+                      <a:solidFill>
+                        <a:srgbClr val="000000"/>
+                      </a:solidFill>
+                      <a:prstDash val="solid"/>
+                      <a:round/>
+                      <a:headEnd len="sm" w="sm" type="none"/>
+                      <a:tailEnd len="sm" w="sm" type="none"/>
+                    </a:lnL>
+                    <a:lnR cap="flat" cmpd="sng" w="9525">
+                      <a:solidFill>
+                        <a:srgbClr val="000000"/>
+                      </a:solidFill>
+                      <a:prstDash val="solid"/>
+                      <a:round/>
+                      <a:headEnd len="sm" w="sm" type="none"/>
+                      <a:tailEnd len="sm" w="sm" type="none"/>
+                    </a:lnR>
+                    <a:lnT cap="flat" cmpd="sng" w="9525">
+                      <a:solidFill>
+                        <a:srgbClr val="000000"/>
+                      </a:solidFill>
+                      <a:prstDash val="solid"/>
+                      <a:round/>
+                      <a:headEnd len="sm" w="sm" type="none"/>
+                      <a:tailEnd len="sm" w="sm" type="none"/>
+                    </a:lnT>
+                    <a:lnB cap="flat" cmpd="sng" w="9525">
+                      <a:solidFill>
+                        <a:srgbClr val="000000"/>
+                      </a:solidFill>
+                      <a:prstDash val="solid"/>
+                      <a:round/>
+                      <a:headEnd len="sm" w="sm" type="none"/>
+                      <a:tailEnd len="sm" w="sm" type="none"/>
+                    </a:lnB>
+                  </a:tcPr>
+                </a:tc>
+              </a:tr>
+              <a:tr h="257175">
+                <a:tc>
+                  <a:txBody>
+                    <a:bodyPr/>
+                    <a:lstStyle/>
+                    <a:p>
+                      <a:pPr indent="0" lvl="0" marL="0" rtl="0" algn="r">
+                        <a:lnSpc>
+                          <a:spcPct val="115000"/>
+                        </a:lnSpc>
+                        <a:spcBef>
+                          <a:spcPts val="0"/>
+                        </a:spcBef>
+                        <a:spcAft>
+                          <a:spcPts val="0"/>
+                        </a:spcAft>
+                        <a:buNone/>
+                      </a:pPr>
+                      <a:r>
+                        <a:rPr lang="en-US" sz="1050">
+                          <a:solidFill>
+                            <a:schemeClr val="dk1"/>
+                          </a:solidFill>
+                        </a:rPr>
+                        <a:t>Townsville</a:t>
+                      </a:r>
+                      <a:endParaRPr sz="1050">
+                        <a:solidFill>
+                          <a:schemeClr val="dk1"/>
+                        </a:solidFill>
+                      </a:endParaRPr>
+                    </a:p>
+                  </a:txBody>
+                  <a:tcPr marT="38100" marB="38100" marR="76200" marL="76200" anchor="ctr">
+                    <a:lnL cap="flat" cmpd="sng" w="9525">
+                      <a:solidFill>
+                        <a:srgbClr val="000000"/>
+                      </a:solidFill>
+                      <a:prstDash val="solid"/>
+                      <a:round/>
+                      <a:headEnd len="sm" w="sm" type="none"/>
+                      <a:tailEnd len="sm" w="sm" type="none"/>
+                    </a:lnL>
+                    <a:lnR cap="flat" cmpd="sng" w="9525">
+                      <a:solidFill>
+                        <a:srgbClr val="000000"/>
+                      </a:solidFill>
+                      <a:prstDash val="solid"/>
+                      <a:round/>
+                      <a:headEnd len="sm" w="sm" type="none"/>
+                      <a:tailEnd len="sm" w="sm" type="none"/>
+                    </a:lnR>
+                    <a:lnT cap="flat" cmpd="sng" w="9525">
+                      <a:solidFill>
+                        <a:srgbClr val="000000"/>
+                      </a:solidFill>
+                      <a:prstDash val="solid"/>
+                      <a:round/>
+                      <a:headEnd len="sm" w="sm" type="none"/>
+                      <a:tailEnd len="sm" w="sm" type="none"/>
+                    </a:lnT>
+                    <a:lnB cap="flat" cmpd="sng" w="9525">
+                      <a:solidFill>
+                        <a:srgbClr val="000000"/>
+                      </a:solidFill>
+                      <a:prstDash val="solid"/>
+                      <a:round/>
+                      <a:headEnd len="sm" w="sm" type="none"/>
+                      <a:tailEnd len="sm" w="sm" type="none"/>
+                    </a:lnB>
+                  </a:tcPr>
+                </a:tc>
+                <a:tc>
+                  <a:txBody>
+                    <a:bodyPr/>
+                    <a:lstStyle/>
+                    <a:p>
+                      <a:pPr indent="0" lvl="0" marL="0" rtl="0" algn="r">
+                        <a:lnSpc>
+                          <a:spcPct val="115000"/>
+                        </a:lnSpc>
+                        <a:spcBef>
+                          <a:spcPts val="0"/>
+                        </a:spcBef>
+                        <a:spcAft>
+                          <a:spcPts val="0"/>
+                        </a:spcAft>
+                        <a:buNone/>
+                      </a:pPr>
+                      <a:r>
+                        <a:rPr lang="en-US" sz="1050">
+                          <a:solidFill>
+                            <a:schemeClr val="dk1"/>
+                          </a:solidFill>
+                        </a:rPr>
+                        <a:t>Ang Mo Kio</a:t>
+                      </a:r>
+                      <a:endParaRPr sz="1050">
+                        <a:solidFill>
+                          <a:schemeClr val="dk1"/>
+                        </a:solidFill>
+                      </a:endParaRPr>
+                    </a:p>
+                  </a:txBody>
+                  <a:tcPr marT="38100" marB="38100" marR="76200" marL="76200">
+                    <a:lnL cap="flat" cmpd="sng" w="9525">
+                      <a:solidFill>
+                        <a:srgbClr val="000000"/>
+                      </a:solidFill>
+                      <a:prstDash val="solid"/>
+                      <a:round/>
+                      <a:headEnd len="sm" w="sm" type="none"/>
+                      <a:tailEnd len="sm" w="sm" type="none"/>
+                    </a:lnL>
+                    <a:lnR cap="flat" cmpd="sng" w="9525">
+                      <a:solidFill>
+                        <a:srgbClr val="000000"/>
+                      </a:solidFill>
+                      <a:prstDash val="solid"/>
+                      <a:round/>
+                      <a:headEnd len="sm" w="sm" type="none"/>
+                      <a:tailEnd len="sm" w="sm" type="none"/>
+                    </a:lnR>
+                    <a:lnT cap="flat" cmpd="sng" w="9525">
+                      <a:solidFill>
+                        <a:srgbClr val="000000"/>
+                      </a:solidFill>
+                      <a:prstDash val="solid"/>
+                      <a:round/>
+                      <a:headEnd len="sm" w="sm" type="none"/>
+                      <a:tailEnd len="sm" w="sm" type="none"/>
+                    </a:lnT>
+                    <a:lnB cap="flat" cmpd="sng" w="9525">
+                      <a:solidFill>
+                        <a:srgbClr val="000000"/>
+                      </a:solidFill>
+                      <a:prstDash val="solid"/>
+                      <a:round/>
+                      <a:headEnd len="sm" w="sm" type="none"/>
+                      <a:tailEnd len="sm" w="sm" type="none"/>
+                    </a:lnB>
+                  </a:tcPr>
+                </a:tc>
+                <a:tc>
+                  <a:txBody>
+                    <a:bodyPr/>
+                    <a:lstStyle/>
+                    <a:p>
+                      <a:pPr indent="0" lvl="0" marL="0" rtl="0" algn="r">
+                        <a:lnSpc>
+                          <a:spcPct val="115000"/>
+                        </a:lnSpc>
+                        <a:spcBef>
+                          <a:spcPts val="0"/>
+                        </a:spcBef>
+                        <a:spcAft>
+                          <a:spcPts val="0"/>
+                        </a:spcAft>
+                        <a:buNone/>
+                      </a:pPr>
+                      <a:r>
+                        <a:rPr lang="en-US" sz="1050">
+                          <a:solidFill>
+                            <a:schemeClr val="dk1"/>
+                          </a:solidFill>
+                        </a:rPr>
+                        <a:t>6.0</a:t>
+                      </a:r>
+                      <a:endParaRPr sz="1050">
+                        <a:solidFill>
+                          <a:schemeClr val="dk1"/>
+                        </a:solidFill>
+                      </a:endParaRPr>
+                    </a:p>
+                  </a:txBody>
+                  <a:tcPr marT="38100" marB="38100" marR="76200" marL="76200">
+                    <a:lnL cap="flat" cmpd="sng" w="9525">
+                      <a:solidFill>
+                        <a:srgbClr val="000000"/>
+                      </a:solidFill>
+                      <a:prstDash val="solid"/>
+                      <a:round/>
+                      <a:headEnd len="sm" w="sm" type="none"/>
+                      <a:tailEnd len="sm" w="sm" type="none"/>
+                    </a:lnL>
+                    <a:lnR cap="flat" cmpd="sng" w="9525">
+                      <a:solidFill>
+                        <a:srgbClr val="000000"/>
+                      </a:solidFill>
+                      <a:prstDash val="solid"/>
+                      <a:round/>
+                      <a:headEnd len="sm" w="sm" type="none"/>
+                      <a:tailEnd len="sm" w="sm" type="none"/>
+                    </a:lnR>
+                    <a:lnT cap="flat" cmpd="sng" w="9525">
+                      <a:solidFill>
+                        <a:srgbClr val="000000"/>
+                      </a:solidFill>
+                      <a:prstDash val="solid"/>
+                      <a:round/>
+                      <a:headEnd len="sm" w="sm" type="none"/>
+                      <a:tailEnd len="sm" w="sm" type="none"/>
+                    </a:lnT>
+                    <a:lnB cap="flat" cmpd="sng" w="9525">
+                      <a:solidFill>
+                        <a:srgbClr val="000000"/>
+                      </a:solidFill>
+                      <a:prstDash val="solid"/>
+                      <a:round/>
+                      <a:headEnd len="sm" w="sm" type="none"/>
+                      <a:tailEnd len="sm" w="sm" type="none"/>
+                    </a:lnB>
+                  </a:tcPr>
+                </a:tc>
+                <a:tc>
+                  <a:txBody>
+                    <a:bodyPr/>
+                    <a:lstStyle/>
+                    <a:p>
+                      <a:pPr indent="0" lvl="0" marL="0" rtl="0" algn="r">
+                        <a:lnSpc>
+                          <a:spcPct val="115000"/>
+                        </a:lnSpc>
+                        <a:spcBef>
+                          <a:spcPts val="0"/>
+                        </a:spcBef>
+                        <a:spcAft>
+                          <a:spcPts val="0"/>
+                        </a:spcAft>
+                        <a:buNone/>
+                      </a:pPr>
+                      <a:r>
+                        <a:rPr lang="en-US" sz="1050">
+                          <a:solidFill>
+                            <a:schemeClr val="dk1"/>
+                          </a:solidFill>
+                        </a:rPr>
+                        <a:t>-126.670791</a:t>
+                      </a:r>
+                      <a:endParaRPr sz="1050">
+                        <a:solidFill>
+                          <a:schemeClr val="dk1"/>
+                        </a:solidFill>
+                      </a:endParaRPr>
+                    </a:p>
+                  </a:txBody>
+                  <a:tcPr marT="38100" marB="38100" marR="76200" marL="76200">
+                    <a:lnL cap="flat" cmpd="sng" w="9525">
+                      <a:solidFill>
+                        <a:srgbClr val="000000"/>
+                      </a:solidFill>
+                      <a:prstDash val="solid"/>
+                      <a:round/>
+                      <a:headEnd len="sm" w="sm" type="none"/>
+                      <a:tailEnd len="sm" w="sm" type="none"/>
+                    </a:lnL>
+                    <a:lnR cap="flat" cmpd="sng" w="9525">
+                      <a:solidFill>
+                        <a:srgbClr val="000000"/>
+                      </a:solidFill>
+                      <a:prstDash val="solid"/>
+                      <a:round/>
+                      <a:headEnd len="sm" w="sm" type="none"/>
+                      <a:tailEnd len="sm" w="sm" type="none"/>
+                    </a:lnR>
+                    <a:lnT cap="flat" cmpd="sng" w="9525">
+                      <a:solidFill>
+                        <a:srgbClr val="000000"/>
+                      </a:solidFill>
+                      <a:prstDash val="solid"/>
+                      <a:round/>
+                      <a:headEnd len="sm" w="sm" type="none"/>
+                      <a:tailEnd len="sm" w="sm" type="none"/>
+                    </a:lnT>
+                    <a:lnB cap="flat" cmpd="sng" w="9525">
+                      <a:solidFill>
+                        <a:srgbClr val="000000"/>
+                      </a:solidFill>
+                      <a:prstDash val="solid"/>
+                      <a:round/>
+                      <a:headEnd len="sm" w="sm" type="none"/>
+                      <a:tailEnd len="sm" w="sm" type="none"/>
+                    </a:lnB>
+                  </a:tcPr>
+                </a:tc>
+                <a:tc>
+                  <a:txBody>
+                    <a:bodyPr/>
+                    <a:lstStyle/>
+                    <a:p>
+                      <a:pPr indent="0" lvl="0" marL="0" rtl="0" algn="r">
+                        <a:lnSpc>
+                          <a:spcPct val="115000"/>
+                        </a:lnSpc>
+                        <a:spcBef>
+                          <a:spcPts val="0"/>
+                        </a:spcBef>
+                        <a:spcAft>
+                          <a:spcPts val="0"/>
+                        </a:spcAft>
+                        <a:buNone/>
+                      </a:pPr>
+                      <a:r>
+                        <a:rPr lang="en-US" sz="1050">
+                          <a:solidFill>
+                            <a:schemeClr val="dk1"/>
+                          </a:solidFill>
+                        </a:rPr>
+                        <a:t>-63.538620</a:t>
+                      </a:r>
+                      <a:endParaRPr sz="1050">
+                        <a:solidFill>
+                          <a:schemeClr val="dk1"/>
+                        </a:solidFill>
+                      </a:endParaRPr>
+                    </a:p>
+                  </a:txBody>
+                  <a:tcPr marT="38100" marB="38100" marR="76200" marL="76200">
+                    <a:lnL cap="flat" cmpd="sng" w="9525">
+                      <a:solidFill>
+                        <a:srgbClr val="000000"/>
+                      </a:solidFill>
+                      <a:prstDash val="solid"/>
+                      <a:round/>
+                      <a:headEnd len="sm" w="sm" type="none"/>
+                      <a:tailEnd len="sm" w="sm" type="none"/>
+                    </a:lnL>
+                    <a:lnR cap="flat" cmpd="sng" w="9525">
+                      <a:solidFill>
+                        <a:srgbClr val="000000"/>
+                      </a:solidFill>
+                      <a:prstDash val="solid"/>
+                      <a:round/>
+                      <a:headEnd len="sm" w="sm" type="none"/>
+                      <a:tailEnd len="sm" w="sm" type="none"/>
+                    </a:lnR>
+                    <a:lnT cap="flat" cmpd="sng" w="9525">
+                      <a:solidFill>
+                        <a:srgbClr val="000000"/>
+                      </a:solidFill>
+                      <a:prstDash val="solid"/>
+                      <a:round/>
+                      <a:headEnd len="sm" w="sm" type="none"/>
+                      <a:tailEnd len="sm" w="sm" type="none"/>
+                    </a:lnT>
+                    <a:lnB cap="flat" cmpd="sng" w="9525">
+                      <a:solidFill>
+                        <a:srgbClr val="000000"/>
+                      </a:solidFill>
+                      <a:prstDash val="solid"/>
+                      <a:round/>
+                      <a:headEnd len="sm" w="sm" type="none"/>
+                      <a:tailEnd len="sm" w="sm" type="none"/>
+                    </a:lnB>
+                  </a:tcPr>
+                </a:tc>
+                <a:tc>
+                  <a:txBody>
+                    <a:bodyPr/>
+                    <a:lstStyle/>
+                    <a:p>
+                      <a:pPr indent="0" lvl="0" marL="0" rtl="0" algn="r">
+                        <a:lnSpc>
+                          <a:spcPct val="115000"/>
+                        </a:lnSpc>
+                        <a:spcBef>
+                          <a:spcPts val="0"/>
+                        </a:spcBef>
+                        <a:spcAft>
+                          <a:spcPts val="0"/>
+                        </a:spcAft>
+                        <a:buNone/>
+                      </a:pPr>
+                      <a:r>
+                        <a:rPr lang="en-US" sz="1050">
+                          <a:solidFill>
+                            <a:schemeClr val="dk1"/>
+                          </a:solidFill>
+                        </a:rPr>
+                        <a:t>3.534495</a:t>
+                      </a:r>
+                      <a:endParaRPr sz="1050">
+                        <a:solidFill>
+                          <a:schemeClr val="dk1"/>
+                        </a:solidFill>
+                      </a:endParaRPr>
+                    </a:p>
+                  </a:txBody>
+                  <a:tcPr marT="38100" marB="38100" marR="76200" marL="76200">
+                    <a:lnL cap="flat" cmpd="sng" w="9525">
+                      <a:solidFill>
+                        <a:srgbClr val="000000"/>
+                      </a:solidFill>
+                      <a:prstDash val="solid"/>
+                      <a:round/>
+                      <a:headEnd len="sm" w="sm" type="none"/>
+                      <a:tailEnd len="sm" w="sm" type="none"/>
+                    </a:lnL>
+                    <a:lnR cap="flat" cmpd="sng" w="9525">
+                      <a:solidFill>
+                        <a:srgbClr val="000000"/>
+                      </a:solidFill>
+                      <a:prstDash val="solid"/>
+                      <a:round/>
+                      <a:headEnd len="sm" w="sm" type="none"/>
+                      <a:tailEnd len="sm" w="sm" type="none"/>
+                    </a:lnR>
+                    <a:lnT cap="flat" cmpd="sng" w="9525">
+                      <a:solidFill>
+                        <a:srgbClr val="000000"/>
+                      </a:solidFill>
+                      <a:prstDash val="solid"/>
+                      <a:round/>
+                      <a:headEnd len="sm" w="sm" type="none"/>
+                      <a:tailEnd len="sm" w="sm" type="none"/>
+                    </a:lnT>
+                    <a:lnB cap="flat" cmpd="sng" w="9525">
+                      <a:solidFill>
+                        <a:srgbClr val="000000"/>
+                      </a:solidFill>
+                      <a:prstDash val="solid"/>
+                      <a:round/>
+                      <a:headEnd len="sm" w="sm" type="none"/>
+                      <a:tailEnd len="sm" w="sm" type="none"/>
+                    </a:lnB>
+                  </a:tcPr>
+                </a:tc>
+                <a:tc>
+                  <a:txBody>
+                    <a:bodyPr/>
+                    <a:lstStyle/>
+                    <a:p>
+                      <a:pPr indent="0" lvl="0" marL="0" rtl="0" algn="r">
+                        <a:lnSpc>
+                          <a:spcPct val="115000"/>
+                        </a:lnSpc>
+                        <a:spcBef>
+                          <a:spcPts val="0"/>
+                        </a:spcBef>
+                        <a:spcAft>
+                          <a:spcPts val="0"/>
+                        </a:spcAft>
+                        <a:buNone/>
+                      </a:pPr>
+                      <a:r>
+                        <a:rPr lang="en-US" sz="1050">
+                          <a:solidFill>
+                            <a:schemeClr val="dk1"/>
+                          </a:solidFill>
+                        </a:rPr>
+                        <a:t>Older (5-6y) short</a:t>
+                      </a:r>
+                      <a:endParaRPr sz="1050">
+                        <a:solidFill>
+                          <a:schemeClr val="dk1"/>
+                        </a:solidFill>
+                      </a:endParaRPr>
+                    </a:p>
+                  </a:txBody>
+                  <a:tcPr marT="38100" marB="38100" marR="76200" marL="76200">
+                    <a:lnL cap="flat" cmpd="sng" w="9525">
+                      <a:solidFill>
+                        <a:srgbClr val="000000"/>
+                      </a:solidFill>
+                      <a:prstDash val="solid"/>
+                      <a:round/>
+                      <a:headEnd len="sm" w="sm" type="none"/>
+                      <a:tailEnd len="sm" w="sm" type="none"/>
+                    </a:lnL>
+                    <a:lnR cap="flat" cmpd="sng" w="9525">
+                      <a:solidFill>
+                        <a:srgbClr val="000000"/>
+                      </a:solidFill>
+                      <a:prstDash val="solid"/>
+                      <a:round/>
+                      <a:headEnd len="sm" w="sm" type="none"/>
+                      <a:tailEnd len="sm" w="sm" type="none"/>
+                    </a:lnR>
+                    <a:lnT cap="flat" cmpd="sng" w="9525">
+                      <a:solidFill>
+                        <a:srgbClr val="000000"/>
+                      </a:solidFill>
+                      <a:prstDash val="solid"/>
+                      <a:round/>
+                      <a:headEnd len="sm" w="sm" type="none"/>
+                      <a:tailEnd len="sm" w="sm" type="none"/>
+                    </a:lnT>
+                    <a:lnB cap="flat" cmpd="sng" w="9525">
+                      <a:solidFill>
+                        <a:srgbClr val="000000"/>
+                      </a:solidFill>
+                      <a:prstDash val="solid"/>
+                      <a:round/>
+                      <a:headEnd len="sm" w="sm" type="none"/>
+                      <a:tailEnd len="sm" w="sm" type="none"/>
+                    </a:lnB>
+                  </a:tcPr>
+                </a:tc>
+              </a:tr>
+              <a:tr h="257175">
+                <a:tc>
+                  <a:txBody>
+                    <a:bodyPr/>
+                    <a:lstStyle/>
+                    <a:p>
+                      <a:pPr indent="0" lvl="0" marL="0" rtl="0" algn="r">
+                        <a:lnSpc>
+                          <a:spcPct val="115000"/>
+                        </a:lnSpc>
+                        <a:spcBef>
+                          <a:spcPts val="0"/>
+                        </a:spcBef>
+                        <a:spcAft>
+                          <a:spcPts val="0"/>
+                        </a:spcAft>
+                        <a:buNone/>
+                      </a:pPr>
+                      <a:r>
+                        <a:rPr lang="en-US" sz="1050">
+                          <a:solidFill>
+                            <a:schemeClr val="dk1"/>
+                          </a:solidFill>
+                        </a:rPr>
+                        <a:t>Pei Chun</a:t>
+                      </a:r>
+                      <a:endParaRPr sz="1050">
+                        <a:solidFill>
+                          <a:schemeClr val="dk1"/>
+                        </a:solidFill>
+                      </a:endParaRPr>
+                    </a:p>
+                  </a:txBody>
+                  <a:tcPr marT="38100" marB="38100" marR="76200" marL="76200" anchor="ctr">
+                    <a:lnL cap="flat" cmpd="sng" w="9525">
+                      <a:solidFill>
+                        <a:srgbClr val="000000"/>
+                      </a:solidFill>
+                      <a:prstDash val="solid"/>
+                      <a:round/>
+                      <a:headEnd len="sm" w="sm" type="none"/>
+                      <a:tailEnd len="sm" w="sm" type="none"/>
+                    </a:lnL>
+                    <a:lnR cap="flat" cmpd="sng" w="9525">
+                      <a:solidFill>
+                        <a:srgbClr val="000000"/>
+                      </a:solidFill>
+                      <a:prstDash val="solid"/>
+                      <a:round/>
+                      <a:headEnd len="sm" w="sm" type="none"/>
+                      <a:tailEnd len="sm" w="sm" type="none"/>
+                    </a:lnR>
+                    <a:lnT cap="flat" cmpd="sng" w="9525">
+                      <a:solidFill>
+                        <a:srgbClr val="000000"/>
+                      </a:solidFill>
+                      <a:prstDash val="solid"/>
+                      <a:round/>
+                      <a:headEnd len="sm" w="sm" type="none"/>
+                      <a:tailEnd len="sm" w="sm" type="none"/>
+                    </a:lnT>
+                    <a:lnB cap="flat" cmpd="sng" w="9525">
+                      <a:solidFill>
+                        <a:srgbClr val="000000"/>
+                      </a:solidFill>
+                      <a:prstDash val="solid"/>
+                      <a:round/>
+                      <a:headEnd len="sm" w="sm" type="none"/>
+                      <a:tailEnd len="sm" w="sm" type="none"/>
+                    </a:lnB>
+                  </a:tcPr>
+                </a:tc>
+                <a:tc>
+                  <a:txBody>
+                    <a:bodyPr/>
+                    <a:lstStyle/>
+                    <a:p>
+                      <a:pPr indent="0" lvl="0" marL="0" rtl="0" algn="r">
+                        <a:lnSpc>
+                          <a:spcPct val="115000"/>
+                        </a:lnSpc>
+                        <a:spcBef>
+                          <a:spcPts val="0"/>
+                        </a:spcBef>
+                        <a:spcAft>
+                          <a:spcPts val="0"/>
+                        </a:spcAft>
+                        <a:buNone/>
+                      </a:pPr>
+                      <a:r>
+                        <a:rPr lang="en-US" sz="1050">
+                          <a:solidFill>
+                            <a:schemeClr val="dk1"/>
+                          </a:solidFill>
+                        </a:rPr>
+                        <a:t>Toa Payoh</a:t>
+                      </a:r>
+                      <a:endParaRPr sz="1050">
+                        <a:solidFill>
+                          <a:schemeClr val="dk1"/>
+                        </a:solidFill>
+                      </a:endParaRPr>
+                    </a:p>
+                  </a:txBody>
+                  <a:tcPr marT="38100" marB="38100" marR="76200" marL="76200">
+                    <a:lnL cap="flat" cmpd="sng" w="9525">
+                      <a:solidFill>
+                        <a:srgbClr val="000000"/>
+                      </a:solidFill>
+                      <a:prstDash val="solid"/>
+                      <a:round/>
+                      <a:headEnd len="sm" w="sm" type="none"/>
+                      <a:tailEnd len="sm" w="sm" type="none"/>
+                    </a:lnL>
+                    <a:lnR cap="flat" cmpd="sng" w="9525">
+                      <a:solidFill>
+                        <a:srgbClr val="000000"/>
+                      </a:solidFill>
+                      <a:prstDash val="solid"/>
+                      <a:round/>
+                      <a:headEnd len="sm" w="sm" type="none"/>
+                      <a:tailEnd len="sm" w="sm" type="none"/>
+                    </a:lnR>
+                    <a:lnT cap="flat" cmpd="sng" w="9525">
+                      <a:solidFill>
+                        <a:srgbClr val="000000"/>
+                      </a:solidFill>
+                      <a:prstDash val="solid"/>
+                      <a:round/>
+                      <a:headEnd len="sm" w="sm" type="none"/>
+                      <a:tailEnd len="sm" w="sm" type="none"/>
+                    </a:lnT>
+                    <a:lnB cap="flat" cmpd="sng" w="9525">
+                      <a:solidFill>
+                        <a:srgbClr val="000000"/>
+                      </a:solidFill>
+                      <a:prstDash val="solid"/>
+                      <a:round/>
+                      <a:headEnd len="sm" w="sm" type="none"/>
+                      <a:tailEnd len="sm" w="sm" type="none"/>
+                    </a:lnB>
+                  </a:tcPr>
+                </a:tc>
+                <a:tc>
+                  <a:txBody>
+                    <a:bodyPr/>
+                    <a:lstStyle/>
+                    <a:p>
+                      <a:pPr indent="0" lvl="0" marL="0" rtl="0" algn="r">
+                        <a:lnSpc>
+                          <a:spcPct val="115000"/>
+                        </a:lnSpc>
+                        <a:spcBef>
+                          <a:spcPts val="0"/>
+                        </a:spcBef>
+                        <a:spcAft>
+                          <a:spcPts val="0"/>
+                        </a:spcAft>
+                        <a:buNone/>
+                      </a:pPr>
+                      <a:r>
+                        <a:rPr lang="en-US" sz="1050">
+                          <a:solidFill>
+                            <a:schemeClr val="dk1"/>
+                          </a:solidFill>
+                        </a:rPr>
+                        <a:t>3.0</a:t>
+                      </a:r>
+                      <a:endParaRPr sz="1050">
+                        <a:solidFill>
+                          <a:schemeClr val="dk1"/>
+                        </a:solidFill>
+                      </a:endParaRPr>
+                    </a:p>
+                  </a:txBody>
+                  <a:tcPr marT="38100" marB="38100" marR="76200" marL="76200">
+                    <a:lnL cap="flat" cmpd="sng" w="9525">
+                      <a:solidFill>
+                        <a:srgbClr val="000000"/>
+                      </a:solidFill>
+                      <a:prstDash val="solid"/>
+                      <a:round/>
+                      <a:headEnd len="sm" w="sm" type="none"/>
+                      <a:tailEnd len="sm" w="sm" type="none"/>
+                    </a:lnL>
+                    <a:lnR cap="flat" cmpd="sng" w="9525">
+                      <a:solidFill>
+                        <a:srgbClr val="000000"/>
+                      </a:solidFill>
+                      <a:prstDash val="solid"/>
+                      <a:round/>
+                      <a:headEnd len="sm" w="sm" type="none"/>
+                      <a:tailEnd len="sm" w="sm" type="none"/>
+                    </a:lnR>
+                    <a:lnT cap="flat" cmpd="sng" w="9525">
+                      <a:solidFill>
+                        <a:srgbClr val="000000"/>
+                      </a:solidFill>
+                      <a:prstDash val="solid"/>
+                      <a:round/>
+                      <a:headEnd len="sm" w="sm" type="none"/>
+                      <a:tailEnd len="sm" w="sm" type="none"/>
+                    </a:lnT>
+                    <a:lnB cap="flat" cmpd="sng" w="9525">
+                      <a:solidFill>
+                        <a:srgbClr val="000000"/>
+                      </a:solidFill>
+                      <a:prstDash val="solid"/>
+                      <a:round/>
+                      <a:headEnd len="sm" w="sm" type="none"/>
+                      <a:tailEnd len="sm" w="sm" type="none"/>
+                    </a:lnB>
+                  </a:tcPr>
+                </a:tc>
+                <a:tc>
+                  <a:txBody>
+                    <a:bodyPr/>
+                    <a:lstStyle/>
+                    <a:p>
+                      <a:pPr indent="0" lvl="0" marL="0" rtl="0" algn="r">
+                        <a:lnSpc>
+                          <a:spcPct val="115000"/>
+                        </a:lnSpc>
+                        <a:spcBef>
+                          <a:spcPts val="0"/>
+                        </a:spcBef>
+                        <a:spcAft>
+                          <a:spcPts val="0"/>
+                        </a:spcAft>
+                        <a:buNone/>
+                      </a:pPr>
+                      <a:r>
+                        <a:rPr lang="en-US" sz="1050">
+                          <a:solidFill>
+                            <a:schemeClr val="dk1"/>
+                          </a:solidFill>
+                        </a:rPr>
+                        <a:t>-105.666159</a:t>
+                      </a:r>
+                      <a:endParaRPr sz="1050">
+                        <a:solidFill>
+                          <a:schemeClr val="dk1"/>
+                        </a:solidFill>
+                      </a:endParaRPr>
+                    </a:p>
+                  </a:txBody>
+                  <a:tcPr marT="38100" marB="38100" marR="76200" marL="76200">
+                    <a:lnL cap="flat" cmpd="sng" w="9525">
+                      <a:solidFill>
+                        <a:srgbClr val="000000"/>
+                      </a:solidFill>
+                      <a:prstDash val="solid"/>
+                      <a:round/>
+                      <a:headEnd len="sm" w="sm" type="none"/>
+                      <a:tailEnd len="sm" w="sm" type="none"/>
+                    </a:lnL>
+                    <a:lnR cap="flat" cmpd="sng" w="9525">
+                      <a:solidFill>
+                        <a:srgbClr val="000000"/>
+                      </a:solidFill>
+                      <a:prstDash val="solid"/>
+                      <a:round/>
+                      <a:headEnd len="sm" w="sm" type="none"/>
+                      <a:tailEnd len="sm" w="sm" type="none"/>
+                    </a:lnR>
+                    <a:lnT cap="flat" cmpd="sng" w="9525">
+                      <a:solidFill>
+                        <a:srgbClr val="000000"/>
+                      </a:solidFill>
+                      <a:prstDash val="solid"/>
+                      <a:round/>
+                      <a:headEnd len="sm" w="sm" type="none"/>
+                      <a:tailEnd len="sm" w="sm" type="none"/>
+                    </a:lnT>
+                    <a:lnB cap="flat" cmpd="sng" w="9525">
+                      <a:solidFill>
+                        <a:srgbClr val="000000"/>
+                      </a:solidFill>
+                      <a:prstDash val="solid"/>
+                      <a:round/>
+                      <a:headEnd len="sm" w="sm" type="none"/>
+                      <a:tailEnd len="sm" w="sm" type="none"/>
+                    </a:lnB>
+                  </a:tcPr>
+                </a:tc>
+                <a:tc>
+                  <a:txBody>
+                    <a:bodyPr/>
+                    <a:lstStyle/>
+                    <a:p>
+                      <a:pPr indent="0" lvl="0" marL="0" rtl="0" algn="r">
+                        <a:lnSpc>
+                          <a:spcPct val="115000"/>
+                        </a:lnSpc>
+                        <a:spcBef>
+                          <a:spcPts val="0"/>
+                        </a:spcBef>
+                        <a:spcAft>
+                          <a:spcPts val="0"/>
+                        </a:spcAft>
+                        <a:buNone/>
+                      </a:pPr>
+                      <a:r>
+                        <a:rPr lang="en-US" sz="1050">
+                          <a:solidFill>
+                            <a:schemeClr val="dk1"/>
+                          </a:solidFill>
+                        </a:rPr>
+                        <a:t>-98.969759</a:t>
+                      </a:r>
+                      <a:endParaRPr sz="1050">
+                        <a:solidFill>
+                          <a:schemeClr val="dk1"/>
+                        </a:solidFill>
+                      </a:endParaRPr>
+                    </a:p>
+                  </a:txBody>
+                  <a:tcPr marT="38100" marB="38100" marR="76200" marL="76200">
+                    <a:lnL cap="flat" cmpd="sng" w="9525">
+                      <a:solidFill>
+                        <a:srgbClr val="000000"/>
+                      </a:solidFill>
+                      <a:prstDash val="solid"/>
+                      <a:round/>
+                      <a:headEnd len="sm" w="sm" type="none"/>
+                      <a:tailEnd len="sm" w="sm" type="none"/>
+                    </a:lnL>
+                    <a:lnR cap="flat" cmpd="sng" w="9525">
+                      <a:solidFill>
+                        <a:srgbClr val="000000"/>
+                      </a:solidFill>
+                      <a:prstDash val="solid"/>
+                      <a:round/>
+                      <a:headEnd len="sm" w="sm" type="none"/>
+                      <a:tailEnd len="sm" w="sm" type="none"/>
+                    </a:lnR>
+                    <a:lnT cap="flat" cmpd="sng" w="9525">
+                      <a:solidFill>
+                        <a:srgbClr val="000000"/>
+                      </a:solidFill>
+                      <a:prstDash val="solid"/>
+                      <a:round/>
+                      <a:headEnd len="sm" w="sm" type="none"/>
+                      <a:tailEnd len="sm" w="sm" type="none"/>
+                    </a:lnT>
+                    <a:lnB cap="flat" cmpd="sng" w="9525">
+                      <a:solidFill>
+                        <a:srgbClr val="000000"/>
+                      </a:solidFill>
+                      <a:prstDash val="solid"/>
+                      <a:round/>
+                      <a:headEnd len="sm" w="sm" type="none"/>
+                      <a:tailEnd len="sm" w="sm" type="none"/>
+                    </a:lnB>
+                  </a:tcPr>
+                </a:tc>
+                <a:tc>
+                  <a:txBody>
+                    <a:bodyPr/>
+                    <a:lstStyle/>
+                    <a:p>
+                      <a:pPr indent="0" lvl="0" marL="0" rtl="0" algn="r">
+                        <a:lnSpc>
+                          <a:spcPct val="115000"/>
+                        </a:lnSpc>
+                        <a:spcBef>
+                          <a:spcPts val="0"/>
+                        </a:spcBef>
+                        <a:spcAft>
+                          <a:spcPts val="0"/>
+                        </a:spcAft>
+                        <a:buNone/>
+                      </a:pPr>
+                      <a:r>
+                        <a:rPr lang="en-US" sz="1050">
+                          <a:solidFill>
+                            <a:schemeClr val="dk1"/>
+                          </a:solidFill>
+                        </a:rPr>
+                        <a:t>26.636934</a:t>
+                      </a:r>
+                      <a:endParaRPr sz="1050">
+                        <a:solidFill>
+                          <a:schemeClr val="dk1"/>
+                        </a:solidFill>
+                      </a:endParaRPr>
+                    </a:p>
+                  </a:txBody>
+                  <a:tcPr marT="38100" marB="38100" marR="76200" marL="76200">
+                    <a:lnL cap="flat" cmpd="sng" w="9525">
+                      <a:solidFill>
+                        <a:srgbClr val="000000"/>
+                      </a:solidFill>
+                      <a:prstDash val="solid"/>
+                      <a:round/>
+                      <a:headEnd len="sm" w="sm" type="none"/>
+                      <a:tailEnd len="sm" w="sm" type="none"/>
+                    </a:lnL>
+                    <a:lnR cap="flat" cmpd="sng" w="9525">
+                      <a:solidFill>
+                        <a:srgbClr val="000000"/>
+                      </a:solidFill>
+                      <a:prstDash val="solid"/>
+                      <a:round/>
+                      <a:headEnd len="sm" w="sm" type="none"/>
+                      <a:tailEnd len="sm" w="sm" type="none"/>
+                    </a:lnR>
+                    <a:lnT cap="flat" cmpd="sng" w="9525">
+                      <a:solidFill>
+                        <a:srgbClr val="000000"/>
+                      </a:solidFill>
+                      <a:prstDash val="solid"/>
+                      <a:round/>
+                      <a:headEnd len="sm" w="sm" type="none"/>
+                      <a:tailEnd len="sm" w="sm" type="none"/>
+                    </a:lnT>
+                    <a:lnB cap="flat" cmpd="sng" w="9525">
+                      <a:solidFill>
+                        <a:srgbClr val="000000"/>
+                      </a:solidFill>
+                      <a:prstDash val="solid"/>
+                      <a:round/>
+                      <a:headEnd len="sm" w="sm" type="none"/>
+                      <a:tailEnd len="sm" w="sm" type="none"/>
+                    </a:lnB>
+                  </a:tcPr>
+                </a:tc>
+                <a:tc>
+                  <a:txBody>
+                    <a:bodyPr/>
+                    <a:lstStyle/>
+                    <a:p>
+                      <a:pPr indent="0" lvl="0" marL="0" rtl="0" algn="r">
+                        <a:lnSpc>
+                          <a:spcPct val="115000"/>
+                        </a:lnSpc>
+                        <a:spcBef>
+                          <a:spcPts val="0"/>
+                        </a:spcBef>
+                        <a:spcAft>
+                          <a:spcPts val="0"/>
+                        </a:spcAft>
+                        <a:buNone/>
+                      </a:pPr>
+                      <a:r>
+                        <a:rPr lang="en-US" sz="1050">
+                          <a:solidFill>
+                            <a:schemeClr val="dk1"/>
+                          </a:solidFill>
+                        </a:rPr>
+                        <a:t>Older (5-6y) short</a:t>
+                      </a:r>
+                      <a:endParaRPr sz="1050">
+                        <a:solidFill>
+                          <a:schemeClr val="dk1"/>
+                        </a:solidFill>
+                      </a:endParaRPr>
+                    </a:p>
+                  </a:txBody>
+                  <a:tcPr marT="38100" marB="38100" marR="76200" marL="76200">
+                    <a:lnL cap="flat" cmpd="sng" w="9525">
+                      <a:solidFill>
+                        <a:srgbClr val="000000"/>
+                      </a:solidFill>
+                      <a:prstDash val="solid"/>
+                      <a:round/>
+                      <a:headEnd len="sm" w="sm" type="none"/>
+                      <a:tailEnd len="sm" w="sm" type="none"/>
+                    </a:lnL>
+                    <a:lnR cap="flat" cmpd="sng" w="9525">
+                      <a:solidFill>
+                        <a:srgbClr val="000000"/>
+                      </a:solidFill>
+                      <a:prstDash val="solid"/>
+                      <a:round/>
+                      <a:headEnd len="sm" w="sm" type="none"/>
+                      <a:tailEnd len="sm" w="sm" type="none"/>
+                    </a:lnR>
+                    <a:lnT cap="flat" cmpd="sng" w="9525">
+                      <a:solidFill>
+                        <a:srgbClr val="000000"/>
+                      </a:solidFill>
+                      <a:prstDash val="solid"/>
+                      <a:round/>
+                      <a:headEnd len="sm" w="sm" type="none"/>
+                      <a:tailEnd len="sm" w="sm" type="none"/>
+                    </a:lnT>
+                    <a:lnB cap="flat" cmpd="sng" w="9525">
+                      <a:solidFill>
+                        <a:srgbClr val="000000"/>
+                      </a:solidFill>
+                      <a:prstDash val="solid"/>
+                      <a:round/>
+                      <a:headEnd len="sm" w="sm" type="none"/>
+                      <a:tailEnd len="sm" w="sm" type="none"/>
+                    </a:lnB>
+                  </a:tcPr>
+                </a:tc>
+              </a:tr>
+              <a:tr h="257175">
+                <a:tc>
+                  <a:txBody>
+                    <a:bodyPr/>
+                    <a:lstStyle/>
+                    <a:p>
+                      <a:pPr indent="0" lvl="0" marL="0" rtl="0" algn="r">
+                        <a:lnSpc>
+                          <a:spcPct val="115000"/>
+                        </a:lnSpc>
+                        <a:spcBef>
+                          <a:spcPts val="0"/>
+                        </a:spcBef>
+                        <a:spcAft>
+                          <a:spcPts val="0"/>
+                        </a:spcAft>
+                        <a:buNone/>
+                      </a:pPr>
+                      <a:r>
+                        <a:rPr lang="en-US" sz="1050">
+                          <a:solidFill>
+                            <a:schemeClr val="dk1"/>
+                          </a:solidFill>
+                        </a:rPr>
+                        <a:t>Sengkang Town Centre</a:t>
+                      </a:r>
+                      <a:endParaRPr sz="1050">
+                        <a:solidFill>
+                          <a:schemeClr val="dk1"/>
+                        </a:solidFill>
+                      </a:endParaRPr>
+                    </a:p>
+                  </a:txBody>
+                  <a:tcPr marT="38100" marB="38100" marR="76200" marL="76200" anchor="ctr">
+                    <a:lnL cap="flat" cmpd="sng" w="9525">
+                      <a:solidFill>
+                        <a:srgbClr val="000000"/>
+                      </a:solidFill>
+                      <a:prstDash val="solid"/>
+                      <a:round/>
+                      <a:headEnd len="sm" w="sm" type="none"/>
+                      <a:tailEnd len="sm" w="sm" type="none"/>
+                    </a:lnL>
+                    <a:lnR cap="flat" cmpd="sng" w="9525">
+                      <a:solidFill>
+                        <a:srgbClr val="000000"/>
+                      </a:solidFill>
+                      <a:prstDash val="solid"/>
+                      <a:round/>
+                      <a:headEnd len="sm" w="sm" type="none"/>
+                      <a:tailEnd len="sm" w="sm" type="none"/>
+                    </a:lnR>
+                    <a:lnT cap="flat" cmpd="sng" w="9525">
+                      <a:solidFill>
+                        <a:srgbClr val="000000"/>
+                      </a:solidFill>
+                      <a:prstDash val="solid"/>
+                      <a:round/>
+                      <a:headEnd len="sm" w="sm" type="none"/>
+                      <a:tailEnd len="sm" w="sm" type="none"/>
+                    </a:lnT>
+                    <a:lnB cap="flat" cmpd="sng" w="9525">
+                      <a:solidFill>
+                        <a:srgbClr val="000000"/>
+                      </a:solidFill>
+                      <a:prstDash val="solid"/>
+                      <a:round/>
+                      <a:headEnd len="sm" w="sm" type="none"/>
+                      <a:tailEnd len="sm" w="sm" type="none"/>
+                    </a:lnB>
+                  </a:tcPr>
+                </a:tc>
+                <a:tc>
+                  <a:txBody>
+                    <a:bodyPr/>
+                    <a:lstStyle/>
+                    <a:p>
+                      <a:pPr indent="0" lvl="0" marL="0" rtl="0" algn="r">
+                        <a:lnSpc>
+                          <a:spcPct val="115000"/>
+                        </a:lnSpc>
+                        <a:spcBef>
+                          <a:spcPts val="0"/>
+                        </a:spcBef>
+                        <a:spcAft>
+                          <a:spcPts val="0"/>
+                        </a:spcAft>
+                        <a:buNone/>
+                      </a:pPr>
+                      <a:r>
+                        <a:rPr lang="en-US" sz="1050">
+                          <a:solidFill>
+                            <a:schemeClr val="dk1"/>
+                          </a:solidFill>
+                        </a:rPr>
+                        <a:t>Sengkang</a:t>
+                      </a:r>
+                      <a:endParaRPr sz="1050">
+                        <a:solidFill>
+                          <a:schemeClr val="dk1"/>
+                        </a:solidFill>
+                      </a:endParaRPr>
+                    </a:p>
+                  </a:txBody>
+                  <a:tcPr marT="38100" marB="38100" marR="76200" marL="76200">
+                    <a:lnL cap="flat" cmpd="sng" w="9525">
+                      <a:solidFill>
+                        <a:srgbClr val="000000"/>
+                      </a:solidFill>
+                      <a:prstDash val="solid"/>
+                      <a:round/>
+                      <a:headEnd len="sm" w="sm" type="none"/>
+                      <a:tailEnd len="sm" w="sm" type="none"/>
+                    </a:lnL>
+                    <a:lnR cap="flat" cmpd="sng" w="9525">
+                      <a:solidFill>
+                        <a:srgbClr val="000000"/>
+                      </a:solidFill>
+                      <a:prstDash val="solid"/>
+                      <a:round/>
+                      <a:headEnd len="sm" w="sm" type="none"/>
+                      <a:tailEnd len="sm" w="sm" type="none"/>
+                    </a:lnR>
+                    <a:lnT cap="flat" cmpd="sng" w="9525">
+                      <a:solidFill>
+                        <a:srgbClr val="000000"/>
+                      </a:solidFill>
+                      <a:prstDash val="solid"/>
+                      <a:round/>
+                      <a:headEnd len="sm" w="sm" type="none"/>
+                      <a:tailEnd len="sm" w="sm" type="none"/>
+                    </a:lnT>
+                    <a:lnB cap="flat" cmpd="sng" w="9525">
+                      <a:solidFill>
+                        <a:srgbClr val="000000"/>
+                      </a:solidFill>
+                      <a:prstDash val="solid"/>
+                      <a:round/>
+                      <a:headEnd len="sm" w="sm" type="none"/>
+                      <a:tailEnd len="sm" w="sm" type="none"/>
+                    </a:lnB>
+                  </a:tcPr>
+                </a:tc>
+                <a:tc>
+                  <a:txBody>
+                    <a:bodyPr/>
+                    <a:lstStyle/>
+                    <a:p>
+                      <a:pPr indent="0" lvl="0" marL="0" rtl="0" algn="r">
+                        <a:lnSpc>
+                          <a:spcPct val="115000"/>
+                        </a:lnSpc>
+                        <a:spcBef>
+                          <a:spcPts val="0"/>
+                        </a:spcBef>
+                        <a:spcAft>
+                          <a:spcPts val="0"/>
+                        </a:spcAft>
+                        <a:buNone/>
+                      </a:pPr>
+                      <a:r>
+                        <a:rPr lang="en-US" sz="1050">
+                          <a:solidFill>
+                            <a:schemeClr val="dk1"/>
+                          </a:solidFill>
+                        </a:rPr>
+                        <a:t>24.0</a:t>
+                      </a:r>
+                      <a:endParaRPr sz="1050">
+                        <a:solidFill>
+                          <a:schemeClr val="dk1"/>
+                        </a:solidFill>
+                      </a:endParaRPr>
+                    </a:p>
+                  </a:txBody>
+                  <a:tcPr marT="38100" marB="38100" marR="76200" marL="76200">
+                    <a:lnL cap="flat" cmpd="sng" w="9525">
+                      <a:solidFill>
+                        <a:srgbClr val="000000"/>
+                      </a:solidFill>
+                      <a:prstDash val="solid"/>
+                      <a:round/>
+                      <a:headEnd len="sm" w="sm" type="none"/>
+                      <a:tailEnd len="sm" w="sm" type="none"/>
+                    </a:lnL>
+                    <a:lnR cap="flat" cmpd="sng" w="9525">
+                      <a:solidFill>
+                        <a:srgbClr val="000000"/>
+                      </a:solidFill>
+                      <a:prstDash val="solid"/>
+                      <a:round/>
+                      <a:headEnd len="sm" w="sm" type="none"/>
+                      <a:tailEnd len="sm" w="sm" type="none"/>
+                    </a:lnR>
+                    <a:lnT cap="flat" cmpd="sng" w="9525">
+                      <a:solidFill>
+                        <a:srgbClr val="000000"/>
+                      </a:solidFill>
+                      <a:prstDash val="solid"/>
+                      <a:round/>
+                      <a:headEnd len="sm" w="sm" type="none"/>
+                      <a:tailEnd len="sm" w="sm" type="none"/>
+                    </a:lnT>
+                    <a:lnB cap="flat" cmpd="sng" w="9525">
+                      <a:solidFill>
+                        <a:srgbClr val="000000"/>
+                      </a:solidFill>
+                      <a:prstDash val="solid"/>
+                      <a:round/>
+                      <a:headEnd len="sm" w="sm" type="none"/>
+                      <a:tailEnd len="sm" w="sm" type="none"/>
+                    </a:lnB>
+                  </a:tcPr>
+                </a:tc>
+                <a:tc>
+                  <a:txBody>
+                    <a:bodyPr/>
+                    <a:lstStyle/>
+                    <a:p>
+                      <a:pPr indent="0" lvl="0" marL="0" rtl="0" algn="r">
+                        <a:lnSpc>
+                          <a:spcPct val="115000"/>
+                        </a:lnSpc>
+                        <a:spcBef>
+                          <a:spcPts val="0"/>
+                        </a:spcBef>
+                        <a:spcAft>
+                          <a:spcPts val="0"/>
+                        </a:spcAft>
+                        <a:buNone/>
+                      </a:pPr>
+                      <a:r>
+                        <a:rPr lang="en-US" sz="1050">
+                          <a:solidFill>
+                            <a:schemeClr val="dk1"/>
+                          </a:solidFill>
+                        </a:rPr>
+                        <a:t>-99.708425</a:t>
+                      </a:r>
+                      <a:endParaRPr sz="1050">
+                        <a:solidFill>
+                          <a:schemeClr val="dk1"/>
+                        </a:solidFill>
+                      </a:endParaRPr>
+                    </a:p>
+                  </a:txBody>
+                  <a:tcPr marT="38100" marB="38100" marR="76200" marL="76200">
+                    <a:lnL cap="flat" cmpd="sng" w="9525">
+                      <a:solidFill>
+                        <a:srgbClr val="000000"/>
+                      </a:solidFill>
+                      <a:prstDash val="solid"/>
+                      <a:round/>
+                      <a:headEnd len="sm" w="sm" type="none"/>
+                      <a:tailEnd len="sm" w="sm" type="none"/>
+                    </a:lnL>
+                    <a:lnR cap="flat" cmpd="sng" w="9525">
+                      <a:solidFill>
+                        <a:srgbClr val="000000"/>
+                      </a:solidFill>
+                      <a:prstDash val="solid"/>
+                      <a:round/>
+                      <a:headEnd len="sm" w="sm" type="none"/>
+                      <a:tailEnd len="sm" w="sm" type="none"/>
+                    </a:lnR>
+                    <a:lnT cap="flat" cmpd="sng" w="9525">
+                      <a:solidFill>
+                        <a:srgbClr val="000000"/>
+                      </a:solidFill>
+                      <a:prstDash val="solid"/>
+                      <a:round/>
+                      <a:headEnd len="sm" w="sm" type="none"/>
+                      <a:tailEnd len="sm" w="sm" type="none"/>
+                    </a:lnT>
+                    <a:lnB cap="flat" cmpd="sng" w="9525">
+                      <a:solidFill>
+                        <a:srgbClr val="000000"/>
+                      </a:solidFill>
+                      <a:prstDash val="solid"/>
+                      <a:round/>
+                      <a:headEnd len="sm" w="sm" type="none"/>
+                      <a:tailEnd len="sm" w="sm" type="none"/>
+                    </a:lnB>
+                  </a:tcPr>
+                </a:tc>
+                <a:tc>
+                  <a:txBody>
+                    <a:bodyPr/>
+                    <a:lstStyle/>
+                    <a:p>
+                      <a:pPr indent="0" lvl="0" marL="0" rtl="0" algn="r">
+                        <a:lnSpc>
+                          <a:spcPct val="115000"/>
+                        </a:lnSpc>
+                        <a:spcBef>
+                          <a:spcPts val="0"/>
+                        </a:spcBef>
+                        <a:spcAft>
+                          <a:spcPts val="0"/>
+                        </a:spcAft>
+                        <a:buNone/>
+                      </a:pPr>
+                      <a:r>
+                        <a:rPr lang="en-US" sz="1050">
+                          <a:solidFill>
+                            <a:schemeClr val="dk1"/>
+                          </a:solidFill>
+                        </a:rPr>
+                        <a:t>79.994477</a:t>
+                      </a:r>
+                      <a:endParaRPr sz="1050">
+                        <a:solidFill>
+                          <a:schemeClr val="dk1"/>
+                        </a:solidFill>
+                      </a:endParaRPr>
+                    </a:p>
+                  </a:txBody>
+                  <a:tcPr marT="38100" marB="38100" marR="76200" marL="76200">
+                    <a:lnL cap="flat" cmpd="sng" w="9525">
+                      <a:solidFill>
+                        <a:srgbClr val="000000"/>
+                      </a:solidFill>
+                      <a:prstDash val="solid"/>
+                      <a:round/>
+                      <a:headEnd len="sm" w="sm" type="none"/>
+                      <a:tailEnd len="sm" w="sm" type="none"/>
+                    </a:lnL>
+                    <a:lnR cap="flat" cmpd="sng" w="9525">
+                      <a:solidFill>
+                        <a:srgbClr val="000000"/>
+                      </a:solidFill>
+                      <a:prstDash val="solid"/>
+                      <a:round/>
+                      <a:headEnd len="sm" w="sm" type="none"/>
+                      <a:tailEnd len="sm" w="sm" type="none"/>
+                    </a:lnR>
+                    <a:lnT cap="flat" cmpd="sng" w="9525">
+                      <a:solidFill>
+                        <a:srgbClr val="000000"/>
+                      </a:solidFill>
+                      <a:prstDash val="solid"/>
+                      <a:round/>
+                      <a:headEnd len="sm" w="sm" type="none"/>
+                      <a:tailEnd len="sm" w="sm" type="none"/>
+                    </a:lnT>
+                    <a:lnB cap="flat" cmpd="sng" w="9525">
+                      <a:solidFill>
+                        <a:srgbClr val="000000"/>
+                      </a:solidFill>
+                      <a:prstDash val="solid"/>
+                      <a:round/>
+                      <a:headEnd len="sm" w="sm" type="none"/>
+                      <a:tailEnd len="sm" w="sm" type="none"/>
+                    </a:lnB>
+                  </a:tcPr>
+                </a:tc>
+                <a:tc>
+                  <a:txBody>
+                    <a:bodyPr/>
+                    <a:lstStyle/>
+                    <a:p>
+                      <a:pPr indent="0" lvl="0" marL="0" rtl="0" algn="r">
+                        <a:lnSpc>
+                          <a:spcPct val="115000"/>
+                        </a:lnSpc>
+                        <a:spcBef>
+                          <a:spcPts val="0"/>
+                        </a:spcBef>
+                        <a:spcAft>
+                          <a:spcPts val="0"/>
+                        </a:spcAft>
+                        <a:buNone/>
+                      </a:pPr>
+                      <a:r>
+                        <a:rPr lang="en-US" sz="1050">
+                          <a:solidFill>
+                            <a:schemeClr val="dk1"/>
+                          </a:solidFill>
+                        </a:rPr>
+                        <a:t>78.630431</a:t>
+                      </a:r>
+                      <a:endParaRPr sz="1050">
+                        <a:solidFill>
+                          <a:schemeClr val="dk1"/>
+                        </a:solidFill>
+                      </a:endParaRPr>
+                    </a:p>
+                  </a:txBody>
+                  <a:tcPr marT="38100" marB="38100" marR="76200" marL="76200">
+                    <a:lnL cap="flat" cmpd="sng" w="9525">
+                      <a:solidFill>
+                        <a:srgbClr val="000000"/>
+                      </a:solidFill>
+                      <a:prstDash val="solid"/>
+                      <a:round/>
+                      <a:headEnd len="sm" w="sm" type="none"/>
+                      <a:tailEnd len="sm" w="sm" type="none"/>
+                    </a:lnL>
+                    <a:lnR cap="flat" cmpd="sng" w="9525">
+                      <a:solidFill>
+                        <a:srgbClr val="000000"/>
+                      </a:solidFill>
+                      <a:prstDash val="solid"/>
+                      <a:round/>
+                      <a:headEnd len="sm" w="sm" type="none"/>
+                      <a:tailEnd len="sm" w="sm" type="none"/>
+                    </a:lnR>
+                    <a:lnT cap="flat" cmpd="sng" w="9525">
+                      <a:solidFill>
+                        <a:srgbClr val="000000"/>
+                      </a:solidFill>
+                      <a:prstDash val="solid"/>
+                      <a:round/>
+                      <a:headEnd len="sm" w="sm" type="none"/>
+                      <a:tailEnd len="sm" w="sm" type="none"/>
+                    </a:lnT>
+                    <a:lnB cap="flat" cmpd="sng" w="9525">
+                      <a:solidFill>
+                        <a:srgbClr val="000000"/>
+                      </a:solidFill>
+                      <a:prstDash val="solid"/>
+                      <a:round/>
+                      <a:headEnd len="sm" w="sm" type="none"/>
+                      <a:tailEnd len="sm" w="sm" type="none"/>
+                    </a:lnB>
+                  </a:tcPr>
+                </a:tc>
+                <a:tc>
+                  <a:txBody>
+                    <a:bodyPr/>
+                    <a:lstStyle/>
+                    <a:p>
+                      <a:pPr indent="0" lvl="0" marL="0" rtl="0" algn="r">
+                        <a:lnSpc>
+                          <a:spcPct val="115000"/>
+                        </a:lnSpc>
+                        <a:spcBef>
+                          <a:spcPts val="0"/>
+                        </a:spcBef>
+                        <a:spcAft>
+                          <a:spcPts val="0"/>
+                        </a:spcAft>
+                        <a:buNone/>
+                      </a:pPr>
+                      <a:r>
+                        <a:rPr lang="en-US" sz="1050">
+                          <a:solidFill>
+                            <a:schemeClr val="dk1"/>
+                          </a:solidFill>
+                        </a:rPr>
+                        <a:t>Both bands short</a:t>
+                      </a:r>
+                      <a:endParaRPr sz="1050">
+                        <a:solidFill>
+                          <a:schemeClr val="dk1"/>
+                        </a:solidFill>
+                      </a:endParaRPr>
+                    </a:p>
+                  </a:txBody>
+                  <a:tcPr marT="38100" marB="38100" marR="76200" marL="76200">
+                    <a:lnL cap="flat" cmpd="sng" w="9525">
+                      <a:solidFill>
+                        <a:srgbClr val="000000"/>
+                      </a:solidFill>
+                      <a:prstDash val="solid"/>
+                      <a:round/>
+                      <a:headEnd len="sm" w="sm" type="none"/>
+                      <a:tailEnd len="sm" w="sm" type="none"/>
+                    </a:lnL>
+                    <a:lnR cap="flat" cmpd="sng" w="9525">
+                      <a:solidFill>
+                        <a:srgbClr val="000000"/>
+                      </a:solidFill>
+                      <a:prstDash val="solid"/>
+                      <a:round/>
+                      <a:headEnd len="sm" w="sm" type="none"/>
+                      <a:tailEnd len="sm" w="sm" type="none"/>
+                    </a:lnR>
+                    <a:lnT cap="flat" cmpd="sng" w="9525">
+                      <a:solidFill>
+                        <a:srgbClr val="000000"/>
+                      </a:solidFill>
+                      <a:prstDash val="solid"/>
+                      <a:round/>
+                      <a:headEnd len="sm" w="sm" type="none"/>
+                      <a:tailEnd len="sm" w="sm" type="none"/>
+                    </a:lnT>
+                    <a:lnB cap="flat" cmpd="sng" w="9525">
+                      <a:solidFill>
+                        <a:srgbClr val="000000"/>
+                      </a:solidFill>
+                      <a:prstDash val="solid"/>
+                      <a:round/>
+                      <a:headEnd len="sm" w="sm" type="none"/>
+                      <a:tailEnd len="sm" w="sm" type="none"/>
+                    </a:lnB>
+                  </a:tcPr>
+                </a:tc>
+              </a:tr>
+              <a:tr h="257175">
+                <a:tc>
+                  <a:txBody>
+                    <a:bodyPr/>
+                    <a:lstStyle/>
+                    <a:p>
+                      <a:pPr indent="0" lvl="0" marL="0" rtl="0" algn="r">
+                        <a:lnSpc>
+                          <a:spcPct val="115000"/>
+                        </a:lnSpc>
+                        <a:spcBef>
+                          <a:spcPts val="0"/>
+                        </a:spcBef>
+                        <a:spcAft>
+                          <a:spcPts val="0"/>
+                        </a:spcAft>
+                        <a:buNone/>
+                      </a:pPr>
+                      <a:r>
+                        <a:rPr lang="en-US" sz="1050">
+                          <a:solidFill>
+                            <a:schemeClr val="dk1"/>
+                          </a:solidFill>
+                        </a:rPr>
+                        <a:t>Bukit Batok West</a:t>
+                      </a:r>
+                      <a:endParaRPr sz="1050">
+                        <a:solidFill>
+                          <a:schemeClr val="dk1"/>
+                        </a:solidFill>
+                      </a:endParaRPr>
+                    </a:p>
+                  </a:txBody>
+                  <a:tcPr marT="38100" marB="38100" marR="76200" marL="76200" anchor="ctr">
+                    <a:lnL cap="flat" cmpd="sng" w="9525">
+                      <a:solidFill>
+                        <a:srgbClr val="000000"/>
+                      </a:solidFill>
+                      <a:prstDash val="solid"/>
+                      <a:round/>
+                      <a:headEnd len="sm" w="sm" type="none"/>
+                      <a:tailEnd len="sm" w="sm" type="none"/>
+                    </a:lnL>
+                    <a:lnR cap="flat" cmpd="sng" w="9525">
+                      <a:solidFill>
+                        <a:srgbClr val="000000"/>
+                      </a:solidFill>
+                      <a:prstDash val="solid"/>
+                      <a:round/>
+                      <a:headEnd len="sm" w="sm" type="none"/>
+                      <a:tailEnd len="sm" w="sm" type="none"/>
+                    </a:lnR>
+                    <a:lnT cap="flat" cmpd="sng" w="9525">
+                      <a:solidFill>
+                        <a:srgbClr val="000000"/>
+                      </a:solidFill>
+                      <a:prstDash val="solid"/>
+                      <a:round/>
+                      <a:headEnd len="sm" w="sm" type="none"/>
+                      <a:tailEnd len="sm" w="sm" type="none"/>
+                    </a:lnT>
+                    <a:lnB cap="flat" cmpd="sng" w="9525">
+                      <a:solidFill>
+                        <a:srgbClr val="000000"/>
+                      </a:solidFill>
+                      <a:prstDash val="solid"/>
+                      <a:round/>
+                      <a:headEnd len="sm" w="sm" type="none"/>
+                      <a:tailEnd len="sm" w="sm" type="none"/>
+                    </a:lnB>
+                  </a:tcPr>
+                </a:tc>
+                <a:tc>
+                  <a:txBody>
+                    <a:bodyPr/>
+                    <a:lstStyle/>
+                    <a:p>
+                      <a:pPr indent="0" lvl="0" marL="0" rtl="0" algn="r">
+                        <a:lnSpc>
+                          <a:spcPct val="115000"/>
+                        </a:lnSpc>
+                        <a:spcBef>
+                          <a:spcPts val="0"/>
+                        </a:spcBef>
+                        <a:spcAft>
+                          <a:spcPts val="0"/>
+                        </a:spcAft>
+                        <a:buNone/>
+                      </a:pPr>
+                      <a:r>
+                        <a:rPr lang="en-US" sz="1050">
+                          <a:solidFill>
+                            <a:schemeClr val="dk1"/>
+                          </a:solidFill>
+                        </a:rPr>
+                        <a:t>Bukit Batok</a:t>
+                      </a:r>
+                      <a:endParaRPr sz="1050">
+                        <a:solidFill>
+                          <a:schemeClr val="dk1"/>
+                        </a:solidFill>
+                      </a:endParaRPr>
+                    </a:p>
+                  </a:txBody>
+                  <a:tcPr marT="38100" marB="38100" marR="76200" marL="76200">
+                    <a:lnL cap="flat" cmpd="sng" w="9525">
+                      <a:solidFill>
+                        <a:srgbClr val="000000"/>
+                      </a:solidFill>
+                      <a:prstDash val="solid"/>
+                      <a:round/>
+                      <a:headEnd len="sm" w="sm" type="none"/>
+                      <a:tailEnd len="sm" w="sm" type="none"/>
+                    </a:lnL>
+                    <a:lnR cap="flat" cmpd="sng" w="9525">
+                      <a:solidFill>
+                        <a:srgbClr val="000000"/>
+                      </a:solidFill>
+                      <a:prstDash val="solid"/>
+                      <a:round/>
+                      <a:headEnd len="sm" w="sm" type="none"/>
+                      <a:tailEnd len="sm" w="sm" type="none"/>
+                    </a:lnR>
+                    <a:lnT cap="flat" cmpd="sng" w="9525">
+                      <a:solidFill>
+                        <a:srgbClr val="000000"/>
+                      </a:solidFill>
+                      <a:prstDash val="solid"/>
+                      <a:round/>
+                      <a:headEnd len="sm" w="sm" type="none"/>
+                      <a:tailEnd len="sm" w="sm" type="none"/>
+                    </a:lnT>
+                    <a:lnB cap="flat" cmpd="sng" w="9525">
+                      <a:solidFill>
+                        <a:srgbClr val="000000"/>
+                      </a:solidFill>
+                      <a:prstDash val="solid"/>
+                      <a:round/>
+                      <a:headEnd len="sm" w="sm" type="none"/>
+                      <a:tailEnd len="sm" w="sm" type="none"/>
+                    </a:lnB>
+                  </a:tcPr>
+                </a:tc>
+                <a:tc>
+                  <a:txBody>
+                    <a:bodyPr/>
+                    <a:lstStyle/>
+                    <a:p>
+                      <a:pPr indent="0" lvl="0" marL="0" rtl="0" algn="r">
+                        <a:lnSpc>
+                          <a:spcPct val="115000"/>
+                        </a:lnSpc>
+                        <a:spcBef>
+                          <a:spcPts val="0"/>
+                        </a:spcBef>
+                        <a:spcAft>
+                          <a:spcPts val="0"/>
+                        </a:spcAft>
+                        <a:buNone/>
+                      </a:pPr>
+                      <a:r>
+                        <a:rPr lang="en-US" sz="1050">
+                          <a:solidFill>
+                            <a:schemeClr val="dk1"/>
+                          </a:solidFill>
+                        </a:rPr>
+                        <a:t>5.0</a:t>
+                      </a:r>
+                      <a:endParaRPr sz="1050">
+                        <a:solidFill>
+                          <a:schemeClr val="dk1"/>
+                        </a:solidFill>
+                      </a:endParaRPr>
+                    </a:p>
+                  </a:txBody>
+                  <a:tcPr marT="38100" marB="38100" marR="76200" marL="76200">
+                    <a:lnL cap="flat" cmpd="sng" w="9525">
+                      <a:solidFill>
+                        <a:srgbClr val="000000"/>
+                      </a:solidFill>
+                      <a:prstDash val="solid"/>
+                      <a:round/>
+                      <a:headEnd len="sm" w="sm" type="none"/>
+                      <a:tailEnd len="sm" w="sm" type="none"/>
+                    </a:lnL>
+                    <a:lnR cap="flat" cmpd="sng" w="9525">
+                      <a:solidFill>
+                        <a:srgbClr val="000000"/>
+                      </a:solidFill>
+                      <a:prstDash val="solid"/>
+                      <a:round/>
+                      <a:headEnd len="sm" w="sm" type="none"/>
+                      <a:tailEnd len="sm" w="sm" type="none"/>
+                    </a:lnR>
+                    <a:lnT cap="flat" cmpd="sng" w="9525">
+                      <a:solidFill>
+                        <a:srgbClr val="000000"/>
+                      </a:solidFill>
+                      <a:prstDash val="solid"/>
+                      <a:round/>
+                      <a:headEnd len="sm" w="sm" type="none"/>
+                      <a:tailEnd len="sm" w="sm" type="none"/>
+                    </a:lnT>
+                    <a:lnB cap="flat" cmpd="sng" w="9525">
+                      <a:solidFill>
+                        <a:srgbClr val="000000"/>
+                      </a:solidFill>
+                      <a:prstDash val="solid"/>
+                      <a:round/>
+                      <a:headEnd len="sm" w="sm" type="none"/>
+                      <a:tailEnd len="sm" w="sm" type="none"/>
+                    </a:lnB>
+                  </a:tcPr>
+                </a:tc>
+                <a:tc>
+                  <a:txBody>
+                    <a:bodyPr/>
+                    <a:lstStyle/>
+                    <a:p>
+                      <a:pPr indent="0" lvl="0" marL="0" rtl="0" algn="r">
+                        <a:lnSpc>
+                          <a:spcPct val="115000"/>
+                        </a:lnSpc>
+                        <a:spcBef>
+                          <a:spcPts val="0"/>
+                        </a:spcBef>
+                        <a:spcAft>
+                          <a:spcPts val="0"/>
+                        </a:spcAft>
+                        <a:buNone/>
+                      </a:pPr>
+                      <a:r>
+                        <a:rPr lang="en-US" sz="1050">
+                          <a:solidFill>
+                            <a:schemeClr val="dk1"/>
+                          </a:solidFill>
+                        </a:rPr>
+                        <a:t>-82.148608</a:t>
+                      </a:r>
+                      <a:endParaRPr sz="1050">
+                        <a:solidFill>
+                          <a:schemeClr val="dk1"/>
+                        </a:solidFill>
+                      </a:endParaRPr>
+                    </a:p>
+                  </a:txBody>
+                  <a:tcPr marT="38100" marB="38100" marR="76200" marL="76200">
+                    <a:lnL cap="flat" cmpd="sng" w="9525">
+                      <a:solidFill>
+                        <a:srgbClr val="000000"/>
+                      </a:solidFill>
+                      <a:prstDash val="solid"/>
+                      <a:round/>
+                      <a:headEnd len="sm" w="sm" type="none"/>
+                      <a:tailEnd len="sm" w="sm" type="none"/>
+                    </a:lnL>
+                    <a:lnR cap="flat" cmpd="sng" w="9525">
+                      <a:solidFill>
+                        <a:srgbClr val="000000"/>
+                      </a:solidFill>
+                      <a:prstDash val="solid"/>
+                      <a:round/>
+                      <a:headEnd len="sm" w="sm" type="none"/>
+                      <a:tailEnd len="sm" w="sm" type="none"/>
+                    </a:lnR>
+                    <a:lnT cap="flat" cmpd="sng" w="9525">
+                      <a:solidFill>
+                        <a:srgbClr val="000000"/>
+                      </a:solidFill>
+                      <a:prstDash val="solid"/>
+                      <a:round/>
+                      <a:headEnd len="sm" w="sm" type="none"/>
+                      <a:tailEnd len="sm" w="sm" type="none"/>
+                    </a:lnT>
+                    <a:lnB cap="flat" cmpd="sng" w="9525">
+                      <a:solidFill>
+                        <a:srgbClr val="000000"/>
+                      </a:solidFill>
+                      <a:prstDash val="solid"/>
+                      <a:round/>
+                      <a:headEnd len="sm" w="sm" type="none"/>
+                      <a:tailEnd len="sm" w="sm" type="none"/>
+                    </a:lnB>
+                  </a:tcPr>
+                </a:tc>
+                <a:tc>
+                  <a:txBody>
+                    <a:bodyPr/>
+                    <a:lstStyle/>
+                    <a:p>
+                      <a:pPr indent="0" lvl="0" marL="0" rtl="0" algn="r">
+                        <a:lnSpc>
+                          <a:spcPct val="115000"/>
+                        </a:lnSpc>
+                        <a:spcBef>
+                          <a:spcPts val="0"/>
+                        </a:spcBef>
+                        <a:spcAft>
+                          <a:spcPts val="0"/>
+                        </a:spcAft>
+                        <a:buNone/>
+                      </a:pPr>
+                      <a:r>
+                        <a:rPr lang="en-US" sz="1050">
+                          <a:solidFill>
+                            <a:schemeClr val="dk1"/>
+                          </a:solidFill>
+                        </a:rPr>
+                        <a:t>46.461380</a:t>
+                      </a:r>
+                      <a:endParaRPr sz="1050">
+                        <a:solidFill>
+                          <a:schemeClr val="dk1"/>
+                        </a:solidFill>
+                      </a:endParaRPr>
+                    </a:p>
+                  </a:txBody>
+                  <a:tcPr marT="38100" marB="38100" marR="76200" marL="76200">
+                    <a:lnL cap="flat" cmpd="sng" w="9525">
+                      <a:solidFill>
+                        <a:srgbClr val="000000"/>
+                      </a:solidFill>
+                      <a:prstDash val="solid"/>
+                      <a:round/>
+                      <a:headEnd len="sm" w="sm" type="none"/>
+                      <a:tailEnd len="sm" w="sm" type="none"/>
+                    </a:lnL>
+                    <a:lnR cap="flat" cmpd="sng" w="9525">
+                      <a:solidFill>
+                        <a:srgbClr val="000000"/>
+                      </a:solidFill>
+                      <a:prstDash val="solid"/>
+                      <a:round/>
+                      <a:headEnd len="sm" w="sm" type="none"/>
+                      <a:tailEnd len="sm" w="sm" type="none"/>
+                    </a:lnR>
+                    <a:lnT cap="flat" cmpd="sng" w="9525">
+                      <a:solidFill>
+                        <a:srgbClr val="000000"/>
+                      </a:solidFill>
+                      <a:prstDash val="solid"/>
+                      <a:round/>
+                      <a:headEnd len="sm" w="sm" type="none"/>
+                      <a:tailEnd len="sm" w="sm" type="none"/>
+                    </a:lnT>
+                    <a:lnB cap="flat" cmpd="sng" w="9525">
+                      <a:solidFill>
+                        <a:srgbClr val="000000"/>
+                      </a:solidFill>
+                      <a:prstDash val="solid"/>
+                      <a:round/>
+                      <a:headEnd len="sm" w="sm" type="none"/>
+                      <a:tailEnd len="sm" w="sm" type="none"/>
+                    </a:lnB>
+                  </a:tcPr>
+                </a:tc>
+                <a:tc>
+                  <a:txBody>
+                    <a:bodyPr/>
+                    <a:lstStyle/>
+                    <a:p>
+                      <a:pPr indent="0" lvl="0" marL="0" rtl="0" algn="r">
+                        <a:lnSpc>
+                          <a:spcPct val="115000"/>
+                        </a:lnSpc>
+                        <a:spcBef>
+                          <a:spcPts val="0"/>
+                        </a:spcBef>
+                        <a:spcAft>
+                          <a:spcPts val="0"/>
+                        </a:spcAft>
+                        <a:buNone/>
+                      </a:pPr>
+                      <a:r>
+                        <a:rPr lang="en-US" sz="1050">
+                          <a:solidFill>
+                            <a:schemeClr val="dk1"/>
+                          </a:solidFill>
+                        </a:rPr>
+                        <a:t>-95.276655</a:t>
+                      </a:r>
+                      <a:endParaRPr sz="1050">
+                        <a:solidFill>
+                          <a:schemeClr val="dk1"/>
+                        </a:solidFill>
+                      </a:endParaRPr>
+                    </a:p>
+                  </a:txBody>
+                  <a:tcPr marT="38100" marB="38100" marR="76200" marL="76200">
+                    <a:lnL cap="flat" cmpd="sng" w="9525">
+                      <a:solidFill>
+                        <a:srgbClr val="000000"/>
+                      </a:solidFill>
+                      <a:prstDash val="solid"/>
+                      <a:round/>
+                      <a:headEnd len="sm" w="sm" type="none"/>
+                      <a:tailEnd len="sm" w="sm" type="none"/>
+                    </a:lnL>
+                    <a:lnR cap="flat" cmpd="sng" w="9525">
+                      <a:solidFill>
+                        <a:srgbClr val="000000"/>
+                      </a:solidFill>
+                      <a:prstDash val="solid"/>
+                      <a:round/>
+                      <a:headEnd len="sm" w="sm" type="none"/>
+                      <a:tailEnd len="sm" w="sm" type="none"/>
+                    </a:lnR>
+                    <a:lnT cap="flat" cmpd="sng" w="9525">
+                      <a:solidFill>
+                        <a:srgbClr val="000000"/>
+                      </a:solidFill>
+                      <a:prstDash val="solid"/>
+                      <a:round/>
+                      <a:headEnd len="sm" w="sm" type="none"/>
+                      <a:tailEnd len="sm" w="sm" type="none"/>
+                    </a:lnT>
+                    <a:lnB cap="flat" cmpd="sng" w="9525">
+                      <a:solidFill>
+                        <a:srgbClr val="000000"/>
+                      </a:solidFill>
+                      <a:prstDash val="solid"/>
+                      <a:round/>
+                      <a:headEnd len="sm" w="sm" type="none"/>
+                      <a:tailEnd len="sm" w="sm" type="none"/>
+                    </a:lnB>
+                  </a:tcPr>
+                </a:tc>
+                <a:tc>
+                  <a:txBody>
+                    <a:bodyPr/>
+                    <a:lstStyle/>
+                    <a:p>
+                      <a:pPr indent="0" lvl="0" marL="0" rtl="0" algn="r">
+                        <a:lnSpc>
+                          <a:spcPct val="115000"/>
+                        </a:lnSpc>
+                        <a:spcBef>
+                          <a:spcPts val="0"/>
+                        </a:spcBef>
+                        <a:spcAft>
+                          <a:spcPts val="0"/>
+                        </a:spcAft>
+                        <a:buNone/>
+                      </a:pPr>
+                      <a:r>
+                        <a:rPr lang="en-US" sz="1050">
+                          <a:solidFill>
+                            <a:schemeClr val="dk1"/>
+                          </a:solidFill>
+                        </a:rPr>
+                        <a:t>Younger (18mo-4y) short</a:t>
+                      </a:r>
+                      <a:endParaRPr sz="1050">
+                        <a:solidFill>
+                          <a:schemeClr val="dk1"/>
+                        </a:solidFill>
+                      </a:endParaRPr>
+                    </a:p>
+                  </a:txBody>
+                  <a:tcPr marT="38100" marB="38100" marR="76200" marL="76200">
+                    <a:lnL cap="flat" cmpd="sng" w="9525">
+                      <a:solidFill>
+                        <a:srgbClr val="000000"/>
+                      </a:solidFill>
+                      <a:prstDash val="solid"/>
+                      <a:round/>
+                      <a:headEnd len="sm" w="sm" type="none"/>
+                      <a:tailEnd len="sm" w="sm" type="none"/>
+                    </a:lnL>
+                    <a:lnR cap="flat" cmpd="sng" w="9525">
+                      <a:solidFill>
+                        <a:srgbClr val="000000"/>
+                      </a:solidFill>
+                      <a:prstDash val="solid"/>
+                      <a:round/>
+                      <a:headEnd len="sm" w="sm" type="none"/>
+                      <a:tailEnd len="sm" w="sm" type="none"/>
+                    </a:lnR>
+                    <a:lnT cap="flat" cmpd="sng" w="9525">
+                      <a:solidFill>
+                        <a:srgbClr val="000000"/>
+                      </a:solidFill>
+                      <a:prstDash val="solid"/>
+                      <a:round/>
+                      <a:headEnd len="sm" w="sm" type="none"/>
+                      <a:tailEnd len="sm" w="sm" type="none"/>
+                    </a:lnT>
+                    <a:lnB cap="flat" cmpd="sng" w="9525">
+                      <a:solidFill>
+                        <a:srgbClr val="000000"/>
+                      </a:solidFill>
+                      <a:prstDash val="solid"/>
+                      <a:round/>
+                      <a:headEnd len="sm" w="sm" type="none"/>
+                      <a:tailEnd len="sm" w="sm" type="none"/>
+                    </a:lnB>
+                  </a:tcPr>
+                </a:tc>
+              </a:tr>
+              <a:tr h="257175">
+                <a:tc>
+                  <a:txBody>
+                    <a:bodyPr/>
+                    <a:lstStyle/>
+                    <a:p>
+                      <a:pPr indent="0" lvl="0" marL="0" rtl="0" algn="r">
+                        <a:lnSpc>
+                          <a:spcPct val="115000"/>
+                        </a:lnSpc>
+                        <a:spcBef>
+                          <a:spcPts val="0"/>
+                        </a:spcBef>
+                        <a:spcAft>
+                          <a:spcPts val="0"/>
+                        </a:spcAft>
+                        <a:buNone/>
+                      </a:pPr>
+                      <a:r>
+                        <a:rPr lang="en-US" sz="1050">
+                          <a:solidFill>
+                            <a:schemeClr val="dk1"/>
+                          </a:solidFill>
+                        </a:rPr>
+                        <a:t>Fajar</a:t>
+                      </a:r>
+                      <a:endParaRPr sz="1050">
+                        <a:solidFill>
+                          <a:schemeClr val="dk1"/>
+                        </a:solidFill>
+                      </a:endParaRPr>
+                    </a:p>
+                  </a:txBody>
+                  <a:tcPr marT="38100" marB="38100" marR="76200" marL="76200" anchor="ctr">
+                    <a:lnL cap="flat" cmpd="sng" w="9525">
+                      <a:solidFill>
+                        <a:srgbClr val="000000"/>
+                      </a:solidFill>
+                      <a:prstDash val="solid"/>
+                      <a:round/>
+                      <a:headEnd len="sm" w="sm" type="none"/>
+                      <a:tailEnd len="sm" w="sm" type="none"/>
+                    </a:lnL>
+                    <a:lnR cap="flat" cmpd="sng" w="9525">
+                      <a:solidFill>
+                        <a:srgbClr val="000000"/>
+                      </a:solidFill>
+                      <a:prstDash val="solid"/>
+                      <a:round/>
+                      <a:headEnd len="sm" w="sm" type="none"/>
+                      <a:tailEnd len="sm" w="sm" type="none"/>
+                    </a:lnR>
+                    <a:lnT cap="flat" cmpd="sng" w="9525">
+                      <a:solidFill>
+                        <a:srgbClr val="000000"/>
+                      </a:solidFill>
+                      <a:prstDash val="solid"/>
+                      <a:round/>
+                      <a:headEnd len="sm" w="sm" type="none"/>
+                      <a:tailEnd len="sm" w="sm" type="none"/>
+                    </a:lnT>
+                    <a:lnB cap="flat" cmpd="sng" w="9525">
+                      <a:solidFill>
+                        <a:srgbClr val="000000"/>
+                      </a:solidFill>
+                      <a:prstDash val="solid"/>
+                      <a:round/>
+                      <a:headEnd len="sm" w="sm" type="none"/>
+                      <a:tailEnd len="sm" w="sm" type="none"/>
+                    </a:lnB>
+                  </a:tcPr>
+                </a:tc>
+                <a:tc>
+                  <a:txBody>
+                    <a:bodyPr/>
+                    <a:lstStyle/>
+                    <a:p>
+                      <a:pPr indent="0" lvl="0" marL="0" rtl="0" algn="r">
+                        <a:lnSpc>
+                          <a:spcPct val="115000"/>
+                        </a:lnSpc>
+                        <a:spcBef>
+                          <a:spcPts val="0"/>
+                        </a:spcBef>
+                        <a:spcAft>
+                          <a:spcPts val="0"/>
+                        </a:spcAft>
+                        <a:buNone/>
+                      </a:pPr>
+                      <a:r>
+                        <a:rPr lang="en-US" sz="1050">
+                          <a:solidFill>
+                            <a:schemeClr val="dk1"/>
+                          </a:solidFill>
+                        </a:rPr>
+                        <a:t>Bukit Panjang</a:t>
+                      </a:r>
+                      <a:endParaRPr sz="1050">
+                        <a:solidFill>
+                          <a:schemeClr val="dk1"/>
+                        </a:solidFill>
+                      </a:endParaRPr>
+                    </a:p>
+                  </a:txBody>
+                  <a:tcPr marT="38100" marB="38100" marR="76200" marL="76200">
+                    <a:lnL cap="flat" cmpd="sng" w="9525">
+                      <a:solidFill>
+                        <a:srgbClr val="000000"/>
+                      </a:solidFill>
+                      <a:prstDash val="solid"/>
+                      <a:round/>
+                      <a:headEnd len="sm" w="sm" type="none"/>
+                      <a:tailEnd len="sm" w="sm" type="none"/>
+                    </a:lnL>
+                    <a:lnR cap="flat" cmpd="sng" w="9525">
+                      <a:solidFill>
+                        <a:srgbClr val="000000"/>
+                      </a:solidFill>
+                      <a:prstDash val="solid"/>
+                      <a:round/>
+                      <a:headEnd len="sm" w="sm" type="none"/>
+                      <a:tailEnd len="sm" w="sm" type="none"/>
+                    </a:lnR>
+                    <a:lnT cap="flat" cmpd="sng" w="9525">
+                      <a:solidFill>
+                        <a:srgbClr val="000000"/>
+                      </a:solidFill>
+                      <a:prstDash val="solid"/>
+                      <a:round/>
+                      <a:headEnd len="sm" w="sm" type="none"/>
+                      <a:tailEnd len="sm" w="sm" type="none"/>
+                    </a:lnT>
+                    <a:lnB cap="flat" cmpd="sng" w="9525">
+                      <a:solidFill>
+                        <a:srgbClr val="000000"/>
+                      </a:solidFill>
+                      <a:prstDash val="solid"/>
+                      <a:round/>
+                      <a:headEnd len="sm" w="sm" type="none"/>
+                      <a:tailEnd len="sm" w="sm" type="none"/>
+                    </a:lnB>
+                  </a:tcPr>
+                </a:tc>
+                <a:tc>
+                  <a:txBody>
+                    <a:bodyPr/>
+                    <a:lstStyle/>
+                    <a:p>
+                      <a:pPr indent="0" lvl="0" marL="0" rtl="0" algn="r">
+                        <a:lnSpc>
+                          <a:spcPct val="115000"/>
+                        </a:lnSpc>
+                        <a:spcBef>
+                          <a:spcPts val="0"/>
+                        </a:spcBef>
+                        <a:spcAft>
+                          <a:spcPts val="0"/>
+                        </a:spcAft>
+                        <a:buNone/>
+                      </a:pPr>
+                      <a:r>
+                        <a:rPr lang="en-US" sz="1050">
+                          <a:solidFill>
+                            <a:schemeClr val="dk1"/>
+                          </a:solidFill>
+                        </a:rPr>
+                        <a:t>11.0</a:t>
+                      </a:r>
+                      <a:endParaRPr sz="1050">
+                        <a:solidFill>
+                          <a:schemeClr val="dk1"/>
+                        </a:solidFill>
+                      </a:endParaRPr>
+                    </a:p>
+                  </a:txBody>
+                  <a:tcPr marT="38100" marB="38100" marR="76200" marL="76200">
+                    <a:lnL cap="flat" cmpd="sng" w="9525">
+                      <a:solidFill>
+                        <a:srgbClr val="000000"/>
+                      </a:solidFill>
+                      <a:prstDash val="solid"/>
+                      <a:round/>
+                      <a:headEnd len="sm" w="sm" type="none"/>
+                      <a:tailEnd len="sm" w="sm" type="none"/>
+                    </a:lnL>
+                    <a:lnR cap="flat" cmpd="sng" w="9525">
+                      <a:solidFill>
+                        <a:srgbClr val="000000"/>
+                      </a:solidFill>
+                      <a:prstDash val="solid"/>
+                      <a:round/>
+                      <a:headEnd len="sm" w="sm" type="none"/>
+                      <a:tailEnd len="sm" w="sm" type="none"/>
+                    </a:lnR>
+                    <a:lnT cap="flat" cmpd="sng" w="9525">
+                      <a:solidFill>
+                        <a:srgbClr val="000000"/>
+                      </a:solidFill>
+                      <a:prstDash val="solid"/>
+                      <a:round/>
+                      <a:headEnd len="sm" w="sm" type="none"/>
+                      <a:tailEnd len="sm" w="sm" type="none"/>
+                    </a:lnT>
+                    <a:lnB cap="flat" cmpd="sng" w="9525">
+                      <a:solidFill>
+                        <a:srgbClr val="000000"/>
+                      </a:solidFill>
+                      <a:prstDash val="solid"/>
+                      <a:round/>
+                      <a:headEnd len="sm" w="sm" type="none"/>
+                      <a:tailEnd len="sm" w="sm" type="none"/>
+                    </a:lnB>
+                  </a:tcPr>
+                </a:tc>
+                <a:tc>
+                  <a:txBody>
+                    <a:bodyPr/>
+                    <a:lstStyle/>
+                    <a:p>
+                      <a:pPr indent="0" lvl="0" marL="0" rtl="0" algn="r">
+                        <a:lnSpc>
+                          <a:spcPct val="115000"/>
+                        </a:lnSpc>
+                        <a:spcBef>
+                          <a:spcPts val="0"/>
+                        </a:spcBef>
+                        <a:spcAft>
+                          <a:spcPts val="0"/>
+                        </a:spcAft>
+                        <a:buNone/>
+                      </a:pPr>
+                      <a:r>
+                        <a:rPr lang="en-US" sz="1050">
+                          <a:solidFill>
+                            <a:schemeClr val="dk1"/>
+                          </a:solidFill>
+                        </a:rPr>
+                        <a:t>-81.827110</a:t>
+                      </a:r>
+                      <a:endParaRPr sz="1050">
+                        <a:solidFill>
+                          <a:schemeClr val="dk1"/>
+                        </a:solidFill>
+                      </a:endParaRPr>
+                    </a:p>
+                  </a:txBody>
+                  <a:tcPr marT="38100" marB="38100" marR="76200" marL="76200">
+                    <a:lnL cap="flat" cmpd="sng" w="9525">
+                      <a:solidFill>
+                        <a:srgbClr val="000000"/>
+                      </a:solidFill>
+                      <a:prstDash val="solid"/>
+                      <a:round/>
+                      <a:headEnd len="sm" w="sm" type="none"/>
+                      <a:tailEnd len="sm" w="sm" type="none"/>
+                    </a:lnL>
+                    <a:lnR cap="flat" cmpd="sng" w="9525">
+                      <a:solidFill>
+                        <a:srgbClr val="000000"/>
+                      </a:solidFill>
+                      <a:prstDash val="solid"/>
+                      <a:round/>
+                      <a:headEnd len="sm" w="sm" type="none"/>
+                      <a:tailEnd len="sm" w="sm" type="none"/>
+                    </a:lnR>
+                    <a:lnT cap="flat" cmpd="sng" w="9525">
+                      <a:solidFill>
+                        <a:srgbClr val="000000"/>
+                      </a:solidFill>
+                      <a:prstDash val="solid"/>
+                      <a:round/>
+                      <a:headEnd len="sm" w="sm" type="none"/>
+                      <a:tailEnd len="sm" w="sm" type="none"/>
+                    </a:lnT>
+                    <a:lnB cap="flat" cmpd="sng" w="9525">
+                      <a:solidFill>
+                        <a:srgbClr val="000000"/>
+                      </a:solidFill>
+                      <a:prstDash val="solid"/>
+                      <a:round/>
+                      <a:headEnd len="sm" w="sm" type="none"/>
+                      <a:tailEnd len="sm" w="sm" type="none"/>
+                    </a:lnB>
+                  </a:tcPr>
+                </a:tc>
+                <a:tc>
+                  <a:txBody>
+                    <a:bodyPr/>
+                    <a:lstStyle/>
+                    <a:p>
+                      <a:pPr indent="0" lvl="0" marL="0" rtl="0" algn="r">
+                        <a:lnSpc>
+                          <a:spcPct val="115000"/>
+                        </a:lnSpc>
+                        <a:spcBef>
+                          <a:spcPts val="0"/>
+                        </a:spcBef>
+                        <a:spcAft>
+                          <a:spcPts val="0"/>
+                        </a:spcAft>
+                        <a:buNone/>
+                      </a:pPr>
+                      <a:r>
+                        <a:rPr lang="en-US" sz="1050">
+                          <a:solidFill>
+                            <a:schemeClr val="dk1"/>
+                          </a:solidFill>
+                        </a:rPr>
+                        <a:t>54.524109</a:t>
+                      </a:r>
+                      <a:endParaRPr sz="1050">
+                        <a:solidFill>
+                          <a:schemeClr val="dk1"/>
+                        </a:solidFill>
+                      </a:endParaRPr>
+                    </a:p>
+                  </a:txBody>
+                  <a:tcPr marT="38100" marB="38100" marR="76200" marL="76200">
+                    <a:lnL cap="flat" cmpd="sng" w="9525">
+                      <a:solidFill>
+                        <a:srgbClr val="000000"/>
+                      </a:solidFill>
+                      <a:prstDash val="solid"/>
+                      <a:round/>
+                      <a:headEnd len="sm" w="sm" type="none"/>
+                      <a:tailEnd len="sm" w="sm" type="none"/>
+                    </a:lnL>
+                    <a:lnR cap="flat" cmpd="sng" w="9525">
+                      <a:solidFill>
+                        <a:srgbClr val="000000"/>
+                      </a:solidFill>
+                      <a:prstDash val="solid"/>
+                      <a:round/>
+                      <a:headEnd len="sm" w="sm" type="none"/>
+                      <a:tailEnd len="sm" w="sm" type="none"/>
+                    </a:lnR>
+                    <a:lnT cap="flat" cmpd="sng" w="9525">
+                      <a:solidFill>
+                        <a:srgbClr val="000000"/>
+                      </a:solidFill>
+                      <a:prstDash val="solid"/>
+                      <a:round/>
+                      <a:headEnd len="sm" w="sm" type="none"/>
+                      <a:tailEnd len="sm" w="sm" type="none"/>
+                    </a:lnT>
+                    <a:lnB cap="flat" cmpd="sng" w="9525">
+                      <a:solidFill>
+                        <a:srgbClr val="000000"/>
+                      </a:solidFill>
+                      <a:prstDash val="solid"/>
+                      <a:round/>
+                      <a:headEnd len="sm" w="sm" type="none"/>
+                      <a:tailEnd len="sm" w="sm" type="none"/>
+                    </a:lnB>
+                  </a:tcPr>
+                </a:tc>
+                <a:tc>
+                  <a:txBody>
+                    <a:bodyPr/>
+                    <a:lstStyle/>
+                    <a:p>
+                      <a:pPr indent="0" lvl="0" marL="0" rtl="0" algn="r">
+                        <a:lnSpc>
+                          <a:spcPct val="115000"/>
+                        </a:lnSpc>
+                        <a:spcBef>
+                          <a:spcPts val="0"/>
+                        </a:spcBef>
+                        <a:spcAft>
+                          <a:spcPts val="0"/>
+                        </a:spcAft>
+                        <a:buNone/>
+                      </a:pPr>
+                      <a:r>
+                        <a:rPr lang="en-US" sz="1050">
+                          <a:solidFill>
+                            <a:schemeClr val="dk1"/>
+                          </a:solidFill>
+                        </a:rPr>
+                        <a:t>-36.351219</a:t>
+                      </a:r>
+                      <a:endParaRPr sz="1050">
+                        <a:solidFill>
+                          <a:schemeClr val="dk1"/>
+                        </a:solidFill>
+                      </a:endParaRPr>
+                    </a:p>
+                  </a:txBody>
+                  <a:tcPr marT="38100" marB="38100" marR="76200" marL="76200">
+                    <a:lnL cap="flat" cmpd="sng" w="9525">
+                      <a:solidFill>
+                        <a:srgbClr val="000000"/>
+                      </a:solidFill>
+                      <a:prstDash val="solid"/>
+                      <a:round/>
+                      <a:headEnd len="sm" w="sm" type="none"/>
+                      <a:tailEnd len="sm" w="sm" type="none"/>
+                    </a:lnL>
+                    <a:lnR cap="flat" cmpd="sng" w="9525">
+                      <a:solidFill>
+                        <a:srgbClr val="000000"/>
+                      </a:solidFill>
+                      <a:prstDash val="solid"/>
+                      <a:round/>
+                      <a:headEnd len="sm" w="sm" type="none"/>
+                      <a:tailEnd len="sm" w="sm" type="none"/>
+                    </a:lnR>
+                    <a:lnT cap="flat" cmpd="sng" w="9525">
+                      <a:solidFill>
+                        <a:srgbClr val="000000"/>
+                      </a:solidFill>
+                      <a:prstDash val="solid"/>
+                      <a:round/>
+                      <a:headEnd len="sm" w="sm" type="none"/>
+                      <a:tailEnd len="sm" w="sm" type="none"/>
+                    </a:lnT>
+                    <a:lnB cap="flat" cmpd="sng" w="9525">
+                      <a:solidFill>
+                        <a:srgbClr val="000000"/>
+                      </a:solidFill>
+                      <a:prstDash val="solid"/>
+                      <a:round/>
+                      <a:headEnd len="sm" w="sm" type="none"/>
+                      <a:tailEnd len="sm" w="sm" type="none"/>
+                    </a:lnB>
+                  </a:tcPr>
+                </a:tc>
+                <a:tc>
+                  <a:txBody>
+                    <a:bodyPr/>
+                    <a:lstStyle/>
+                    <a:p>
+                      <a:pPr indent="0" lvl="0" marL="0" rtl="0" algn="r">
+                        <a:lnSpc>
+                          <a:spcPct val="115000"/>
+                        </a:lnSpc>
+                        <a:spcBef>
+                          <a:spcPts val="0"/>
+                        </a:spcBef>
+                        <a:spcAft>
+                          <a:spcPts val="0"/>
+                        </a:spcAft>
+                        <a:buNone/>
+                      </a:pPr>
+                      <a:r>
+                        <a:rPr lang="en-US" sz="1050">
+                          <a:solidFill>
+                            <a:schemeClr val="dk1"/>
+                          </a:solidFill>
+                        </a:rPr>
+                        <a:t>Younger (18mo-4y) short</a:t>
+                      </a:r>
+                      <a:endParaRPr sz="1050">
+                        <a:solidFill>
+                          <a:schemeClr val="dk1"/>
+                        </a:solidFill>
+                      </a:endParaRPr>
+                    </a:p>
+                  </a:txBody>
+                  <a:tcPr marT="38100" marB="38100" marR="76200" marL="76200">
+                    <a:lnL cap="flat" cmpd="sng" w="9525">
+                      <a:solidFill>
+                        <a:srgbClr val="000000"/>
+                      </a:solidFill>
+                      <a:prstDash val="solid"/>
+                      <a:round/>
+                      <a:headEnd len="sm" w="sm" type="none"/>
+                      <a:tailEnd len="sm" w="sm" type="none"/>
+                    </a:lnL>
+                    <a:lnR cap="flat" cmpd="sng" w="9525">
+                      <a:solidFill>
+                        <a:srgbClr val="000000"/>
+                      </a:solidFill>
+                      <a:prstDash val="solid"/>
+                      <a:round/>
+                      <a:headEnd len="sm" w="sm" type="none"/>
+                      <a:tailEnd len="sm" w="sm" type="none"/>
+                    </a:lnR>
+                    <a:lnT cap="flat" cmpd="sng" w="9525">
+                      <a:solidFill>
+                        <a:srgbClr val="000000"/>
+                      </a:solidFill>
+                      <a:prstDash val="solid"/>
+                      <a:round/>
+                      <a:headEnd len="sm" w="sm" type="none"/>
+                      <a:tailEnd len="sm" w="sm" type="none"/>
+                    </a:lnT>
+                    <a:lnB cap="flat" cmpd="sng" w="9525">
+                      <a:solidFill>
+                        <a:srgbClr val="000000"/>
+                      </a:solidFill>
+                      <a:prstDash val="solid"/>
+                      <a:round/>
+                      <a:headEnd len="sm" w="sm" type="none"/>
+                      <a:tailEnd len="sm" w="sm" type="none"/>
+                    </a:lnB>
+                  </a:tcPr>
+                </a:tc>
+              </a:tr>
+            </a:tbl>
+          </a:graphicData>
+        </a:graphic>
+      </p:graphicFrame>
+      <p:sp>
+        <p:nvSpPr>
+          <p:cNvPr id="206" name="Google Shape;206;g3f55c5dc601_0_9"/>
+          <p:cNvSpPr txBox="1"/>
+          <p:nvPr/>
+        </p:nvSpPr>
+        <p:spPr>
+          <a:xfrm>
+            <a:off x="638150" y="1321800"/>
+            <a:ext cx="11064300" cy="400200"/>
+          </a:xfrm>
+          <a:prstGeom prst="rect">
+            <a:avLst/>
+          </a:prstGeom>
+          <a:noFill/>
+          <a:ln>
+            <a:noFill/>
+          </a:ln>
+        </p:spPr>
+        <p:txBody>
+          <a:bodyPr anchorCtr="0" anchor="t" bIns="91425" lIns="91425" spcFirstLastPara="1" rIns="91425" wrap="square" tIns="91425">
+            <a:spAutoFit/>
+          </a:bodyPr>
+          <a:lstStyle/>
+          <a:p>
+            <a:pPr indent="0" lvl="0" marL="0" rtl="0" algn="l">
+              <a:lnSpc>
+                <a:spcPct val="135714"/>
+              </a:lnSpc>
+              <a:spcBef>
+                <a:spcPts val="0"/>
+              </a:spcBef>
+              <a:spcAft>
+                <a:spcPts val="0"/>
+              </a:spcAft>
+              <a:buNone/>
+            </a:pPr>
+            <a:r>
+              <a:rPr lang="en-US">
+                <a:solidFill>
+                  <a:srgbClr val="222222"/>
+                </a:solidFill>
+              </a:rPr>
+              <a:t>Blind spot: </a:t>
+            </a:r>
+            <a:r>
+              <a:rPr lang="en-US">
+                <a:solidFill>
+                  <a:srgbClr val="222222"/>
+                </a:solidFill>
+              </a:rPr>
+              <a:t>Every number so far assumes "1 centre = 100 kids, full 18mo-6y range."</a:t>
+            </a:r>
+            <a:endParaRPr>
+              <a:solidFill>
+                <a:srgbClr val="222222"/>
+              </a:solidFill>
+            </a:endParaRPr>
+          </a:p>
+        </p:txBody>
+      </p:sp>
+    </p:spTree>
+  </p:cSld>
+  <p:clrMapOvr>
+    <a:masterClrMapping/>
+  </p:clrMapOvr>
+</p:sld>
+</file>
+
+<file path=ppt/slides/slide14.xml><?xml version="1.0" encoding="utf-8"?>
+<p:sld xmlns:a="http://schemas.openxmlformats.org/drawingml/2006/main" xmlns:r="http://schemas.openxmlformats.org/officeDocument/2006/relationships" xmlns:mc="http://schemas.openxmlformats.org/markup-compatibility/2006" xmlns:mv="urn:schemas-microsoft-com:mac:vml" xmlns:p="http://schemas.openxmlformats.org/presentationml/2006/main" xmlns:c="http://schemas.openxmlformats.org/drawingml/2006/chart" xmlns:dgm="http://schemas.openxmlformats.org/drawingml/2006/diagram" xmlns:o="urn:schemas-microsoft-com:office:office" xmlns:v="urn:schemas-microsoft-com:vml" xmlns:pvml="urn:schemas-microsoft-com:office:powerpoint" xmlns:com="http://schemas.openxmlformats.org/drawingml/2006/compatibility" xmlns:p14="http://schemas.microsoft.com/office/powerpoint/2010/main" xmlns:p15="http://schemas.microsoft.com/office/powerpoint/2012/main" xmlns:ahyp="http://schemas.microsoft.com/office/drawing/2018/hyperlinkcolor">
+  <p:cSld>
+    <p:bg>
+      <p:bgPr>
+        <a:solidFill>
+          <a:srgbClr val="FFFFFF"/>
+        </a:solidFill>
+      </p:bgPr>
+    </p:bg>
+    <p:spTree>
+      <p:nvGrpSpPr>
+        <p:cNvPr id="210" name="Shape 210"/>
+        <p:cNvGrpSpPr/>
+        <p:nvPr/>
+      </p:nvGrpSpPr>
+      <p:grpSpPr>
+        <a:xfrm>
+          <a:off x="0" y="0"/>
+          <a:ext cx="0" cy="0"/>
+          <a:chOff x="0" y="0"/>
+          <a:chExt cx="0" cy="0"/>
+        </a:xfrm>
+      </p:grpSpPr>
+      <p:sp>
+        <p:nvSpPr>
+          <p:cNvPr id="211" name="Google Shape;211;g3f5588f5b17_0_316"/>
+          <p:cNvSpPr txBox="1"/>
+          <p:nvPr/>
+        </p:nvSpPr>
+        <p:spPr>
+          <a:xfrm>
+            <a:off x="548640" y="320040"/>
+            <a:ext cx="7315200" cy="292500"/>
+          </a:xfrm>
+          <a:prstGeom prst="rect">
+            <a:avLst/>
+          </a:prstGeom>
+          <a:noFill/>
+          <a:ln>
+            <a:noFill/>
+          </a:ln>
+        </p:spPr>
+        <p:txBody>
+          <a:bodyPr anchorCtr="0" anchor="t" bIns="45700" lIns="91425" spcFirstLastPara="1" rIns="91425" wrap="square" tIns="45700">
+            <a:spAutoFit/>
+          </a:bodyPr>
+          <a:lstStyle/>
+          <a:p>
+            <a:pPr indent="0" lvl="0" marL="0" marR="0" rtl="0" algn="l">
+              <a:lnSpc>
+                <a:spcPct val="100000"/>
+              </a:lnSpc>
+              <a:spcBef>
+                <a:spcPts val="0"/>
+              </a:spcBef>
+              <a:spcAft>
+                <a:spcPts val="0"/>
+              </a:spcAft>
+              <a:buNone/>
+            </a:pPr>
+            <a:r>
+              <a:rPr b="1" lang="en-US" sz="1300">
+                <a:solidFill>
+                  <a:srgbClr val="2166AC"/>
+                </a:solidFill>
+              </a:rPr>
+              <a:t>FORWARD LOOKING</a:t>
+            </a:r>
+            <a:endParaRPr/>
+          </a:p>
+        </p:txBody>
+      </p:sp>
+      <p:sp>
+        <p:nvSpPr>
+          <p:cNvPr id="212" name="Google Shape;212;g3f5588f5b17_0_316"/>
+          <p:cNvSpPr txBox="1"/>
+          <p:nvPr/>
+        </p:nvSpPr>
+        <p:spPr>
+          <a:xfrm>
+            <a:off x="548640" y="621792"/>
+            <a:ext cx="11064300" cy="477000"/>
+          </a:xfrm>
+          <a:prstGeom prst="rect">
+            <a:avLst/>
+          </a:prstGeom>
+          <a:noFill/>
+          <a:ln>
+            <a:noFill/>
+          </a:ln>
+        </p:spPr>
+        <p:txBody>
+          <a:bodyPr anchorCtr="0" anchor="t" bIns="45700" lIns="91425" spcFirstLastPara="1" rIns="91425" wrap="square" tIns="45700">
+            <a:spAutoFit/>
+          </a:bodyPr>
+          <a:lstStyle/>
+          <a:p>
+            <a:pPr indent="0" lvl="0" marL="0" marR="0" rtl="0" algn="l">
+              <a:lnSpc>
+                <a:spcPct val="100000"/>
+              </a:lnSpc>
+              <a:spcBef>
+                <a:spcPts val="0"/>
+              </a:spcBef>
+              <a:spcAft>
+                <a:spcPts val="0"/>
+              </a:spcAft>
+              <a:buNone/>
+            </a:pPr>
+            <a:r>
+              <a:rPr b="1" lang="en-US" sz="2500">
+                <a:solidFill>
+                  <a:srgbClr val="222222"/>
+                </a:solidFill>
+              </a:rPr>
+              <a:t>Deficiency Roadmap Map</a:t>
+            </a:r>
+            <a:endParaRPr b="1" sz="2500">
+              <a:solidFill>
+                <a:srgbClr val="222222"/>
+              </a:solidFill>
+            </a:endParaRPr>
+          </a:p>
+        </p:txBody>
+      </p:sp>
+      <p:cxnSp>
+        <p:nvCxnSpPr>
+          <p:cNvPr id="213" name="Google Shape;213;g3f5588f5b17_0_316"/>
+          <p:cNvCxnSpPr/>
+          <p:nvPr/>
+        </p:nvCxnSpPr>
+        <p:spPr>
+          <a:xfrm>
+            <a:off x="548640" y="1210306"/>
+            <a:ext cx="11091600" cy="0"/>
+          </a:xfrm>
+          <a:prstGeom prst="straightConnector1">
+            <a:avLst/>
+          </a:prstGeom>
+          <a:noFill/>
+          <a:ln cap="flat" cmpd="sng" w="12700">
+            <a:solidFill>
+              <a:srgbClr val="C7CCD1"/>
+            </a:solidFill>
+            <a:prstDash val="solid"/>
+            <a:round/>
+            <a:headEnd len="sm" w="sm" type="none"/>
+            <a:tailEnd len="sm" w="sm" type="none"/>
+          </a:ln>
+          <a:effectLst>
+            <a:outerShdw blurRad="40000" rotWithShape="0" dir="5400000" dist="20000">
+              <a:srgbClr val="000000">
+                <a:alpha val="38040"/>
+              </a:srgbClr>
+            </a:outerShdw>
+          </a:effectLst>
+        </p:spPr>
+      </p:cxnSp>
+      <p:sp>
+        <p:nvSpPr>
+          <p:cNvPr id="214" name="Google Shape;214;g3f5588f5b17_0_316"/>
           <p:cNvSpPr txBox="1"/>
           <p:nvPr/>
         </p:nvSpPr>
@@ -29254,7 +35282,7 @@
       </p:sp>
       <p:sp>
         <p:nvSpPr>
-          <p:cNvPr id="205" name="Google Shape;205;g3f5588f5b17_0_316"/>
+          <p:cNvPr id="215" name="Google Shape;215;g3f5588f5b17_0_316"/>
           <p:cNvSpPr txBox="1"/>
           <p:nvPr/>
         </p:nvSpPr>
@@ -29311,7 +35339,7 @@
       </p:sp>
       <p:pic>
         <p:nvPicPr>
-          <p:cNvPr id="206" name="Google Shape;206;g3f5588f5b17_0_316" title="09_first_deficit_year_roadmap.png"/>
+          <p:cNvPr id="216" name="Google Shape;216;g3f5588f5b17_0_316" title="09_first_deficit_year_roadmap.png"/>
           <p:cNvPicPr preferRelativeResize="0"/>
           <p:nvPr/>
         </p:nvPicPr>
@@ -29337,6 +35365,75 @@
           </a:ln>
         </p:spPr>
       </p:pic>
+      <p:sp>
+        <p:nvSpPr>
+          <p:cNvPr id="217" name="Google Shape;217;g3f5588f5b17_0_316"/>
+          <p:cNvSpPr txBox="1"/>
+          <p:nvPr/>
+        </p:nvSpPr>
+        <p:spPr>
+          <a:xfrm>
+            <a:off x="9193775" y="6099250"/>
+            <a:ext cx="2878800" cy="307800"/>
+          </a:xfrm>
+          <a:prstGeom prst="rect">
+            <a:avLst/>
+          </a:prstGeom>
+          <a:noFill/>
+          <a:ln>
+            <a:noFill/>
+          </a:ln>
+        </p:spPr>
+        <p:txBody>
+          <a:bodyPr anchorCtr="0" anchor="t" bIns="91425" lIns="91425" spcFirstLastPara="1" rIns="91425" wrap="square" tIns="91425">
+            <a:spAutoFit/>
+          </a:bodyPr>
+          <a:lstStyle/>
+          <a:p>
+            <a:pPr indent="0" lvl="0" marL="457200" marR="0" rtl="0" algn="l">
+              <a:lnSpc>
+                <a:spcPct val="100000"/>
+              </a:lnSpc>
+              <a:spcBef>
+                <a:spcPts val="0"/>
+              </a:spcBef>
+              <a:spcAft>
+                <a:spcPts val="0"/>
+              </a:spcAft>
+              <a:buNone/>
+            </a:pPr>
+            <a:r>
+              <a:rPr lang="en-US" sz="800">
+                <a:solidFill>
+                  <a:schemeClr val="dk1"/>
+                </a:solidFill>
+              </a:rPr>
+              <a:t>Refer to codebase for </a:t>
+            </a:r>
+            <a:r>
+              <a:rPr lang="en-US" sz="800">
+                <a:solidFill>
+                  <a:schemeClr val="dk1"/>
+                </a:solidFill>
+              </a:rPr>
+              <a:t>robustness</a:t>
+            </a:r>
+            <a:r>
+              <a:rPr lang="en-US" sz="800">
+                <a:solidFill>
+                  <a:schemeClr val="dk1"/>
+                </a:solidFill>
+              </a:rPr>
+              <a:t> check</a:t>
+            </a:r>
+            <a:endParaRPr i="1" sz="800">
+              <a:solidFill>
+                <a:schemeClr val="dk1"/>
+              </a:solidFill>
+            </a:endParaRPr>
+          </a:p>
+        </p:txBody>
+      </p:sp>
     </p:spTree>
   </p:cSld>
   <p:clrMapOvr>
@@ -29345,7 +35442,7 @@
 </p:sld>
 </file>
 
-<file path=ppt/slides/slide14.xml><?xml version="1.0" encoding="utf-8"?>
+<file path=ppt/slides/slide15.xml><?xml version="1.0" encoding="utf-8"?>
 <p:sld xmlns:a="http://schemas.openxmlformats.org/drawingml/2006/main" xmlns:r="http://schemas.openxmlformats.org/officeDocument/2006/relationships" xmlns:mc="http://schemas.openxmlformats.org/markup-compatibility/2006" xmlns:mv="urn:schemas-microsoft-com:mac:vml" xmlns:p="http://schemas.openxmlformats.org/presentationml/2006/main" xmlns:c="http://schemas.openxmlformats.org/drawingml/2006/chart" xmlns:dgm="http://schemas.openxmlformats.org/drawingml/2006/diagram" xmlns:o="urn:schemas-microsoft-com:office:office" xmlns:v="urn:schemas-microsoft-com:vml" xmlns:pvml="urn:schemas-microsoft-com:office:powerpoint" xmlns:com="http://schemas.openxmlformats.org/drawingml/2006/compatibility" xmlns:p14="http://schemas.microsoft.com/office/powerpoint/2010/main" xmlns:p15="http://schemas.microsoft.com/office/powerpoint/2012/main" xmlns:ahyp="http://schemas.microsoft.com/office/drawing/2018/hyperlinkcolor">
   <p:cSld>
     <p:bg>
@@ -29357,7 +35454,7 @@
     </p:bg>
     <p:spTree>
       <p:nvGrpSpPr>
-        <p:cNvPr id="210" name="Shape 210"/>
+        <p:cNvPr id="221" name="Shape 221"/>
         <p:cNvGrpSpPr/>
         <p:nvPr/>
       </p:nvGrpSpPr>
@@ -29371,7 +35468,7 @@
       </p:grpSpPr>
       <p:sp>
         <p:nvSpPr>
-          <p:cNvPr id="211" name="Google Shape;211;g3f5588f5b17_0_328"/>
+          <p:cNvPr id="222" name="Google Shape;222;g3f5588f5b17_0_328"/>
           <p:cNvSpPr txBox="1"/>
           <p:nvPr/>
         </p:nvSpPr>
@@ -29420,7 +35517,7 @@
       </p:sp>
       <p:sp>
         <p:nvSpPr>
-          <p:cNvPr id="212" name="Google Shape;212;g3f5588f5b17_0_328"/>
+          <p:cNvPr id="223" name="Google Shape;223;g3f5588f5b17_0_328"/>
           <p:cNvSpPr txBox="1"/>
           <p:nvPr/>
         </p:nvSpPr>
@@ -29473,7 +35570,7 @@
       </p:sp>
       <p:cxnSp>
         <p:nvCxnSpPr>
-          <p:cNvPr id="213" name="Google Shape;213;g3f5588f5b17_0_328"/>
+          <p:cNvPr id="224" name="Google Shape;224;g3f5588f5b17_0_328"/>
           <p:cNvCxnSpPr/>
           <p:nvPr/>
         </p:nvCxnSpPr>
@@ -29506,7 +35603,7 @@
       </p:cxnSp>
       <p:sp>
         <p:nvSpPr>
-          <p:cNvPr id="214" name="Google Shape;214;g3f5588f5b17_0_328"/>
+          <p:cNvPr id="225" name="Google Shape;225;g3f5588f5b17_0_328"/>
           <p:cNvSpPr txBox="1"/>
           <p:nvPr/>
         </p:nvSpPr>
@@ -29575,7 +35672,7 @@
       </p:sp>
       <p:pic>
         <p:nvPicPr>
-          <p:cNvPr id="215" name="Google Shape;215;g3f5588f5b17_0_328"/>
+          <p:cNvPr id="226" name="Google Shape;226;g3f5588f5b17_0_328"/>
           <p:cNvPicPr preferRelativeResize="0"/>
           <p:nvPr/>
         </p:nvPicPr>
@@ -29603,7 +35700,7 @@
       </p:pic>
       <p:pic>
         <p:nvPicPr>
-          <p:cNvPr id="216" name="Google Shape;216;g3f5588f5b17_0_328"/>
+          <p:cNvPr id="227" name="Google Shape;227;g3f5588f5b17_0_328"/>
           <p:cNvPicPr preferRelativeResize="0"/>
           <p:nvPr/>
         </p:nvPicPr>
@@ -29631,7 +35728,7 @@
       </p:pic>
       <p:sp>
         <p:nvSpPr>
-          <p:cNvPr id="217" name="Google Shape;217;g3f5588f5b17_0_328"/>
+          <p:cNvPr id="228" name="Google Shape;228;g3f5588f5b17_0_328"/>
           <p:cNvSpPr txBox="1"/>
           <p:nvPr/>
         </p:nvSpPr>
@@ -29765,7 +35862,7 @@
       </p:sp>
       <p:sp>
         <p:nvSpPr>
-          <p:cNvPr id="218" name="Google Shape;218;g3f5588f5b17_0_328"/>
+          <p:cNvPr id="229" name="Google Shape;229;g3f5588f5b17_0_328"/>
           <p:cNvSpPr txBox="1"/>
           <p:nvPr/>
         </p:nvSpPr>
@@ -30152,7 +36249,7 @@
             <a:tbl>
               <a:tblPr>
                 <a:noFill/>
-                <a:tableStyleId>{4E44A3EA-54B2-4BF2-B76C-6ED1256FAD4B}</a:tableStyleId>
+                <a:tableStyleId>{DAC45651-DEE7-4BCD-A208-FBDFB1AD0629}</a:tableStyleId>
               </a:tblPr>
               <a:tblGrid>
                 <a:gridCol w="618475"/>
@@ -34200,6 +40297,285 @@
 </file>
 
 <file path=ppt/theme/theme1.xml><?xml version="1.0" encoding="utf-8"?>
+<a:theme xmlns:a="http://schemas.openxmlformats.org/drawingml/2006/main" xmlns:r="http://schemas.openxmlformats.org/officeDocument/2006/relationships" name="Office Theme">
+  <a:themeElements>
+    <a:clrScheme name="Office">
+      <a:dk1>
+        <a:srgbClr val="000000"/>
+      </a:dk1>
+      <a:lt1>
+        <a:srgbClr val="FFFFFF"/>
+      </a:lt1>
+      <a:dk2>
+        <a:srgbClr val="1F497D"/>
+      </a:dk2>
+      <a:lt2>
+        <a:srgbClr val="EEECE1"/>
+      </a:lt2>
+      <a:accent1>
+        <a:srgbClr val="4F81BD"/>
+      </a:accent1>
+      <a:accent2>
+        <a:srgbClr val="C0504D"/>
+      </a:accent2>
+      <a:accent3>
+        <a:srgbClr val="9BBB59"/>
+      </a:accent3>
+      <a:accent4>
+        <a:srgbClr val="8064A2"/>
+      </a:accent4>
+      <a:accent5>
+        <a:srgbClr val="4BACC6"/>
+      </a:accent5>
+      <a:accent6>
+        <a:srgbClr val="F79646"/>
+      </a:accent6>
+      <a:hlink>
+        <a:srgbClr val="0000FF"/>
+      </a:hlink>
+      <a:folHlink>
+        <a:srgbClr val="800080"/>
+      </a:folHlink>
+    </a:clrScheme>
+    <a:fontScheme name="Office">
+      <a:majorFont>
+        <a:latin typeface="Arial"/>
+        <a:ea typeface=""/>
+        <a:cs typeface=""/>
+        <a:font script="Jpan" typeface="ＭＳ Ｐゴシック"/>
+        <a:font script="Hang" typeface="맑은 고딕"/>
+        <a:font script="Hans" typeface="宋体"/>
+        <a:font script="Hant" typeface="新細明體"/>
+        <a:font script="Arab" typeface="Times New Roman"/>
+        <a:font script="Hebr" typeface="Times New Roman"/>
+        <a:font script="Thai" typeface="Angsana New"/>
+        <a:font script="Ethi" typeface="Nyala"/>
+        <a:font script="Beng" typeface="Vrinda"/>
+        <a:font script="Gujr" typeface="Shruti"/>
+        <a:font script="Khmr" typeface="MoolBoran"/>
+        <a:font script="Knda" typeface="Tunga"/>
+        <a:font script="Guru" typeface="Raavi"/>
+        <a:font script="Cans" typeface="Euphemia"/>
+        <a:font script="Cher" typeface="Plantagenet Cherokee"/>
+        <a:font script="Yiii" typeface="Microsoft Yi Baiti"/>
+        <a:font script="Tibt" typeface="Microsoft Himalaya"/>
+        <a:font script="Thaa" typeface="MV Boli"/>
+        <a:font script="Deva" typeface="Mangal"/>
+        <a:font script="Telu" typeface="Gautami"/>
+        <a:font script="Taml" typeface="Latha"/>
+        <a:font script="Syrc" typeface="Estrangelo Edessa"/>
+        <a:font script="Orya" typeface="Kalinga"/>
+        <a:font script="Mlym" typeface="Kartika"/>
+        <a:font script="Laoo" typeface="DokChampa"/>
+        <a:font script="Sinh" typeface="Iskoola Pota"/>
+        <a:font script="Mong" typeface="Mongolian Baiti"/>
+        <a:font script="Viet" typeface="Times New Roman"/>
+        <a:font script="Uigh" typeface="Microsoft Uighur"/>
+        <a:font script="Geor" typeface="Sylfaen"/>
+      </a:majorFont>
+      <a:minorFont>
+        <a:latin typeface="Arial"/>
+        <a:ea typeface=""/>
+        <a:cs typeface=""/>
+        <a:font script="Jpan" typeface="ＭＳ Ｐゴシック"/>
+        <a:font script="Hang" typeface="맑은 고딕"/>
+        <a:font script="Hans" typeface="宋体"/>
+        <a:font script="Hant" typeface="新細明體"/>
+        <a:font script="Arab" typeface="Arial"/>
+        <a:font script="Hebr" typeface="Arial"/>
+        <a:font script="Thai" typeface="Cordia New"/>
+        <a:font script="Ethi" typeface="Nyala"/>
+        <a:font script="Beng" typeface="Vrinda"/>
+        <a:font script="Gujr" typeface="Shruti"/>
+        <a:font script="Khmr" typeface="DaunPenh"/>
+        <a:font script="Knda" typeface="Tunga"/>
+        <a:font script="Guru" typeface="Raavi"/>
+        <a:font script="Cans" typeface="Euphemia"/>
+        <a:font script="Cher" typeface="Plantagenet Cherokee"/>
+        <a:font script="Yiii" typeface="Microsoft Yi Baiti"/>
+        <a:font script="Tibt" typeface="Microsoft Himalaya"/>
+        <a:font script="Thaa" typeface="MV Boli"/>
+        <a:font script="Deva" typeface="Mangal"/>
+        <a:font script="Telu" typeface="Gautami"/>
+        <a:font script="Taml" typeface="Latha"/>
+        <a:font script="Syrc" typeface="Estrangelo Edessa"/>
+        <a:font script="Orya" typeface="Kalinga"/>
+        <a:font script="Mlym" typeface="Kartika"/>
+        <a:font script="Laoo" typeface="DokChampa"/>
+        <a:font script="Sinh" typeface="Iskoola Pota"/>
+        <a:font script="Mong" typeface="Mongolian Baiti"/>
+        <a:font script="Viet" typeface="Arial"/>
+        <a:font script="Uigh" typeface="Microsoft Uighur"/>
+        <a:font script="Geor" typeface="Sylfaen"/>
+      </a:minorFont>
+    </a:fontScheme>
+    <a:fmtScheme name="Office">
+      <a:fillStyleLst>
+        <a:solidFill>
+          <a:schemeClr val="phClr"/>
+        </a:solidFill>
+        <a:gradFill rotWithShape="1">
+          <a:gsLst>
+            <a:gs pos="0">
+              <a:schemeClr val="phClr">
+                <a:tint val="50000"/>
+                <a:satMod val="300000"/>
+              </a:schemeClr>
+            </a:gs>
+            <a:gs pos="35000">
+              <a:schemeClr val="phClr">
+                <a:tint val="37000"/>
+                <a:satMod val="300000"/>
+              </a:schemeClr>
+            </a:gs>
+            <a:gs pos="100000">
+              <a:schemeClr val="phClr">
+                <a:tint val="15000"/>
+                <a:satMod val="350000"/>
+              </a:schemeClr>
+            </a:gs>
+          </a:gsLst>
+          <a:lin ang="16200000" scaled="1"/>
+        </a:gradFill>
+        <a:gradFill rotWithShape="1">
+          <a:gsLst>
+            <a:gs pos="0">
+              <a:schemeClr val="phClr">
+                <a:tint val="100000"/>
+                <a:shade val="100000"/>
+                <a:satMod val="130000"/>
+              </a:schemeClr>
+            </a:gs>
+            <a:gs pos="100000">
+              <a:schemeClr val="phClr">
+                <a:tint val="50000"/>
+                <a:shade val="100000"/>
+                <a:satMod val="350000"/>
+              </a:schemeClr>
+            </a:gs>
+          </a:gsLst>
+          <a:lin ang="16200000" scaled="0"/>
+        </a:gradFill>
+      </a:fillStyleLst>
+      <a:lnStyleLst>
+        <a:ln w="9525" cap="flat" cmpd="sng" algn="ctr">
+          <a:solidFill>
+            <a:schemeClr val="phClr">
+              <a:shade val="95000"/>
+              <a:satMod val="105000"/>
+            </a:schemeClr>
+          </a:solidFill>
+          <a:prstDash val="solid"/>
+        </a:ln>
+        <a:ln w="25400" cap="flat" cmpd="sng" algn="ctr">
+          <a:solidFill>
+            <a:schemeClr val="phClr"/>
+          </a:solidFill>
+          <a:prstDash val="solid"/>
+        </a:ln>
+        <a:ln w="38100" cap="flat" cmpd="sng" algn="ctr">
+          <a:solidFill>
+            <a:schemeClr val="phClr"/>
+          </a:solidFill>
+          <a:prstDash val="solid"/>
+        </a:ln>
+      </a:lnStyleLst>
+      <a:effectStyleLst>
+        <a:effectStyle>
+          <a:effectLst>
+            <a:outerShdw blurRad="40000" dist="20000" dir="5400000" rotWithShape="0">
+              <a:srgbClr val="000000">
+                <a:alpha val="38000"/>
+              </a:srgbClr>
+            </a:outerShdw>
+          </a:effectLst>
+        </a:effectStyle>
+        <a:effectStyle>
+          <a:effectLst>
+            <a:outerShdw blurRad="40000" dist="23000" dir="5400000" rotWithShape="0">
+              <a:srgbClr val="000000">
+                <a:alpha val="35000"/>
+              </a:srgbClr>
+            </a:outerShdw>
+          </a:effectLst>
+        </a:effectStyle>
+        <a:effectStyle>
+          <a:effectLst>
+            <a:outerShdw blurRad="40000" dist="23000" dir="5400000" rotWithShape="0">
+              <a:srgbClr val="000000">
+                <a:alpha val="35000"/>
+              </a:srgbClr>
+            </a:outerShdw>
+          </a:effectLst>
+          <a:scene3d>
+            <a:camera prst="orthographicFront">
+              <a:rot lat="0" lon="0" rev="0"/>
+            </a:camera>
+            <a:lightRig rig="threePt" dir="t">
+              <a:rot lat="0" lon="0" rev="1200000"/>
+            </a:lightRig>
+          </a:scene3d>
+          <a:sp3d>
+            <a:bevelT w="63500" h="25400"/>
+          </a:sp3d>
+        </a:effectStyle>
+      </a:effectStyleLst>
+      <a:bgFillStyleLst>
+        <a:solidFill>
+          <a:schemeClr val="phClr"/>
+        </a:solidFill>
+        <a:gradFill rotWithShape="1">
+          <a:gsLst>
+            <a:gs pos="0">
+              <a:schemeClr val="phClr">
+                <a:tint val="40000"/>
+                <a:satMod val="350000"/>
+              </a:schemeClr>
+            </a:gs>
+            <a:gs pos="40000">
+              <a:schemeClr val="phClr">
+                <a:tint val="45000"/>
+                <a:shade val="99000"/>
+                <a:satMod val="350000"/>
+              </a:schemeClr>
+            </a:gs>
+            <a:gs pos="100000">
+              <a:schemeClr val="phClr">
+                <a:shade val="20000"/>
+                <a:satMod val="255000"/>
+              </a:schemeClr>
+            </a:gs>
+          </a:gsLst>
+          <a:path path="circle">
+            <a:fillToRect l="50000" t="-80000" r="50000" b="180000"/>
+          </a:path>
+        </a:gradFill>
+        <a:gradFill rotWithShape="1">
+          <a:gsLst>
+            <a:gs pos="0">
+              <a:schemeClr val="phClr">
+                <a:tint val="80000"/>
+                <a:satMod val="300000"/>
+              </a:schemeClr>
+            </a:gs>
+            <a:gs pos="100000">
+              <a:schemeClr val="phClr">
+                <a:shade val="30000"/>
+                <a:satMod val="200000"/>
+              </a:schemeClr>
+            </a:gs>
+          </a:gsLst>
+          <a:path path="circle">
+            <a:fillToRect l="50000" t="50000" r="50000" b="50000"/>
+          </a:path>
+        </a:gradFill>
+      </a:bgFillStyleLst>
+    </a:fmtScheme>
+  </a:themeElements>
+</a:theme>
+</file>
+
+<file path=ppt/theme/theme2.xml><?xml version="1.0" encoding="utf-8"?>
 <a:theme xmlns:a="http://schemas.openxmlformats.org/drawingml/2006/main" xmlns:r="http://schemas.openxmlformats.org/officeDocument/2006/relationships">
   <a:themeElements>
     <a:clrScheme name="Default">
@@ -34476,283 +40852,4 @@
     </a:fmtScheme>
   </a:themeElements>
 </a:theme>
-</file>
-
-<file path=ppt/theme/theme2.xml><?xml version="1.0" encoding="utf-8"?>
-<a:theme xmlns:a="http://schemas.openxmlformats.org/drawingml/2006/main" xmlns:r="http://schemas.openxmlformats.org/officeDocument/2006/relationships" name="Office Theme">
-  <a:themeElements>
-    <a:clrScheme name="Office">
-      <a:dk1>
-        <a:srgbClr val="000000"/>
-      </a:dk1>
-      <a:lt1>
-        <a:srgbClr val="FFFFFF"/>
-      </a:lt1>
-      <a:dk2>
-        <a:srgbClr val="1F497D"/>
-      </a:dk2>
-      <a:lt2>
-        <a:srgbClr val="EEECE1"/>
-      </a:lt2>
-      <a:accent1>
-        <a:srgbClr val="4F81BD"/>
-      </a:accent1>
-      <a:accent2>
-        <a:srgbClr val="C0504D"/>
-      </a:accent2>
-      <a:accent3>
-        <a:srgbClr val="9BBB59"/>
-      </a:accent3>
-      <a:accent4>
-        <a:srgbClr val="8064A2"/>
-      </a:accent4>
-      <a:accent5>
-        <a:srgbClr val="4BACC6"/>
-      </a:accent5>
-      <a:accent6>
-        <a:srgbClr val="F79646"/>
-      </a:accent6>
-      <a:hlink>
-        <a:srgbClr val="0000FF"/>
-      </a:hlink>
-      <a:folHlink>
-        <a:srgbClr val="800080"/>
-      </a:folHlink>
-    </a:clrScheme>
-    <a:fontScheme name="Office">
-      <a:majorFont>
-        <a:latin typeface="Arial"/>
-        <a:ea typeface=""/>
-        <a:cs typeface=""/>
-        <a:font script="Jpan" typeface="ＭＳ Ｐゴシック"/>
-        <a:font script="Hang" typeface="맑은 고딕"/>
-        <a:font script="Hans" typeface="宋体"/>
-        <a:font script="Hant" typeface="新細明體"/>
-        <a:font script="Arab" typeface="Times New Roman"/>
-        <a:font script="Hebr" typeface="Times New Roman"/>
-        <a:font script="Thai" typeface="Angsana New"/>
-        <a:font script="Ethi" typeface="Nyala"/>
-        <a:font script="Beng" typeface="Vrinda"/>
-        <a:font script="Gujr" typeface="Shruti"/>
-        <a:font script="Khmr" typeface="MoolBoran"/>
-        <a:font script="Knda" typeface="Tunga"/>
-        <a:font script="Guru" typeface="Raavi"/>
-        <a:font script="Cans" typeface="Euphemia"/>
-        <a:font script="Cher" typeface="Plantagenet Cherokee"/>
-        <a:font script="Yiii" typeface="Microsoft Yi Baiti"/>
-        <a:font script="Tibt" typeface="Microsoft Himalaya"/>
-        <a:font script="Thaa" typeface="MV Boli"/>
-        <a:font script="Deva" typeface="Mangal"/>
-        <a:font script="Telu" typeface="Gautami"/>
-        <a:font script="Taml" typeface="Latha"/>
-        <a:font script="Syrc" typeface="Estrangelo Edessa"/>
-        <a:font script="Orya" typeface="Kalinga"/>
-        <a:font script="Mlym" typeface="Kartika"/>
-        <a:font script="Laoo" typeface="DokChampa"/>
-        <a:font script="Sinh" typeface="Iskoola Pota"/>
-        <a:font script="Mong" typeface="Mongolian Baiti"/>
-        <a:font script="Viet" typeface="Times New Roman"/>
-        <a:font script="Uigh" typeface="Microsoft Uighur"/>
-        <a:font script="Geor" typeface="Sylfaen"/>
-      </a:majorFont>
-      <a:minorFont>
-        <a:latin typeface="Arial"/>
-        <a:ea typeface=""/>
-        <a:cs typeface=""/>
-        <a:font script="Jpan" typeface="ＭＳ Ｐゴシック"/>
-        <a:font script="Hang" typeface="맑은 고딕"/>
-        <a:font script="Hans" typeface="宋体"/>
-        <a:font script="Hant" typeface="新細明體"/>
-        <a:font script="Arab" typeface="Arial"/>
-        <a:font script="Hebr" typeface="Arial"/>
-        <a:font script="Thai" typeface="Cordia New"/>
-        <a:font script="Ethi" typeface="Nyala"/>
-        <a:font script="Beng" typeface="Vrinda"/>
-        <a:font script="Gujr" typeface="Shruti"/>
-        <a:font script="Khmr" typeface="DaunPenh"/>
-        <a:font script="Knda" typeface="Tunga"/>
-        <a:font script="Guru" typeface="Raavi"/>
-        <a:font script="Cans" typeface="Euphemia"/>
-        <a:font script="Cher" typeface="Plantagenet Cherokee"/>
-        <a:font script="Yiii" typeface="Microsoft Yi Baiti"/>
-        <a:font script="Tibt" typeface="Microsoft Himalaya"/>
-        <a:font script="Thaa" typeface="MV Boli"/>
-        <a:font script="Deva" typeface="Mangal"/>
-        <a:font script="Telu" typeface="Gautami"/>
-        <a:font script="Taml" typeface="Latha"/>
-        <a:font script="Syrc" typeface="Estrangelo Edessa"/>
-        <a:font script="Orya" typeface="Kalinga"/>
-        <a:font script="Mlym" typeface="Kartika"/>
-        <a:font script="Laoo" typeface="DokChampa"/>
-        <a:font script="Sinh" typeface="Iskoola Pota"/>
-        <a:font script="Mong" typeface="Mongolian Baiti"/>
-        <a:font script="Viet" typeface="Arial"/>
-        <a:font script="Uigh" typeface="Microsoft Uighur"/>
-        <a:font script="Geor" typeface="Sylfaen"/>
-      </a:minorFont>
-    </a:fontScheme>
-    <a:fmtScheme name="Office">
-      <a:fillStyleLst>
-        <a:solidFill>
-          <a:schemeClr val="phClr"/>
-        </a:solidFill>
-        <a:gradFill rotWithShape="1">
-          <a:gsLst>
-            <a:gs pos="0">
-              <a:schemeClr val="phClr">
-                <a:tint val="50000"/>
-                <a:satMod val="300000"/>
-              </a:schemeClr>
-            </a:gs>
-            <a:gs pos="35000">
-              <a:schemeClr val="phClr">
-                <a:tint val="37000"/>
-                <a:satMod val="300000"/>
-              </a:schemeClr>
-            </a:gs>
-            <a:gs pos="100000">
-              <a:schemeClr val="phClr">
-                <a:tint val="15000"/>
-                <a:satMod val="350000"/>
-              </a:schemeClr>
-            </a:gs>
-          </a:gsLst>
-          <a:lin ang="16200000" scaled="1"/>
-        </a:gradFill>
-        <a:gradFill rotWithShape="1">
-          <a:gsLst>
-            <a:gs pos="0">
-              <a:schemeClr val="phClr">
-                <a:tint val="100000"/>
-                <a:shade val="100000"/>
-                <a:satMod val="130000"/>
-              </a:schemeClr>
-            </a:gs>
-            <a:gs pos="100000">
-              <a:schemeClr val="phClr">
-                <a:tint val="50000"/>
-                <a:shade val="100000"/>
-                <a:satMod val="350000"/>
-              </a:schemeClr>
-            </a:gs>
-          </a:gsLst>
-          <a:lin ang="16200000" scaled="0"/>
-        </a:gradFill>
-      </a:fillStyleLst>
-      <a:lnStyleLst>
-        <a:ln w="9525" cap="flat" cmpd="sng" algn="ctr">
-          <a:solidFill>
-            <a:schemeClr val="phClr">
-              <a:shade val="95000"/>
-              <a:satMod val="105000"/>
-            </a:schemeClr>
-          </a:solidFill>
-          <a:prstDash val="solid"/>
-        </a:ln>
-        <a:ln w="25400" cap="flat" cmpd="sng" algn="ctr">
-          <a:solidFill>
-            <a:schemeClr val="phClr"/>
-          </a:solidFill>
-          <a:prstDash val="solid"/>
-        </a:ln>
-        <a:ln w="38100" cap="flat" cmpd="sng" algn="ctr">
-          <a:solidFill>
-            <a:schemeClr val="phClr"/>
-          </a:solidFill>
-          <a:prstDash val="solid"/>
-        </a:ln>
-      </a:lnStyleLst>
-      <a:effectStyleLst>
-        <a:effectStyle>
-          <a:effectLst>
-            <a:outerShdw blurRad="40000" dist="20000" dir="5400000" rotWithShape="0">
-              <a:srgbClr val="000000">
-                <a:alpha val="38000"/>
-              </a:srgbClr>
-            </a:outerShdw>
-          </a:effectLst>
-        </a:effectStyle>
-        <a:effectStyle>
-          <a:effectLst>
-            <a:outerShdw blurRad="40000" dist="23000" dir="5400000" rotWithShape="0">
-              <a:srgbClr val="000000">
-                <a:alpha val="35000"/>
-              </a:srgbClr>
-            </a:outerShdw>
-          </a:effectLst>
-        </a:effectStyle>
-        <a:effectStyle>
-          <a:effectLst>
-            <a:outerShdw blurRad="40000" dist="23000" dir="5400000" rotWithShape="0">
-              <a:srgbClr val="000000">
-                <a:alpha val="35000"/>
-              </a:srgbClr>
-            </a:outerShdw>
-          </a:effectLst>
-          <a:scene3d>
-            <a:camera prst="orthographicFront">
-              <a:rot lat="0" lon="0" rev="0"/>
-            </a:camera>
-            <a:lightRig rig="threePt" dir="t">
-              <a:rot lat="0" lon="0" rev="1200000"/>
-            </a:lightRig>
-          </a:scene3d>
-          <a:sp3d>
-            <a:bevelT w="63500" h="25400"/>
-          </a:sp3d>
-        </a:effectStyle>
-      </a:effectStyleLst>
-      <a:bgFillStyleLst>
-        <a:solidFill>
-          <a:schemeClr val="phClr"/>
-        </a:solidFill>
-        <a:gradFill rotWithShape="1">
-          <a:gsLst>
-            <a:gs pos="0">
-              <a:schemeClr val="phClr">
-                <a:tint val="40000"/>
-                <a:satMod val="350000"/>
-              </a:schemeClr>
-            </a:gs>
-            <a:gs pos="40000">
-              <a:schemeClr val="phClr">
-                <a:tint val="45000"/>
-                <a:shade val="99000"/>
-                <a:satMod val="350000"/>
-              </a:schemeClr>
-            </a:gs>
-            <a:gs pos="100000">
-              <a:schemeClr val="phClr">
-                <a:shade val="20000"/>
-                <a:satMod val="255000"/>
-              </a:schemeClr>
-            </a:gs>
-          </a:gsLst>
-          <a:path path="circle">
-            <a:fillToRect l="50000" t="-80000" r="50000" b="180000"/>
-          </a:path>
-        </a:gradFill>
-        <a:gradFill rotWithShape="1">
-          <a:gsLst>
-            <a:gs pos="0">
-              <a:schemeClr val="phClr">
-                <a:tint val="80000"/>
-                <a:satMod val="300000"/>
-              </a:schemeClr>
-            </a:gs>
-            <a:gs pos="100000">
-              <a:schemeClr val="phClr">
-                <a:shade val="30000"/>
-                <a:satMod val="200000"/>
-              </a:schemeClr>
-            </a:gs>
-          </a:gsLst>
-          <a:path path="circle">
-            <a:fillToRect l="50000" t="50000" r="50000" b="50000"/>
-          </a:path>
-        </a:gradFill>
-      </a:bgFillStyleLst>
-    </a:fmtScheme>
-  </a:themeElements>
-</a:theme>
 </file>